--- a/6月顔合わせ_コンテンツ概要スライド_オレンジ版.pptx
+++ b/6月顔合わせ_コンテンツ概要スライド_オレンジ版.pptx
@@ -3110,11 +3110,355 @@
             <a:avLst/>
           </a:prstGeom>
           <a:solidFill>
+            <a:srgbClr val="FFFCF2"/>
+          </a:solidFill>
+          <a:ln>
+            <a:noFill/>
+          </a:ln>
+          <a:effectLst/>
+        </p:spPr>
+        <p:style>
+          <a:lnRef idx="1">
+            <a:schemeClr val="accent1"/>
+          </a:lnRef>
+          <a:fillRef idx="3">
+            <a:schemeClr val="accent1"/>
+          </a:fillRef>
+          <a:effectRef idx="2">
+            <a:schemeClr val="accent1"/>
+          </a:effectRef>
+          <a:fontRef idx="minor">
+            <a:schemeClr val="lt1"/>
+          </a:fontRef>
+        </p:style>
+        <p:txBody>
+          <a:bodyPr rtlCol="0" anchor="ctr"/>
+          <a:lstStyle/>
+          <a:p>
+            <a:pPr algn="ctr"/>
+          </a:p>
+        </p:txBody>
+      </p:sp>
+      <p:cxnSp>
+        <p:nvCxnSpPr>
+          <p:cNvPr id="3" name="Connector 2"/>
+          <p:cNvCxnSpPr/>
+          <p:nvPr/>
+        </p:nvCxnSpPr>
+        <p:spPr>
+          <a:xfrm>
+            <a:off x="228600" y="0"/>
+            <a:ext cx="0" cy="6858000"/>
+          </a:xfrm>
+          <a:prstGeom prst="line">
+            <a:avLst/>
+          </a:prstGeom>
+          <a:ln w="12700">
+            <a:solidFill>
+              <a:srgbClr val="4E4454"/>
+            </a:solidFill>
+          </a:ln>
+          <a:effectLst/>
+        </p:spPr>
+        <p:style>
+          <a:lnRef idx="2">
+            <a:schemeClr val="accent1"/>
+          </a:lnRef>
+          <a:fillRef idx="0">
+            <a:schemeClr val="accent1"/>
+          </a:fillRef>
+          <a:effectRef idx="1">
+            <a:schemeClr val="accent1"/>
+          </a:effectRef>
+          <a:fontRef idx="minor">
+            <a:schemeClr val="tx1"/>
+          </a:fontRef>
+        </p:style>
+      </p:cxnSp>
+      <p:sp>
+        <p:nvSpPr>
+          <p:cNvPr id="4" name="Rectangle 3"/>
+          <p:cNvSpPr/>
+          <p:nvPr/>
+        </p:nvSpPr>
+        <p:spPr>
+          <a:xfrm>
+            <a:off x="502920" y="868680"/>
+            <a:ext cx="2880360" cy="502920"/>
+          </a:xfrm>
+          <a:prstGeom prst="rect">
+            <a:avLst/>
+          </a:prstGeom>
+          <a:solidFill>
+            <a:srgbClr val="FFFFFF"/>
+          </a:solidFill>
+          <a:ln w="25400">
+            <a:solidFill>
+              <a:srgbClr val="4E4454"/>
+            </a:solidFill>
+          </a:ln>
+          <a:effectLst/>
+        </p:spPr>
+        <p:style>
+          <a:lnRef idx="1">
+            <a:schemeClr val="accent1"/>
+          </a:lnRef>
+          <a:fillRef idx="3">
+            <a:schemeClr val="accent1"/>
+          </a:fillRef>
+          <a:effectRef idx="2">
+            <a:schemeClr val="accent1"/>
+          </a:effectRef>
+          <a:fontRef idx="minor">
+            <a:schemeClr val="lt1"/>
+          </a:fontRef>
+        </p:style>
+        <p:txBody>
+          <a:bodyPr rtlCol="0" anchor="ctr"/>
+          <a:lstStyle/>
+          <a:p>
+            <a:pPr algn="ctr"/>
+          </a:p>
+        </p:txBody>
+      </p:sp>
+      <p:sp>
+        <p:nvSpPr>
+          <p:cNvPr id="5" name="TextBox 4"/>
+          <p:cNvSpPr txBox="1"/>
+          <p:nvPr/>
+        </p:nvSpPr>
+        <p:spPr>
+          <a:xfrm>
+            <a:off x="502920" y="868680"/>
+            <a:ext cx="2880360" cy="502920"/>
+          </a:xfrm>
+          <a:prstGeom prst="rect">
+            <a:avLst/>
+          </a:prstGeom>
+          <a:noFill/>
+        </p:spPr>
+        <p:txBody>
+          <a:bodyPr wrap="square" anchor="ctr" lIns="0" rIns="0" tIns="0" bIns="0">
+            <a:spAutoFit/>
+          </a:bodyPr>
+          <a:lstStyle/>
+          <a:p>
+            <a:pPr algn="ctr"/>
+            <a:r>
+              <a:rPr sz="1600" b="1">
+                <a:solidFill>
+                  <a:srgbClr val="4E4454"/>
+                </a:solidFill>
+                <a:latin typeface="Yu Gothic"/>
+              </a:rPr>
+              <a:t>27新卒</a:t>
+            </a:r>
+          </a:p>
+        </p:txBody>
+      </p:sp>
+      <p:sp>
+        <p:nvSpPr>
+          <p:cNvPr id="6" name="TextBox 5"/>
+          <p:cNvSpPr txBox="1"/>
+          <p:nvPr/>
+        </p:nvSpPr>
+        <p:spPr>
+          <a:xfrm>
+            <a:off x="502920" y="1600200"/>
+            <a:ext cx="9000000" cy="1500000"/>
+          </a:xfrm>
+          <a:prstGeom prst="rect">
+            <a:avLst/>
+          </a:prstGeom>
+          <a:noFill/>
+        </p:spPr>
+        <p:txBody>
+          <a:bodyPr wrap="square" anchor="t" lIns="0" rIns="0" tIns="0" bIns="0">
+            <a:spAutoFit/>
+          </a:bodyPr>
+          <a:lstStyle/>
+          <a:p>
+            <a:pPr algn="l">
+              <a:lnSpc>
+                <a:spcPct val="105000"/>
+              </a:lnSpc>
+            </a:pPr>
+            <a:r>
+              <a:rPr sz="5400" b="1">
+                <a:solidFill>
+                  <a:srgbClr val="4E4454"/>
+                </a:solidFill>
+                <a:latin typeface="Yu Gothic"/>
+              </a:rPr>
+              <a:t>内定承諾者</a:t>
+            </a:r>
+          </a:p>
+          <a:p>
+            <a:pPr algn="l">
+              <a:lnSpc>
+                <a:spcPct val="105000"/>
+              </a:lnSpc>
+            </a:pPr>
+            <a:r>
+              <a:rPr sz="5400" b="1">
+                <a:solidFill>
+                  <a:srgbClr val="4E4454"/>
+                </a:solidFill>
+                <a:latin typeface="Yu Gothic"/>
+              </a:rPr>
+              <a:t>顔合わせ</a:t>
+            </a:r>
+          </a:p>
+        </p:txBody>
+      </p:sp>
+      <p:sp>
+        <p:nvSpPr>
+          <p:cNvPr id="7" name="TextBox 6"/>
+          <p:cNvSpPr txBox="1"/>
+          <p:nvPr/>
+        </p:nvSpPr>
+        <p:spPr>
+          <a:xfrm>
+            <a:off x="502920" y="3550000"/>
+            <a:ext cx="9000000" cy="500000"/>
+          </a:xfrm>
+          <a:prstGeom prst="rect">
+            <a:avLst/>
+          </a:prstGeom>
+          <a:noFill/>
+        </p:spPr>
+        <p:txBody>
+          <a:bodyPr wrap="square" anchor="t" lIns="0" rIns="0" tIns="0" bIns="0">
+            <a:spAutoFit/>
+          </a:bodyPr>
+          <a:lstStyle/>
+          <a:p>
+            <a:pPr algn="l"/>
+            <a:r>
+              <a:rPr sz="2000" b="1">
+                <a:solidFill>
+                  <a:srgbClr val="FF8762"/>
+                </a:solidFill>
+                <a:latin typeface="Yu Gothic"/>
+              </a:rPr>
+              <a:t>2026年6月　／　Zoom　／　60分</a:t>
+            </a:r>
+          </a:p>
+        </p:txBody>
+      </p:sp>
+      <p:sp>
+        <p:nvSpPr>
+          <p:cNvPr id="8" name="Rounded Rectangle 7"/>
+          <p:cNvSpPr/>
+          <p:nvPr/>
+        </p:nvSpPr>
+        <p:spPr>
+          <a:xfrm>
+            <a:off x="8800000" y="1100000"/>
+            <a:ext cx="2900000" cy="2100000"/>
+          </a:xfrm>
+          <a:prstGeom prst="roundRect">
+            <a:avLst>
+              <a:gd name="adj" fmla="val 8000"/>
+            </a:avLst>
+          </a:prstGeom>
+          <a:solidFill>
+            <a:srgbClr val="FF8762"/>
+          </a:solidFill>
+          <a:ln>
+            <a:noFill/>
+          </a:ln>
+          <a:effectLst/>
+        </p:spPr>
+        <p:style>
+          <a:lnRef idx="1">
+            <a:schemeClr val="accent1"/>
+          </a:lnRef>
+          <a:fillRef idx="3">
+            <a:schemeClr val="accent1"/>
+          </a:fillRef>
+          <a:effectRef idx="2">
+            <a:schemeClr val="accent1"/>
+          </a:effectRef>
+          <a:fontRef idx="minor">
+            <a:schemeClr val="lt1"/>
+          </a:fontRef>
+        </p:style>
+        <p:txBody>
+          <a:bodyPr rtlCol="0" anchor="ctr"/>
+          <a:lstStyle/>
+          <a:p>
+            <a:pPr algn="ctr"/>
+          </a:p>
+        </p:txBody>
+      </p:sp>
+      <p:sp>
+        <p:nvSpPr>
+          <p:cNvPr id="9" name="Rounded Rectangle 8"/>
+          <p:cNvSpPr/>
+          <p:nvPr/>
+        </p:nvSpPr>
+        <p:spPr>
+          <a:xfrm>
+            <a:off x="9300000" y="1700000"/>
+            <a:ext cx="2300000" cy="1700000"/>
+          </a:xfrm>
+          <a:prstGeom prst="roundRect">
+            <a:avLst>
+              <a:gd name="adj" fmla="val 8000"/>
+            </a:avLst>
+          </a:prstGeom>
+          <a:solidFill>
+            <a:srgbClr val="FFCD34"/>
+          </a:solidFill>
+          <a:ln>
+            <a:noFill/>
+          </a:ln>
+          <a:effectLst/>
+        </p:spPr>
+        <p:style>
+          <a:lnRef idx="1">
+            <a:schemeClr val="accent1"/>
+          </a:lnRef>
+          <a:fillRef idx="3">
+            <a:schemeClr val="accent1"/>
+          </a:fillRef>
+          <a:effectRef idx="2">
+            <a:schemeClr val="accent1"/>
+          </a:effectRef>
+          <a:fontRef idx="minor">
+            <a:schemeClr val="lt1"/>
+          </a:fontRef>
+        </p:style>
+        <p:txBody>
+          <a:bodyPr rtlCol="0" anchor="ctr"/>
+          <a:lstStyle/>
+          <a:p>
+            <a:pPr algn="ctr"/>
+          </a:p>
+        </p:txBody>
+      </p:sp>
+      <p:sp>
+        <p:nvSpPr>
+          <p:cNvPr id="10" name="Oval 9"/>
+          <p:cNvSpPr/>
+          <p:nvPr/>
+        </p:nvSpPr>
+        <p:spPr>
+          <a:xfrm>
+            <a:off x="9700000" y="2100000"/>
+            <a:ext cx="900000" cy="900000"/>
+          </a:xfrm>
+          <a:prstGeom prst="ellipse">
+            <a:avLst/>
+          </a:prstGeom>
+          <a:solidFill>
             <a:srgbClr val="FFFFFF"/>
           </a:solidFill>
           <a:ln>
             <a:noFill/>
           </a:ln>
+          <a:effectLst/>
         </p:spPr>
         <p:style>
           <a:lnRef idx="1">
@@ -3138,26 +3482,62 @@
           </a:p>
         </p:txBody>
       </p:sp>
-      <p:sp>
-        <p:nvSpPr>
-          <p:cNvPr id="3" name="Rectangle 2"/>
+      <p:cxnSp>
+        <p:nvCxnSpPr>
+          <p:cNvPr id="11" name="Connector 10"/>
+          <p:cNvCxnSpPr/>
+          <p:nvPr/>
+        </p:nvCxnSpPr>
+        <p:spPr>
+          <a:xfrm>
+            <a:off x="502920" y="5800000"/>
+            <a:ext cx="11183112" cy="0"/>
+          </a:xfrm>
+          <a:prstGeom prst="line">
+            <a:avLst/>
+          </a:prstGeom>
+          <a:ln w="12700">
+            <a:solidFill>
+              <a:srgbClr val="4E4454"/>
+            </a:solidFill>
+          </a:ln>
+        </p:spPr>
+        <p:style>
+          <a:lnRef idx="2">
+            <a:schemeClr val="accent1"/>
+          </a:lnRef>
+          <a:fillRef idx="0">
+            <a:schemeClr val="accent1"/>
+          </a:fillRef>
+          <a:effectRef idx="1">
+            <a:schemeClr val="accent1"/>
+          </a:effectRef>
+          <a:fontRef idx="minor">
+            <a:schemeClr val="tx1"/>
+          </a:fontRef>
+        </p:style>
+      </p:cxnSp>
+      <p:sp>
+        <p:nvSpPr>
+          <p:cNvPr id="12" name="Oval 11"/>
           <p:cNvSpPr/>
           <p:nvPr/>
         </p:nvSpPr>
         <p:spPr>
           <a:xfrm>
-            <a:off x="0" y="0"/>
-            <a:ext cx="201168" cy="6858000"/>
-          </a:xfrm>
-          <a:prstGeom prst="rect">
+            <a:off x="502920" y="6050000"/>
+            <a:ext cx="250000" cy="250000"/>
+          </a:xfrm>
+          <a:prstGeom prst="ellipse">
             <a:avLst/>
           </a:prstGeom>
           <a:solidFill>
-            <a:srgbClr val="FF7200"/>
+            <a:srgbClr val="FF8762"/>
           </a:solidFill>
           <a:ln>
             <a:noFill/>
           </a:ln>
+          <a:effectLst/>
         </p:spPr>
         <p:style>
           <a:lnRef idx="1">
@@ -3183,100 +3563,14 @@
       </p:sp>
       <p:sp>
         <p:nvSpPr>
-          <p:cNvPr id="4" name="Rectangle 3"/>
-          <p:cNvSpPr/>
-          <p:nvPr/>
-        </p:nvSpPr>
-        <p:spPr>
-          <a:xfrm>
-            <a:off x="0" y="5029200"/>
-            <a:ext cx="12188952" cy="1828800"/>
-          </a:xfrm>
-          <a:prstGeom prst="rect">
-            <a:avLst/>
-          </a:prstGeom>
-          <a:solidFill>
-            <a:srgbClr val="FFF0E0"/>
-          </a:solidFill>
-          <a:ln>
-            <a:noFill/>
-          </a:ln>
-        </p:spPr>
-        <p:style>
-          <a:lnRef idx="1">
-            <a:schemeClr val="accent1"/>
-          </a:lnRef>
-          <a:fillRef idx="3">
-            <a:schemeClr val="accent1"/>
-          </a:fillRef>
-          <a:effectRef idx="2">
-            <a:schemeClr val="accent1"/>
-          </a:effectRef>
-          <a:fontRef idx="minor">
-            <a:schemeClr val="lt1"/>
-          </a:fontRef>
-        </p:style>
-        <p:txBody>
-          <a:bodyPr rtlCol="0" anchor="ctr"/>
-          <a:lstStyle/>
-          <a:p>
-            <a:pPr algn="ctr"/>
-          </a:p>
-        </p:txBody>
-      </p:sp>
-      <p:sp>
-        <p:nvSpPr>
-          <p:cNvPr id="5" name="Rectangle 4"/>
-          <p:cNvSpPr/>
-          <p:nvPr/>
-        </p:nvSpPr>
-        <p:spPr>
-          <a:xfrm>
-            <a:off x="0" y="5029200"/>
-            <a:ext cx="12188952" cy="50800"/>
-          </a:xfrm>
-          <a:prstGeom prst="rect">
-            <a:avLst/>
-          </a:prstGeom>
-          <a:solidFill>
-            <a:srgbClr val="FF7200"/>
-          </a:solidFill>
-          <a:ln>
-            <a:noFill/>
-          </a:ln>
-        </p:spPr>
-        <p:style>
-          <a:lnRef idx="1">
-            <a:schemeClr val="accent1"/>
-          </a:lnRef>
-          <a:fillRef idx="3">
-            <a:schemeClr val="accent1"/>
-          </a:fillRef>
-          <a:effectRef idx="2">
-            <a:schemeClr val="accent1"/>
-          </a:effectRef>
-          <a:fontRef idx="minor">
-            <a:schemeClr val="lt1"/>
-          </a:fontRef>
-        </p:style>
-        <p:txBody>
-          <a:bodyPr rtlCol="0" anchor="ctr"/>
-          <a:lstStyle/>
-          <a:p>
-            <a:pPr algn="ctr"/>
-          </a:p>
-        </p:txBody>
-      </p:sp>
-      <p:sp>
-        <p:nvSpPr>
-          <p:cNvPr id="6" name="TextBox 5"/>
+          <p:cNvPr id="13" name="TextBox 12"/>
           <p:cNvSpPr txBox="1"/>
           <p:nvPr/>
         </p:nvSpPr>
         <p:spPr>
           <a:xfrm>
-            <a:off x="457200" y="914400"/>
-            <a:ext cx="11274552" cy="822960"/>
+            <a:off x="850000" y="6020000"/>
+            <a:ext cx="8000000" cy="400000"/>
           </a:xfrm>
           <a:prstGeom prst="rect">
             <a:avLst/>
@@ -3284,121 +3578,16 @@
           <a:noFill/>
         </p:spPr>
         <p:txBody>
-          <a:bodyPr wrap="square">
+          <a:bodyPr wrap="square" anchor="ctr" lIns="0" rIns="0" tIns="0" bIns="0">
             <a:spAutoFit/>
           </a:bodyPr>
           <a:lstStyle/>
           <a:p>
-            <a:pPr algn="ctr"/>
-            <a:r>
-              <a:rPr sz="3200" b="0">
-                <a:solidFill>
-                  <a:srgbClr val="555555"/>
-                </a:solidFill>
-                <a:latin typeface="Yu Gothic"/>
-              </a:rPr>
-              <a:t>27新卒</a:t>
-            </a:r>
-          </a:p>
-        </p:txBody>
-      </p:sp>
-      <p:sp>
-        <p:nvSpPr>
-          <p:cNvPr id="7" name="TextBox 6"/>
-          <p:cNvSpPr txBox="1"/>
-          <p:nvPr/>
-        </p:nvSpPr>
-        <p:spPr>
-          <a:xfrm>
-            <a:off x="457200" y="1691640"/>
-            <a:ext cx="11274552" cy="1463040"/>
-          </a:xfrm>
-          <a:prstGeom prst="rect">
-            <a:avLst/>
-          </a:prstGeom>
-          <a:noFill/>
-        </p:spPr>
-        <p:txBody>
-          <a:bodyPr wrap="square">
-            <a:spAutoFit/>
-          </a:bodyPr>
-          <a:lstStyle/>
-          <a:p>
-            <a:pPr algn="ctr"/>
-            <a:r>
-              <a:rPr sz="6800" b="1">
-                <a:solidFill>
-                  <a:srgbClr val="1A1A1A"/>
-                </a:solidFill>
-                <a:latin typeface="Yu Gothic"/>
-              </a:rPr>
-              <a:t>内定承諾者 顔合わせ</a:t>
-            </a:r>
-          </a:p>
-        </p:txBody>
-      </p:sp>
-      <p:sp>
-        <p:nvSpPr>
-          <p:cNvPr id="8" name="TextBox 7"/>
-          <p:cNvSpPr txBox="1"/>
-          <p:nvPr/>
-        </p:nvSpPr>
-        <p:spPr>
-          <a:xfrm>
-            <a:off x="457200" y="3246120"/>
-            <a:ext cx="11274552" cy="822960"/>
-          </a:xfrm>
-          <a:prstGeom prst="rect">
-            <a:avLst/>
-          </a:prstGeom>
-          <a:noFill/>
-        </p:spPr>
-        <p:txBody>
-          <a:bodyPr wrap="square">
-            <a:spAutoFit/>
-          </a:bodyPr>
-          <a:lstStyle/>
-          <a:p>
-            <a:pPr algn="ctr"/>
-            <a:r>
-              <a:rPr sz="3000" b="0">
-                <a:solidFill>
-                  <a:srgbClr val="FF7200"/>
-                </a:solidFill>
-                <a:latin typeface="Yu Gothic"/>
-              </a:rPr>
-              <a:t>2026年6月　／　Zoom　／　60分</a:t>
-            </a:r>
-          </a:p>
-        </p:txBody>
-      </p:sp>
-      <p:sp>
-        <p:nvSpPr>
-          <p:cNvPr id="9" name="TextBox 8"/>
-          <p:cNvSpPr txBox="1"/>
-          <p:nvPr/>
-        </p:nvSpPr>
-        <p:spPr>
-          <a:xfrm>
-            <a:off x="457200" y="5212080"/>
-            <a:ext cx="11274552" cy="640080"/>
-          </a:xfrm>
-          <a:prstGeom prst="rect">
-            <a:avLst/>
-          </a:prstGeom>
-          <a:noFill/>
-        </p:spPr>
-        <p:txBody>
-          <a:bodyPr wrap="square">
-            <a:spAutoFit/>
-          </a:bodyPr>
-          <a:lstStyle/>
-          <a:p>
-            <a:pPr algn="ctr"/>
-            <a:r>
-              <a:rPr sz="2600" b="0">
-                <a:solidFill>
-                  <a:srgbClr val="555555"/>
+            <a:pPr algn="l"/>
+            <a:r>
+              <a:rPr sz="1600" b="0">
+                <a:solidFill>
+                  <a:srgbClr val="6B6272"/>
                 </a:solidFill>
                 <a:latin typeface="Yu Gothic"/>
               </a:rPr>
@@ -3440,11 +3629,12 @@
             <a:avLst/>
           </a:prstGeom>
           <a:solidFill>
-            <a:srgbClr val="FFFFFF"/>
+            <a:srgbClr val="FFFCF2"/>
           </a:solidFill>
           <a:ln>
             <a:noFill/>
           </a:ln>
+          <a:effectLst/>
         </p:spPr>
         <p:style>
           <a:lnRef idx="1">
@@ -3468,26 +3658,63 @@
           </a:p>
         </p:txBody>
       </p:sp>
-      <p:sp>
-        <p:nvSpPr>
-          <p:cNvPr id="3" name="Rectangle 2"/>
+      <p:cxnSp>
+        <p:nvCxnSpPr>
+          <p:cNvPr id="3" name="Connector 2"/>
+          <p:cNvCxnSpPr/>
+          <p:nvPr/>
+        </p:nvCxnSpPr>
+        <p:spPr>
+          <a:xfrm>
+            <a:off x="228600" y="0"/>
+            <a:ext cx="0" cy="6858000"/>
+          </a:xfrm>
+          <a:prstGeom prst="line">
+            <a:avLst/>
+          </a:prstGeom>
+          <a:ln w="12700">
+            <a:solidFill>
+              <a:srgbClr val="4E4454"/>
+            </a:solidFill>
+          </a:ln>
+          <a:effectLst/>
+        </p:spPr>
+        <p:style>
+          <a:lnRef idx="2">
+            <a:schemeClr val="accent1"/>
+          </a:lnRef>
+          <a:fillRef idx="0">
+            <a:schemeClr val="accent1"/>
+          </a:fillRef>
+          <a:effectRef idx="1">
+            <a:schemeClr val="accent1"/>
+          </a:effectRef>
+          <a:fontRef idx="minor">
+            <a:schemeClr val="tx1"/>
+          </a:fontRef>
+        </p:style>
+      </p:cxnSp>
+      <p:sp>
+        <p:nvSpPr>
+          <p:cNvPr id="4" name="Rectangle 3"/>
           <p:cNvSpPr/>
           <p:nvPr/>
         </p:nvSpPr>
         <p:spPr>
           <a:xfrm>
-            <a:off x="0" y="0"/>
-            <a:ext cx="201168" cy="6858000"/>
+            <a:off x="365760" y="502920"/>
+            <a:ext cx="4800600" cy="685800"/>
           </a:xfrm>
           <a:prstGeom prst="rect">
             <a:avLst/>
           </a:prstGeom>
           <a:solidFill>
-            <a:srgbClr val="FF7200"/>
+            <a:srgbClr val="4E4454"/>
           </a:solidFill>
           <a:ln>
             <a:noFill/>
           </a:ln>
+          <a:effectLst/>
         </p:spPr>
         <p:style>
           <a:lnRef idx="1">
@@ -3513,14 +3740,14 @@
       </p:sp>
       <p:sp>
         <p:nvSpPr>
-          <p:cNvPr id="4" name="Rectangle 3"/>
+          <p:cNvPr id="5" name="Rectangle 4"/>
           <p:cNvSpPr/>
           <p:nvPr/>
         </p:nvSpPr>
         <p:spPr>
           <a:xfrm>
-            <a:off x="0" y="0"/>
-            <a:ext cx="12188952" cy="1325880"/>
+            <a:off x="320040" y="457200"/>
+            <a:ext cx="4800600" cy="685800"/>
           </a:xfrm>
           <a:prstGeom prst="rect">
             <a:avLst/>
@@ -3528,9 +3755,12 @@
           <a:solidFill>
             <a:srgbClr val="FFFFFF"/>
           </a:solidFill>
-          <a:ln>
-            <a:noFill/>
+          <a:ln w="28575">
+            <a:solidFill>
+              <a:srgbClr val="4E4454"/>
+            </a:solidFill>
           </a:ln>
+          <a:effectLst/>
         </p:spPr>
         <p:style>
           <a:lnRef idx="1">
@@ -3556,24 +3786,64 @@
       </p:sp>
       <p:sp>
         <p:nvSpPr>
-          <p:cNvPr id="5" name="Rectangle 4"/>
+          <p:cNvPr id="6" name="TextBox 5"/>
+          <p:cNvSpPr txBox="1"/>
+          <p:nvPr/>
+        </p:nvSpPr>
+        <p:spPr>
+          <a:xfrm>
+            <a:off x="502920" y="457200"/>
+            <a:ext cx="4500000" cy="685800"/>
+          </a:xfrm>
+          <a:prstGeom prst="rect">
+            <a:avLst/>
+          </a:prstGeom>
+          <a:noFill/>
+        </p:spPr>
+        <p:txBody>
+          <a:bodyPr wrap="square" anchor="ctr" lIns="0" rIns="0" tIns="0" bIns="0">
+            <a:spAutoFit/>
+          </a:bodyPr>
+          <a:lstStyle/>
+          <a:p>
+            <a:pPr algn="l"/>
+            <a:r>
+              <a:rPr sz="2200" b="1">
+                <a:solidFill>
+                  <a:srgbClr val="4E4454"/>
+                </a:solidFill>
+                <a:latin typeface="Yu Gothic"/>
+              </a:rPr>
+              <a:t>今日のゴール</a:t>
+            </a:r>
+          </a:p>
+        </p:txBody>
+      </p:sp>
+      <p:sp>
+        <p:nvSpPr>
+          <p:cNvPr id="7" name="Rounded Rectangle 6"/>
           <p:cNvSpPr/>
           <p:nvPr/>
         </p:nvSpPr>
         <p:spPr>
           <a:xfrm>
-            <a:off x="0" y="1325880"/>
-            <a:ext cx="12188952" cy="38100"/>
-          </a:xfrm>
-          <a:prstGeom prst="rect">
-            <a:avLst/>
+            <a:off x="9994392" y="502920"/>
+            <a:ext cx="1828800" cy="502920"/>
+          </a:xfrm>
+          <a:prstGeom prst="roundRect">
+            <a:avLst>
+              <a:gd name="adj" fmla="val 50000"/>
+            </a:avLst>
           </a:prstGeom>
           <a:solidFill>
-            <a:srgbClr val="FF7200"/>
+            <a:srgbClr val="FFFFFF"/>
           </a:solidFill>
-          <a:ln>
-            <a:noFill/>
+          <a:ln w="19050">
+            <a:solidFill>
+              <a:srgbClr val="4E4454"/>
+            </a:solidFill>
           </a:ln>
+          <a:effectLst/>
         </p:spPr>
         <p:style>
           <a:lnRef idx="1">
@@ -3599,14 +3869,14 @@
       </p:sp>
       <p:sp>
         <p:nvSpPr>
-          <p:cNvPr id="6" name="TextBox 5"/>
+          <p:cNvPr id="8" name="TextBox 7"/>
           <p:cNvSpPr txBox="1"/>
           <p:nvPr/>
         </p:nvSpPr>
         <p:spPr>
           <a:xfrm>
-            <a:off x="457200" y="164592"/>
-            <a:ext cx="9262872" cy="1005840"/>
+            <a:off x="9994392" y="502920"/>
+            <a:ext cx="1828800" cy="502920"/>
           </a:xfrm>
           <a:prstGeom prst="rect">
             <a:avLst/>
@@ -3614,44 +3884,49 @@
           <a:noFill/>
         </p:spPr>
         <p:txBody>
-          <a:bodyPr wrap="square">
+          <a:bodyPr wrap="square" anchor="ctr" lIns="0" rIns="0" tIns="0" bIns="0">
             <a:spAutoFit/>
           </a:bodyPr>
           <a:lstStyle/>
           <a:p>
-            <a:pPr algn="l"/>
-            <a:r>
-              <a:rPr sz="4400" b="1">
-                <a:solidFill>
-                  <a:srgbClr val="1A1A1A"/>
+            <a:pPr algn="ctr"/>
+            <a:r>
+              <a:rPr sz="1400" b="1">
+                <a:solidFill>
+                  <a:srgbClr val="FF8762"/>
                 </a:solidFill>
                 <a:latin typeface="Yu Gothic"/>
               </a:rPr>
-              <a:t>今日のゴール</a:t>
-            </a:r>
-          </a:p>
-        </p:txBody>
-      </p:sp>
-      <p:sp>
-        <p:nvSpPr>
-          <p:cNvPr id="7" name="Rectangle 6"/>
+              <a:t>全体：60分</a:t>
+            </a:r>
+          </a:p>
+        </p:txBody>
+      </p:sp>
+      <p:sp>
+        <p:nvSpPr>
+          <p:cNvPr id="9" name="Rounded Rectangle 8"/>
           <p:cNvSpPr/>
           <p:nvPr/>
         </p:nvSpPr>
         <p:spPr>
           <a:xfrm>
-            <a:off x="9628632" y="164592"/>
-            <a:ext cx="2194560" cy="566928"/>
-          </a:xfrm>
-          <a:prstGeom prst="rect">
-            <a:avLst/>
+            <a:off x="502920" y="1700000"/>
+            <a:ext cx="5550000" cy="3500000"/>
+          </a:xfrm>
+          <a:prstGeom prst="roundRect">
+            <a:avLst>
+              <a:gd name="adj" fmla="val 5000"/>
+            </a:avLst>
           </a:prstGeom>
           <a:solidFill>
-            <a:srgbClr val="FF7200"/>
+            <a:srgbClr val="FFFFFF"/>
           </a:solidFill>
-          <a:ln>
-            <a:noFill/>
+          <a:ln w="22225">
+            <a:solidFill>
+              <a:srgbClr val="4E4454"/>
+            </a:solidFill>
           </a:ln>
+          <a:effectLst/>
         </p:spPr>
         <p:style>
           <a:lnRef idx="1">
@@ -3677,61 +3952,27 @@
       </p:sp>
       <p:sp>
         <p:nvSpPr>
-          <p:cNvPr id="8" name="TextBox 7"/>
-          <p:cNvSpPr txBox="1"/>
-          <p:nvPr/>
-        </p:nvSpPr>
-        <p:spPr>
-          <a:xfrm>
-            <a:off x="9674352" y="201168"/>
-            <a:ext cx="2103120" cy="502920"/>
-          </a:xfrm>
-          <a:prstGeom prst="rect">
-            <a:avLst/>
-          </a:prstGeom>
-          <a:noFill/>
-        </p:spPr>
-        <p:txBody>
-          <a:bodyPr wrap="square">
-            <a:spAutoFit/>
-          </a:bodyPr>
-          <a:lstStyle/>
-          <a:p>
-            <a:pPr algn="ctr"/>
-            <a:r>
-              <a:rPr sz="2400" b="1">
-                <a:solidFill>
-                  <a:srgbClr val="FFFFFF"/>
-                </a:solidFill>
-                <a:latin typeface="Yu Gothic"/>
-              </a:rPr>
-              <a:t>全体：60分</a:t>
-            </a:r>
-          </a:p>
-        </p:txBody>
-      </p:sp>
-      <p:sp>
-        <p:nvSpPr>
-          <p:cNvPr id="9" name="Rectangle 8"/>
+          <p:cNvPr id="10" name="Rounded Rectangle 9"/>
           <p:cNvSpPr/>
           <p:nvPr/>
         </p:nvSpPr>
         <p:spPr>
           <a:xfrm>
-            <a:off x="457200" y="1508760"/>
-            <a:ext cx="5394960" cy="4389120"/>
-          </a:xfrm>
-          <a:prstGeom prst="rect">
-            <a:avLst/>
+            <a:off x="752920" y="1950000"/>
+            <a:ext cx="1700000" cy="600000"/>
+          </a:xfrm>
+          <a:prstGeom prst="roundRect">
+            <a:avLst>
+              <a:gd name="adj" fmla="val 50000"/>
+            </a:avLst>
           </a:prstGeom>
           <a:solidFill>
-            <a:srgbClr val="F4F4F4"/>
+            <a:srgbClr val="FF8762"/>
           </a:solidFill>
           <a:ln>
-            <a:solidFill>
-              <a:srgbClr val="F4F4F4"/>
-            </a:solidFill>
+            <a:noFill/>
           </a:ln>
+          <a:effectLst/>
         </p:spPr>
         <p:style>
           <a:lnRef idx="1">
@@ -3757,24 +3998,154 @@
       </p:sp>
       <p:sp>
         <p:nvSpPr>
-          <p:cNvPr id="10" name="Rectangle 9"/>
+          <p:cNvPr id="11" name="TextBox 10"/>
+          <p:cNvSpPr txBox="1"/>
+          <p:nvPr/>
+        </p:nvSpPr>
+        <p:spPr>
+          <a:xfrm>
+            <a:off x="752920" y="1950000"/>
+            <a:ext cx="1700000" cy="600000"/>
+          </a:xfrm>
+          <a:prstGeom prst="rect">
+            <a:avLst/>
+          </a:prstGeom>
+          <a:noFill/>
+        </p:spPr>
+        <p:txBody>
+          <a:bodyPr wrap="square" anchor="ctr" lIns="0" rIns="0" tIns="0" bIns="0">
+            <a:spAutoFit/>
+          </a:bodyPr>
+          <a:lstStyle/>
+          <a:p>
+            <a:pPr algn="ctr"/>
+            <a:r>
+              <a:rPr sz="1600" b="1">
+                <a:solidFill>
+                  <a:srgbClr val="FFFFFF"/>
+                </a:solidFill>
+                <a:latin typeface="Yu Gothic"/>
+              </a:rPr>
+              <a:t>GOAL  ①</a:t>
+            </a:r>
+          </a:p>
+        </p:txBody>
+      </p:sp>
+      <p:sp>
+        <p:nvSpPr>
+          <p:cNvPr id="12" name="TextBox 11"/>
+          <p:cNvSpPr txBox="1"/>
+          <p:nvPr/>
+        </p:nvSpPr>
+        <p:spPr>
+          <a:xfrm>
+            <a:off x="752920" y="2750000"/>
+            <a:ext cx="5050000" cy="800000"/>
+          </a:xfrm>
+          <a:prstGeom prst="rect">
+            <a:avLst/>
+          </a:prstGeom>
+          <a:noFill/>
+        </p:spPr>
+        <p:txBody>
+          <a:bodyPr wrap="square" anchor="t" lIns="0" rIns="0" tIns="0" bIns="0">
+            <a:spAutoFit/>
+          </a:bodyPr>
+          <a:lstStyle/>
+          <a:p>
+            <a:pPr algn="l"/>
+            <a:r>
+              <a:rPr sz="2400" b="1">
+                <a:solidFill>
+                  <a:srgbClr val="4E4454"/>
+                </a:solidFill>
+                <a:latin typeface="Yu Gothic"/>
+              </a:rPr>
+              <a:t>全員の顔と名前を覚える</a:t>
+            </a:r>
+          </a:p>
+        </p:txBody>
+      </p:sp>
+      <p:sp>
+        <p:nvSpPr>
+          <p:cNvPr id="13" name="TextBox 12"/>
+          <p:cNvSpPr txBox="1"/>
+          <p:nvPr/>
+        </p:nvSpPr>
+        <p:spPr>
+          <a:xfrm>
+            <a:off x="752920" y="3700000"/>
+            <a:ext cx="5050000" cy="1300000"/>
+          </a:xfrm>
+          <a:prstGeom prst="rect">
+            <a:avLst/>
+          </a:prstGeom>
+          <a:noFill/>
+        </p:spPr>
+        <p:txBody>
+          <a:bodyPr wrap="square" anchor="t" lIns="0" rIns="0" tIns="0" bIns="0">
+            <a:spAutoFit/>
+          </a:bodyPr>
+          <a:lstStyle/>
+          <a:p>
+            <a:pPr algn="l">
+              <a:lnSpc>
+                <a:spcPct val="120000"/>
+              </a:lnSpc>
+            </a:pPr>
+            <a:r>
+              <a:rPr sz="1500" b="0">
+                <a:solidFill>
+                  <a:srgbClr val="6B6272"/>
+                </a:solidFill>
+                <a:latin typeface="Yu Gothic"/>
+              </a:rPr>
+              <a:t>→  同期の顔・名前・キャラクターを</a:t>
+            </a:r>
+          </a:p>
+          <a:p>
+            <a:pPr algn="l">
+              <a:lnSpc>
+                <a:spcPct val="120000"/>
+              </a:lnSpc>
+            </a:pPr>
+            <a:r>
+              <a:rPr sz="1500" b="0">
+                <a:solidFill>
+                  <a:srgbClr val="6B6272"/>
+                </a:solidFill>
+                <a:latin typeface="Yu Gothic"/>
+              </a:rPr>
+              <a:t>　 今日だけでひとつながりにする</a:t>
+            </a:r>
+          </a:p>
+        </p:txBody>
+      </p:sp>
+      <p:sp>
+        <p:nvSpPr>
+          <p:cNvPr id="14" name="Rounded Rectangle 13"/>
           <p:cNvSpPr/>
           <p:nvPr/>
         </p:nvSpPr>
         <p:spPr>
           <a:xfrm>
-            <a:off x="457200" y="1508760"/>
-            <a:ext cx="5394960" cy="713232"/>
-          </a:xfrm>
-          <a:prstGeom prst="rect">
-            <a:avLst/>
+            <a:off x="6200000" y="1700000"/>
+            <a:ext cx="5550000" cy="3500000"/>
+          </a:xfrm>
+          <a:prstGeom prst="roundRect">
+            <a:avLst>
+              <a:gd name="adj" fmla="val 5000"/>
+            </a:avLst>
           </a:prstGeom>
           <a:solidFill>
-            <a:srgbClr val="FF7200"/>
+            <a:srgbClr val="FFFFFF"/>
           </a:solidFill>
-          <a:ln>
-            <a:noFill/>
+          <a:ln w="22225">
+            <a:solidFill>
+              <a:srgbClr val="4E4454"/>
+            </a:solidFill>
           </a:ln>
+          <a:effectLst/>
         </p:spPr>
         <p:style>
           <a:lnRef idx="1">
@@ -3800,132 +4171,27 @@
       </p:sp>
       <p:sp>
         <p:nvSpPr>
-          <p:cNvPr id="11" name="TextBox 10"/>
-          <p:cNvSpPr txBox="1"/>
-          <p:nvPr/>
-        </p:nvSpPr>
-        <p:spPr>
-          <a:xfrm>
-            <a:off x="594360" y="1572768"/>
-            <a:ext cx="5212080" cy="594360"/>
-          </a:xfrm>
-          <a:prstGeom prst="rect">
-            <a:avLst/>
-          </a:prstGeom>
-          <a:noFill/>
-        </p:spPr>
-        <p:txBody>
-          <a:bodyPr wrap="square">
-            <a:spAutoFit/>
-          </a:bodyPr>
-          <a:lstStyle/>
-          <a:p>
-            <a:pPr algn="l"/>
-            <a:r>
-              <a:rPr sz="3000" b="1">
-                <a:solidFill>
-                  <a:srgbClr val="FFFFFF"/>
-                </a:solidFill>
-                <a:latin typeface="Yu Gothic"/>
-              </a:rPr>
-              <a:t>GOAL  ①</a:t>
-            </a:r>
-          </a:p>
-        </p:txBody>
-      </p:sp>
-      <p:sp>
-        <p:nvSpPr>
-          <p:cNvPr id="12" name="TextBox 11"/>
-          <p:cNvSpPr txBox="1"/>
-          <p:nvPr/>
-        </p:nvSpPr>
-        <p:spPr>
-          <a:xfrm>
-            <a:off x="640080" y="2377440"/>
-            <a:ext cx="5120640" cy="1280160"/>
-          </a:xfrm>
-          <a:prstGeom prst="rect">
-            <a:avLst/>
-          </a:prstGeom>
-          <a:noFill/>
-        </p:spPr>
-        <p:txBody>
-          <a:bodyPr wrap="square">
-            <a:spAutoFit/>
-          </a:bodyPr>
-          <a:lstStyle/>
-          <a:p>
-            <a:pPr algn="l"/>
-            <a:r>
-              <a:rPr sz="3600" b="1">
-                <a:solidFill>
-                  <a:srgbClr val="1A1A1A"/>
-                </a:solidFill>
-                <a:latin typeface="Yu Gothic"/>
-              </a:rPr>
-              <a:t>全員の顔と名前を覚える</a:t>
-            </a:r>
-          </a:p>
-        </p:txBody>
-      </p:sp>
-      <p:sp>
-        <p:nvSpPr>
-          <p:cNvPr id="13" name="TextBox 12"/>
-          <p:cNvSpPr txBox="1"/>
-          <p:nvPr/>
-        </p:nvSpPr>
-        <p:spPr>
-          <a:xfrm>
-            <a:off x="640080" y="3657600"/>
-            <a:ext cx="5120640" cy="2011680"/>
-          </a:xfrm>
-          <a:prstGeom prst="rect">
-            <a:avLst/>
-          </a:prstGeom>
-          <a:noFill/>
-        </p:spPr>
-        <p:txBody>
-          <a:bodyPr wrap="square">
-            <a:spAutoFit/>
-          </a:bodyPr>
-          <a:lstStyle/>
-          <a:p>
-            <a:pPr algn="l"/>
-            <a:r>
-              <a:rPr sz="2400" b="0">
-                <a:solidFill>
-                  <a:srgbClr val="555555"/>
-                </a:solidFill>
-                <a:latin typeface="Yu Gothic"/>
-              </a:rPr>
-              <a:t>→  同期の顔・名前・キャラクターを
-　  今日だけでひとつながりにする</a:t>
-            </a:r>
-          </a:p>
-        </p:txBody>
-      </p:sp>
-      <p:sp>
-        <p:nvSpPr>
-          <p:cNvPr id="14" name="Rectangle 13"/>
+          <p:cNvPr id="15" name="Rounded Rectangle 14"/>
           <p:cNvSpPr/>
           <p:nvPr/>
         </p:nvSpPr>
         <p:spPr>
           <a:xfrm>
-            <a:off x="6492240" y="1508760"/>
-            <a:ext cx="5394960" cy="4389120"/>
-          </a:xfrm>
-          <a:prstGeom prst="rect">
-            <a:avLst/>
+            <a:off x="6450000" y="1950000"/>
+            <a:ext cx="1700000" cy="600000"/>
+          </a:xfrm>
+          <a:prstGeom prst="roundRect">
+            <a:avLst>
+              <a:gd name="adj" fmla="val 50000"/>
+            </a:avLst>
           </a:prstGeom>
           <a:solidFill>
-            <a:srgbClr val="F4F4F4"/>
+            <a:srgbClr val="FF8762"/>
           </a:solidFill>
           <a:ln>
-            <a:solidFill>
-              <a:srgbClr val="F4F4F4"/>
-            </a:solidFill>
+            <a:noFill/>
           </a:ln>
+          <a:effectLst/>
         </p:spPr>
         <p:style>
           <a:lnRef idx="1">
@@ -3951,24 +4217,164 @@
       </p:sp>
       <p:sp>
         <p:nvSpPr>
-          <p:cNvPr id="15" name="Rectangle 14"/>
+          <p:cNvPr id="16" name="TextBox 15"/>
+          <p:cNvSpPr txBox="1"/>
+          <p:nvPr/>
+        </p:nvSpPr>
+        <p:spPr>
+          <a:xfrm>
+            <a:off x="6450000" y="1950000"/>
+            <a:ext cx="1700000" cy="600000"/>
+          </a:xfrm>
+          <a:prstGeom prst="rect">
+            <a:avLst/>
+          </a:prstGeom>
+          <a:noFill/>
+        </p:spPr>
+        <p:txBody>
+          <a:bodyPr wrap="square" anchor="ctr" lIns="0" rIns="0" tIns="0" bIns="0">
+            <a:spAutoFit/>
+          </a:bodyPr>
+          <a:lstStyle/>
+          <a:p>
+            <a:pPr algn="ctr"/>
+            <a:r>
+              <a:rPr sz="1600" b="1">
+                <a:solidFill>
+                  <a:srgbClr val="FFFFFF"/>
+                </a:solidFill>
+                <a:latin typeface="Yu Gothic"/>
+              </a:rPr>
+              <a:t>GOAL  ②</a:t>
+            </a:r>
+          </a:p>
+        </p:txBody>
+      </p:sp>
+      <p:sp>
+        <p:nvSpPr>
+          <p:cNvPr id="17" name="TextBox 16"/>
+          <p:cNvSpPr txBox="1"/>
+          <p:nvPr/>
+        </p:nvSpPr>
+        <p:spPr>
+          <a:xfrm>
+            <a:off x="6450000" y="2750000"/>
+            <a:ext cx="5050000" cy="800000"/>
+          </a:xfrm>
+          <a:prstGeom prst="rect">
+            <a:avLst/>
+          </a:prstGeom>
+          <a:noFill/>
+        </p:spPr>
+        <p:txBody>
+          <a:bodyPr wrap="square" anchor="t" lIns="0" rIns="0" tIns="0" bIns="0">
+            <a:spAutoFit/>
+          </a:bodyPr>
+          <a:lstStyle/>
+          <a:p>
+            <a:pPr algn="l"/>
+            <a:r>
+              <a:rPr sz="2400" b="1">
+                <a:solidFill>
+                  <a:srgbClr val="4E4454"/>
+                </a:solidFill>
+                <a:latin typeface="Yu Gothic"/>
+              </a:rPr>
+              <a:t>今日楽しかった！と思って</a:t>
+            </a:r>
+          </a:p>
+          <a:p>
+            <a:pPr algn="l"/>
+            <a:r>
+              <a:rPr sz="2400" b="1">
+                <a:solidFill>
+                  <a:srgbClr val="4E4454"/>
+                </a:solidFill>
+                <a:latin typeface="Yu Gothic"/>
+              </a:rPr>
+              <a:t>画面を閉じる</a:t>
+            </a:r>
+          </a:p>
+        </p:txBody>
+      </p:sp>
+      <p:sp>
+        <p:nvSpPr>
+          <p:cNvPr id="18" name="TextBox 17"/>
+          <p:cNvSpPr txBox="1"/>
+          <p:nvPr/>
+        </p:nvSpPr>
+        <p:spPr>
+          <a:xfrm>
+            <a:off x="6450000" y="3700000"/>
+            <a:ext cx="5050000" cy="1300000"/>
+          </a:xfrm>
+          <a:prstGeom prst="rect">
+            <a:avLst/>
+          </a:prstGeom>
+          <a:noFill/>
+        </p:spPr>
+        <p:txBody>
+          <a:bodyPr wrap="square" anchor="t" lIns="0" rIns="0" tIns="0" bIns="0">
+            <a:spAutoFit/>
+          </a:bodyPr>
+          <a:lstStyle/>
+          <a:p>
+            <a:pPr algn="l">
+              <a:lnSpc>
+                <a:spcPct val="120000"/>
+              </a:lnSpc>
+            </a:pPr>
+            <a:r>
+              <a:rPr sz="1500" b="0">
+                <a:solidFill>
+                  <a:srgbClr val="6B6272"/>
+                </a:solidFill>
+                <a:latin typeface="Yu Gothic"/>
+              </a:rPr>
+              <a:t>→  緊張や不安より</a:t>
+            </a:r>
+          </a:p>
+          <a:p>
+            <a:pPr algn="l">
+              <a:lnSpc>
+                <a:spcPct val="120000"/>
+              </a:lnSpc>
+            </a:pPr>
+            <a:r>
+              <a:rPr sz="1500" b="0">
+                <a:solidFill>
+                  <a:srgbClr val="6B6272"/>
+                </a:solidFill>
+                <a:latin typeface="Yu Gothic"/>
+              </a:rPr>
+              <a:t>　 「また会いたい」を優先する場</a:t>
+            </a:r>
+          </a:p>
+        </p:txBody>
+      </p:sp>
+      <p:sp>
+        <p:nvSpPr>
+          <p:cNvPr id="19" name="Rounded Rectangle 18"/>
           <p:cNvSpPr/>
           <p:nvPr/>
         </p:nvSpPr>
         <p:spPr>
           <a:xfrm>
-            <a:off x="6492240" y="1508760"/>
-            <a:ext cx="5394960" cy="713232"/>
-          </a:xfrm>
-          <a:prstGeom prst="rect">
-            <a:avLst/>
+            <a:off x="4300000" y="5450000"/>
+            <a:ext cx="3600000" cy="700000"/>
+          </a:xfrm>
+          <a:prstGeom prst="roundRect">
+            <a:avLst>
+              <a:gd name="adj" fmla="val 50000"/>
+            </a:avLst>
           </a:prstGeom>
           <a:solidFill>
-            <a:srgbClr val="FF7200"/>
+            <a:srgbClr val="FFCD34"/>
           </a:solidFill>
           <a:ln>
             <a:noFill/>
           </a:ln>
+          <a:effectLst/>
         </p:spPr>
         <p:style>
           <a:lnRef idx="1">
@@ -3994,14 +4400,14 @@
       </p:sp>
       <p:sp>
         <p:nvSpPr>
-          <p:cNvPr id="16" name="TextBox 15"/>
+          <p:cNvPr id="20" name="TextBox 19"/>
           <p:cNvSpPr txBox="1"/>
           <p:nvPr/>
         </p:nvSpPr>
         <p:spPr>
           <a:xfrm>
-            <a:off x="6629400" y="1572768"/>
-            <a:ext cx="5212080" cy="594360"/>
+            <a:off x="4300000" y="5450000"/>
+            <a:ext cx="3600000" cy="700000"/>
           </a:xfrm>
           <a:prstGeom prst="rect">
             <a:avLst/>
@@ -4009,123 +4415,16 @@
           <a:noFill/>
         </p:spPr>
         <p:txBody>
-          <a:bodyPr wrap="square">
+          <a:bodyPr wrap="square" anchor="ctr" lIns="0" rIns="0" tIns="0" bIns="0">
             <a:spAutoFit/>
           </a:bodyPr>
           <a:lstStyle/>
           <a:p>
-            <a:pPr algn="l"/>
-            <a:r>
-              <a:rPr sz="3000" b="1">
-                <a:solidFill>
-                  <a:srgbClr val="FFFFFF"/>
-                </a:solidFill>
-                <a:latin typeface="Yu Gothic"/>
-              </a:rPr>
-              <a:t>GOAL  ②</a:t>
-            </a:r>
-          </a:p>
-        </p:txBody>
-      </p:sp>
-      <p:sp>
-        <p:nvSpPr>
-          <p:cNvPr id="17" name="TextBox 16"/>
-          <p:cNvSpPr txBox="1"/>
-          <p:nvPr/>
-        </p:nvSpPr>
-        <p:spPr>
-          <a:xfrm>
-            <a:off x="6675120" y="2377440"/>
-            <a:ext cx="5120640" cy="1280160"/>
-          </a:xfrm>
-          <a:prstGeom prst="rect">
-            <a:avLst/>
-          </a:prstGeom>
-          <a:noFill/>
-        </p:spPr>
-        <p:txBody>
-          <a:bodyPr wrap="square">
-            <a:spAutoFit/>
-          </a:bodyPr>
-          <a:lstStyle/>
-          <a:p>
-            <a:pPr algn="l"/>
-            <a:r>
-              <a:rPr sz="3600" b="1">
-                <a:solidFill>
-                  <a:srgbClr val="1A1A1A"/>
-                </a:solidFill>
-                <a:latin typeface="Yu Gothic"/>
-              </a:rPr>
-              <a:t>今日楽しかった！
-と思って画面を閉じる</a:t>
-            </a:r>
-          </a:p>
-        </p:txBody>
-      </p:sp>
-      <p:sp>
-        <p:nvSpPr>
-          <p:cNvPr id="18" name="TextBox 17"/>
-          <p:cNvSpPr txBox="1"/>
-          <p:nvPr/>
-        </p:nvSpPr>
-        <p:spPr>
-          <a:xfrm>
-            <a:off x="6675120" y="3657600"/>
-            <a:ext cx="5120640" cy="2011680"/>
-          </a:xfrm>
-          <a:prstGeom prst="rect">
-            <a:avLst/>
-          </a:prstGeom>
-          <a:noFill/>
-        </p:spPr>
-        <p:txBody>
-          <a:bodyPr wrap="square">
-            <a:spAutoFit/>
-          </a:bodyPr>
-          <a:lstStyle/>
-          <a:p>
-            <a:pPr algn="l"/>
-            <a:r>
-              <a:rPr sz="2400" b="0">
-                <a:solidFill>
-                  <a:srgbClr val="555555"/>
-                </a:solidFill>
-                <a:latin typeface="Yu Gothic"/>
-              </a:rPr>
-              <a:t>→  緊張や不安より
-　  「また会いたい」を優先する場</a:t>
-            </a:r>
-          </a:p>
-        </p:txBody>
-      </p:sp>
-      <p:sp>
-        <p:nvSpPr>
-          <p:cNvPr id="19" name="TextBox 18"/>
-          <p:cNvSpPr txBox="1"/>
-          <p:nvPr/>
-        </p:nvSpPr>
-        <p:spPr>
-          <a:xfrm>
-            <a:off x="457200" y="6080760"/>
-            <a:ext cx="11274552" cy="548640"/>
-          </a:xfrm>
-          <a:prstGeom prst="rect">
-            <a:avLst/>
-          </a:prstGeom>
-          <a:noFill/>
-        </p:spPr>
-        <p:txBody>
-          <a:bodyPr wrap="square">
-            <a:spAutoFit/>
-          </a:bodyPr>
-          <a:lstStyle/>
-          <a:p>
-            <a:pPr algn="ctr"/>
-            <a:r>
-              <a:rPr sz="2600" b="1">
-                <a:solidFill>
-                  <a:srgbClr val="FF7200"/>
+            <a:pPr algn="ctr"/>
+            <a:r>
+              <a:rPr sz="1800" b="1">
+                <a:solidFill>
+                  <a:srgbClr val="4E4454"/>
                 </a:solidFill>
                 <a:latin typeface="Yu Gothic"/>
               </a:rPr>
@@ -4167,11 +4466,12 @@
             <a:avLst/>
           </a:prstGeom>
           <a:solidFill>
-            <a:srgbClr val="FFFFFF"/>
+            <a:srgbClr val="FFFCF2"/>
           </a:solidFill>
           <a:ln>
             <a:noFill/>
           </a:ln>
+          <a:effectLst/>
         </p:spPr>
         <p:style>
           <a:lnRef idx="1">
@@ -4195,26 +4495,63 @@
           </a:p>
         </p:txBody>
       </p:sp>
-      <p:sp>
-        <p:nvSpPr>
-          <p:cNvPr id="3" name="Rectangle 2"/>
+      <p:cxnSp>
+        <p:nvCxnSpPr>
+          <p:cNvPr id="3" name="Connector 2"/>
+          <p:cNvCxnSpPr/>
+          <p:nvPr/>
+        </p:nvCxnSpPr>
+        <p:spPr>
+          <a:xfrm>
+            <a:off x="228600" y="0"/>
+            <a:ext cx="0" cy="6858000"/>
+          </a:xfrm>
+          <a:prstGeom prst="line">
+            <a:avLst/>
+          </a:prstGeom>
+          <a:ln w="12700">
+            <a:solidFill>
+              <a:srgbClr val="4E4454"/>
+            </a:solidFill>
+          </a:ln>
+          <a:effectLst/>
+        </p:spPr>
+        <p:style>
+          <a:lnRef idx="2">
+            <a:schemeClr val="accent1"/>
+          </a:lnRef>
+          <a:fillRef idx="0">
+            <a:schemeClr val="accent1"/>
+          </a:fillRef>
+          <a:effectRef idx="1">
+            <a:schemeClr val="accent1"/>
+          </a:effectRef>
+          <a:fontRef idx="minor">
+            <a:schemeClr val="tx1"/>
+          </a:fontRef>
+        </p:style>
+      </p:cxnSp>
+      <p:sp>
+        <p:nvSpPr>
+          <p:cNvPr id="4" name="Rectangle 3"/>
           <p:cNvSpPr/>
           <p:nvPr/>
         </p:nvSpPr>
         <p:spPr>
           <a:xfrm>
-            <a:off x="0" y="0"/>
-            <a:ext cx="201168" cy="6858000"/>
+            <a:off x="365760" y="502920"/>
+            <a:ext cx="4800600" cy="685800"/>
           </a:xfrm>
           <a:prstGeom prst="rect">
             <a:avLst/>
           </a:prstGeom>
           <a:solidFill>
-            <a:srgbClr val="FF7200"/>
+            <a:srgbClr val="4E4454"/>
           </a:solidFill>
           <a:ln>
             <a:noFill/>
           </a:ln>
+          <a:effectLst/>
         </p:spPr>
         <p:style>
           <a:lnRef idx="1">
@@ -4240,14 +4577,14 @@
       </p:sp>
       <p:sp>
         <p:nvSpPr>
-          <p:cNvPr id="4" name="Rectangle 3"/>
+          <p:cNvPr id="5" name="Rectangle 4"/>
           <p:cNvSpPr/>
           <p:nvPr/>
         </p:nvSpPr>
         <p:spPr>
           <a:xfrm>
-            <a:off x="0" y="0"/>
-            <a:ext cx="12188952" cy="1325880"/>
+            <a:off x="320040" y="457200"/>
+            <a:ext cx="4800600" cy="685800"/>
           </a:xfrm>
           <a:prstGeom prst="rect">
             <a:avLst/>
@@ -4255,9 +4592,12 @@
           <a:solidFill>
             <a:srgbClr val="FFFFFF"/>
           </a:solidFill>
-          <a:ln>
-            <a:noFill/>
+          <a:ln w="28575">
+            <a:solidFill>
+              <a:srgbClr val="4E4454"/>
+            </a:solidFill>
           </a:ln>
+          <a:effectLst/>
         </p:spPr>
         <p:style>
           <a:lnRef idx="1">
@@ -4283,24 +4623,64 @@
       </p:sp>
       <p:sp>
         <p:nvSpPr>
-          <p:cNvPr id="5" name="Rectangle 4"/>
+          <p:cNvPr id="6" name="TextBox 5"/>
+          <p:cNvSpPr txBox="1"/>
+          <p:nvPr/>
+        </p:nvSpPr>
+        <p:spPr>
+          <a:xfrm>
+            <a:off x="502920" y="457200"/>
+            <a:ext cx="4500000" cy="685800"/>
+          </a:xfrm>
+          <a:prstGeom prst="rect">
+            <a:avLst/>
+          </a:prstGeom>
+          <a:noFill/>
+        </p:spPr>
+        <p:txBody>
+          <a:bodyPr wrap="square" anchor="ctr" lIns="0" rIns="0" tIns="0" bIns="0">
+            <a:spAutoFit/>
+          </a:bodyPr>
+          <a:lstStyle/>
+          <a:p>
+            <a:pPr algn="l"/>
+            <a:r>
+              <a:rPr sz="2200" b="1">
+                <a:solidFill>
+                  <a:srgbClr val="4E4454"/>
+                </a:solidFill>
+                <a:latin typeface="Yu Gothic"/>
+              </a:rPr>
+              <a:t>今日の流れ</a:t>
+            </a:r>
+          </a:p>
+        </p:txBody>
+      </p:sp>
+      <p:sp>
+        <p:nvSpPr>
+          <p:cNvPr id="7" name="Rounded Rectangle 6"/>
           <p:cNvSpPr/>
           <p:nvPr/>
         </p:nvSpPr>
         <p:spPr>
           <a:xfrm>
-            <a:off x="0" y="1325880"/>
-            <a:ext cx="12188952" cy="38100"/>
-          </a:xfrm>
-          <a:prstGeom prst="rect">
-            <a:avLst/>
+            <a:off x="9994392" y="502920"/>
+            <a:ext cx="1828800" cy="502920"/>
+          </a:xfrm>
+          <a:prstGeom prst="roundRect">
+            <a:avLst>
+              <a:gd name="adj" fmla="val 50000"/>
+            </a:avLst>
           </a:prstGeom>
           <a:solidFill>
-            <a:srgbClr val="FF7200"/>
+            <a:srgbClr val="FFFFFF"/>
           </a:solidFill>
-          <a:ln>
-            <a:noFill/>
+          <a:ln w="19050">
+            <a:solidFill>
+              <a:srgbClr val="4E4454"/>
+            </a:solidFill>
           </a:ln>
+          <a:effectLst/>
         </p:spPr>
         <p:style>
           <a:lnRef idx="1">
@@ -4326,14 +4706,14 @@
       </p:sp>
       <p:sp>
         <p:nvSpPr>
-          <p:cNvPr id="6" name="TextBox 5"/>
+          <p:cNvPr id="8" name="TextBox 7"/>
           <p:cNvSpPr txBox="1"/>
           <p:nvPr/>
         </p:nvSpPr>
         <p:spPr>
           <a:xfrm>
-            <a:off x="457200" y="164592"/>
-            <a:ext cx="9262872" cy="1005840"/>
+            <a:off x="9994392" y="502920"/>
+            <a:ext cx="1828800" cy="502920"/>
           </a:xfrm>
           <a:prstGeom prst="rect">
             <a:avLst/>
@@ -4341,44 +4721,49 @@
           <a:noFill/>
         </p:spPr>
         <p:txBody>
-          <a:bodyPr wrap="square">
+          <a:bodyPr wrap="square" anchor="ctr" lIns="0" rIns="0" tIns="0" bIns="0">
             <a:spAutoFit/>
           </a:bodyPr>
           <a:lstStyle/>
           <a:p>
-            <a:pPr algn="l"/>
-            <a:r>
-              <a:rPr sz="4400" b="1">
-                <a:solidFill>
-                  <a:srgbClr val="1A1A1A"/>
+            <a:pPr algn="ctr"/>
+            <a:r>
+              <a:rPr sz="1400" b="1">
+                <a:solidFill>
+                  <a:srgbClr val="FF8762"/>
                 </a:solidFill>
                 <a:latin typeface="Yu Gothic"/>
               </a:rPr>
-              <a:t>今日の流れ</a:t>
-            </a:r>
-          </a:p>
-        </p:txBody>
-      </p:sp>
-      <p:sp>
-        <p:nvSpPr>
-          <p:cNvPr id="7" name="Rectangle 6"/>
+              <a:t>全体：60分</a:t>
+            </a:r>
+          </a:p>
+        </p:txBody>
+      </p:sp>
+      <p:sp>
+        <p:nvSpPr>
+          <p:cNvPr id="9" name="Rounded Rectangle 8"/>
           <p:cNvSpPr/>
           <p:nvPr/>
         </p:nvSpPr>
         <p:spPr>
           <a:xfrm>
-            <a:off x="9628632" y="164592"/>
-            <a:ext cx="2194560" cy="566928"/>
-          </a:xfrm>
-          <a:prstGeom prst="rect">
-            <a:avLst/>
+            <a:off x="502920" y="2200000"/>
+            <a:ext cx="2116622" cy="2200000"/>
+          </a:xfrm>
+          <a:prstGeom prst="roundRect">
+            <a:avLst>
+              <a:gd name="adj" fmla="val 8000"/>
+            </a:avLst>
           </a:prstGeom>
           <a:solidFill>
-            <a:srgbClr val="FF7200"/>
+            <a:srgbClr val="FFFFFF"/>
           </a:solidFill>
-          <a:ln>
-            <a:noFill/>
+          <a:ln w="19050">
+            <a:solidFill>
+              <a:srgbClr val="4E4454"/>
+            </a:solidFill>
           </a:ln>
+          <a:effectLst/>
         </p:spPr>
         <p:style>
           <a:lnRef idx="1">
@@ -4404,61 +4789,25 @@
       </p:sp>
       <p:sp>
         <p:nvSpPr>
-          <p:cNvPr id="8" name="TextBox 7"/>
-          <p:cNvSpPr txBox="1"/>
-          <p:nvPr/>
-        </p:nvSpPr>
-        <p:spPr>
-          <a:xfrm>
-            <a:off x="9674352" y="201168"/>
-            <a:ext cx="2103120" cy="502920"/>
-          </a:xfrm>
-          <a:prstGeom prst="rect">
-            <a:avLst/>
-          </a:prstGeom>
-          <a:noFill/>
-        </p:spPr>
-        <p:txBody>
-          <a:bodyPr wrap="square">
-            <a:spAutoFit/>
-          </a:bodyPr>
-          <a:lstStyle/>
-          <a:p>
-            <a:pPr algn="ctr"/>
-            <a:r>
-              <a:rPr sz="2400" b="1">
-                <a:solidFill>
-                  <a:srgbClr val="FFFFFF"/>
-                </a:solidFill>
-                <a:latin typeface="Yu Gothic"/>
-              </a:rPr>
-              <a:t>全体：60分</a:t>
-            </a:r>
-          </a:p>
-        </p:txBody>
-      </p:sp>
-      <p:sp>
-        <p:nvSpPr>
-          <p:cNvPr id="9" name="Rectangle 8"/>
+          <p:cNvPr id="10" name="Oval 9"/>
           <p:cNvSpPr/>
           <p:nvPr/>
         </p:nvSpPr>
         <p:spPr>
           <a:xfrm>
-            <a:off x="434340" y="1508760"/>
-            <a:ext cx="2103120" cy="3931920"/>
-          </a:xfrm>
-          <a:prstGeom prst="rect">
+            <a:off x="1261231" y="2400000"/>
+            <a:ext cx="600000" cy="600000"/>
+          </a:xfrm>
+          <a:prstGeom prst="ellipse">
             <a:avLst/>
           </a:prstGeom>
           <a:solidFill>
-            <a:srgbClr val="FFFFFF"/>
+            <a:srgbClr val="FF8762"/>
           </a:solidFill>
-          <a:ln w="31750">
-            <a:solidFill>
-              <a:srgbClr val="FF7200"/>
-            </a:solidFill>
+          <a:ln>
+            <a:noFill/>
           </a:ln>
+          <a:effectLst/>
         </p:spPr>
         <p:style>
           <a:lnRef idx="1">
@@ -4484,14 +4833,14 @@
       </p:sp>
       <p:sp>
         <p:nvSpPr>
-          <p:cNvPr id="10" name="TextBox 9"/>
+          <p:cNvPr id="11" name="TextBox 10"/>
           <p:cNvSpPr txBox="1"/>
           <p:nvPr/>
         </p:nvSpPr>
         <p:spPr>
           <a:xfrm>
-            <a:off x="434340" y="1618488"/>
-            <a:ext cx="2103120" cy="502920"/>
+            <a:off x="1261231" y="2400000"/>
+            <a:ext cx="600000" cy="600000"/>
           </a:xfrm>
           <a:prstGeom prst="rect">
             <a:avLst/>
@@ -4499,16 +4848,16 @@
           <a:noFill/>
         </p:spPr>
         <p:txBody>
-          <a:bodyPr wrap="square">
+          <a:bodyPr wrap="square" anchor="ctr" lIns="0" rIns="0" tIns="0" bIns="0">
             <a:spAutoFit/>
           </a:bodyPr>
           <a:lstStyle/>
           <a:p>
             <a:pPr algn="ctr"/>
             <a:r>
-              <a:rPr sz="2600" b="1">
-                <a:solidFill>
-                  <a:srgbClr val="FF7200"/>
+              <a:rPr sz="2000" b="1">
+                <a:solidFill>
+                  <a:srgbClr val="FFFFFF"/>
                 </a:solidFill>
                 <a:latin typeface="Yu Gothic"/>
               </a:rPr>
@@ -4519,14 +4868,14 @@
       </p:sp>
       <p:sp>
         <p:nvSpPr>
-          <p:cNvPr id="11" name="TextBox 10"/>
+          <p:cNvPr id="12" name="TextBox 11"/>
           <p:cNvSpPr txBox="1"/>
           <p:nvPr/>
         </p:nvSpPr>
         <p:spPr>
           <a:xfrm>
-            <a:off x="434340" y="2167128"/>
-            <a:ext cx="2103120" cy="2011680"/>
+            <a:off x="502920" y="3250000"/>
+            <a:ext cx="2116622" cy="700000"/>
           </a:xfrm>
           <a:prstGeom prst="rect">
             <a:avLst/>
@@ -4534,35 +4883,54 @@
           <a:noFill/>
         </p:spPr>
         <p:txBody>
-          <a:bodyPr wrap="square">
+          <a:bodyPr wrap="square" anchor="t" lIns="0" rIns="0" tIns="0" bIns="0">
             <a:spAutoFit/>
           </a:bodyPr>
           <a:lstStyle/>
           <a:p>
-            <a:pPr algn="ctr"/>
-            <a:r>
-              <a:rPr sz="3000" b="1">
-                <a:solidFill>
-                  <a:srgbClr val="1A1A1A"/>
+            <a:pPr algn="ctr">
+              <a:lnSpc>
+                <a:spcPct val="100000"/>
+              </a:lnSpc>
+            </a:pPr>
+            <a:r>
+              <a:rPr sz="1500" b="1">
+                <a:solidFill>
+                  <a:srgbClr val="4E4454"/>
                 </a:solidFill>
                 <a:latin typeface="Yu Gothic"/>
               </a:rPr>
-              <a:t>自己紹介
-リレー</a:t>
-            </a:r>
-          </a:p>
-        </p:txBody>
-      </p:sp>
-      <p:sp>
-        <p:nvSpPr>
-          <p:cNvPr id="12" name="TextBox 11"/>
+              <a:t>自己紹介</a:t>
+            </a:r>
+          </a:p>
+          <a:p>
+            <a:pPr algn="ctr">
+              <a:lnSpc>
+                <a:spcPct val="100000"/>
+              </a:lnSpc>
+            </a:pPr>
+            <a:r>
+              <a:rPr sz="1500" b="1">
+                <a:solidFill>
+                  <a:srgbClr val="4E4454"/>
+                </a:solidFill>
+                <a:latin typeface="Yu Gothic"/>
+              </a:rPr>
+              <a:t>リレー</a:t>
+            </a:r>
+          </a:p>
+        </p:txBody>
+      </p:sp>
+      <p:sp>
+        <p:nvSpPr>
+          <p:cNvPr id="13" name="TextBox 12"/>
           <p:cNvSpPr txBox="1"/>
           <p:nvPr/>
         </p:nvSpPr>
         <p:spPr>
           <a:xfrm>
-            <a:off x="434340" y="4800600"/>
-            <a:ext cx="2103120" cy="502920"/>
+            <a:off x="502920" y="4000000"/>
+            <a:ext cx="2116622" cy="350000"/>
           </a:xfrm>
           <a:prstGeom prst="rect">
             <a:avLst/>
@@ -4570,16 +4938,16 @@
           <a:noFill/>
         </p:spPr>
         <p:txBody>
-          <a:bodyPr wrap="square">
+          <a:bodyPr wrap="square" anchor="t" lIns="0" rIns="0" tIns="0" bIns="0">
             <a:spAutoFit/>
           </a:bodyPr>
           <a:lstStyle/>
           <a:p>
             <a:pPr algn="ctr"/>
             <a:r>
-              <a:rPr sz="2200" b="0">
-                <a:solidFill>
-                  <a:srgbClr val="555555"/>
+              <a:rPr sz="1300" b="1">
+                <a:solidFill>
+                  <a:srgbClr val="FF8762"/>
                 </a:solidFill>
                 <a:latin typeface="Yu Gothic"/>
               </a:rPr>
@@ -4590,14 +4958,14 @@
       </p:sp>
       <p:sp>
         <p:nvSpPr>
-          <p:cNvPr id="13" name="TextBox 12"/>
+          <p:cNvPr id="14" name="TextBox 13"/>
           <p:cNvSpPr txBox="1"/>
           <p:nvPr/>
         </p:nvSpPr>
         <p:spPr>
           <a:xfrm>
-            <a:off x="2557576" y="3291840"/>
-            <a:ext cx="160934" cy="365760"/>
+            <a:off x="2579542" y="3150000"/>
+            <a:ext cx="230000" cy="300000"/>
           </a:xfrm>
           <a:prstGeom prst="rect">
             <a:avLst/>
@@ -4605,16 +4973,16 @@
           <a:noFill/>
         </p:spPr>
         <p:txBody>
-          <a:bodyPr wrap="square">
+          <a:bodyPr wrap="square" anchor="ctr" lIns="0" rIns="0" tIns="0" bIns="0">
             <a:spAutoFit/>
           </a:bodyPr>
           <a:lstStyle/>
           <a:p>
             <a:pPr algn="ctr"/>
             <a:r>
-              <a:rPr sz="1800" b="0">
-                <a:solidFill>
-                  <a:srgbClr val="FF7200"/>
+              <a:rPr sz="1800" b="1">
+                <a:solidFill>
+                  <a:srgbClr val="FF8762"/>
                 </a:solidFill>
                 <a:latin typeface="Yu Gothic"/>
               </a:rPr>
@@ -4625,24 +4993,29 @@
       </p:sp>
       <p:sp>
         <p:nvSpPr>
-          <p:cNvPr id="14" name="Rectangle 13"/>
+          <p:cNvPr id="15" name="Rounded Rectangle 14"/>
           <p:cNvSpPr/>
           <p:nvPr/>
         </p:nvSpPr>
         <p:spPr>
           <a:xfrm>
-            <a:off x="2738628" y="1508760"/>
-            <a:ext cx="2103120" cy="3931920"/>
-          </a:xfrm>
-          <a:prstGeom prst="rect">
-            <a:avLst/>
+            <a:off x="2769542" y="2200000"/>
+            <a:ext cx="2116622" cy="2200000"/>
+          </a:xfrm>
+          <a:prstGeom prst="roundRect">
+            <a:avLst>
+              <a:gd name="adj" fmla="val 8000"/>
+            </a:avLst>
           </a:prstGeom>
           <a:solidFill>
-            <a:srgbClr val="FF7200"/>
+            <a:srgbClr val="FFFFFF"/>
           </a:solidFill>
-          <a:ln>
-            <a:noFill/>
+          <a:ln w="19050">
+            <a:solidFill>
+              <a:srgbClr val="4E4454"/>
+            </a:solidFill>
           </a:ln>
+          <a:effectLst/>
         </p:spPr>
         <p:style>
           <a:lnRef idx="1">
@@ -4668,165 +5041,25 @@
       </p:sp>
       <p:sp>
         <p:nvSpPr>
-          <p:cNvPr id="15" name="TextBox 14"/>
-          <p:cNvSpPr txBox="1"/>
-          <p:nvPr/>
-        </p:nvSpPr>
-        <p:spPr>
-          <a:xfrm>
-            <a:off x="2738628" y="1618488"/>
-            <a:ext cx="2103120" cy="502920"/>
-          </a:xfrm>
-          <a:prstGeom prst="rect">
-            <a:avLst/>
-          </a:prstGeom>
-          <a:noFill/>
-        </p:spPr>
-        <p:txBody>
-          <a:bodyPr wrap="square">
-            <a:spAutoFit/>
-          </a:bodyPr>
-          <a:lstStyle/>
-          <a:p>
-            <a:pPr algn="ctr"/>
-            <a:r>
-              <a:rPr sz="2600" b="1">
-                <a:solidFill>
-                  <a:srgbClr val="FFFFFF"/>
-                </a:solidFill>
-                <a:latin typeface="Yu Gothic"/>
-              </a:rPr>
-              <a:t>2</a:t>
-            </a:r>
-          </a:p>
-        </p:txBody>
-      </p:sp>
-      <p:sp>
-        <p:nvSpPr>
-          <p:cNvPr id="16" name="TextBox 15"/>
-          <p:cNvSpPr txBox="1"/>
-          <p:nvPr/>
-        </p:nvSpPr>
-        <p:spPr>
-          <a:xfrm>
-            <a:off x="2738628" y="2167128"/>
-            <a:ext cx="2103120" cy="2011680"/>
-          </a:xfrm>
-          <a:prstGeom prst="rect">
-            <a:avLst/>
-          </a:prstGeom>
-          <a:noFill/>
-        </p:spPr>
-        <p:txBody>
-          <a:bodyPr wrap="square">
-            <a:spAutoFit/>
-          </a:bodyPr>
-          <a:lstStyle/>
-          <a:p>
-            <a:pPr algn="ctr"/>
-            <a:r>
-              <a:rPr sz="3000" b="1">
-                <a:solidFill>
-                  <a:srgbClr val="FFFFFF"/>
-                </a:solidFill>
-                <a:latin typeface="Yu Gothic"/>
-              </a:rPr>
-              <a:t>共通点探し
-（グループ）</a:t>
-            </a:r>
-          </a:p>
-        </p:txBody>
-      </p:sp>
-      <p:sp>
-        <p:nvSpPr>
-          <p:cNvPr id="17" name="TextBox 16"/>
-          <p:cNvSpPr txBox="1"/>
-          <p:nvPr/>
-        </p:nvSpPr>
-        <p:spPr>
-          <a:xfrm>
-            <a:off x="2738628" y="4800600"/>
-            <a:ext cx="2103120" cy="502920"/>
-          </a:xfrm>
-          <a:prstGeom prst="rect">
-            <a:avLst/>
-          </a:prstGeom>
-          <a:noFill/>
-        </p:spPr>
-        <p:txBody>
-          <a:bodyPr wrap="square">
-            <a:spAutoFit/>
-          </a:bodyPr>
-          <a:lstStyle/>
-          <a:p>
-            <a:pPr algn="ctr"/>
-            <a:r>
-              <a:rPr sz="2200" b="0">
-                <a:solidFill>
-                  <a:srgbClr val="FFDDBB"/>
-                </a:solidFill>
-                <a:latin typeface="Yu Gothic"/>
-              </a:rPr>
-              <a:t>〜30分</a:t>
-            </a:r>
-          </a:p>
-        </p:txBody>
-      </p:sp>
-      <p:sp>
-        <p:nvSpPr>
-          <p:cNvPr id="18" name="TextBox 17"/>
-          <p:cNvSpPr txBox="1"/>
-          <p:nvPr/>
-        </p:nvSpPr>
-        <p:spPr>
-          <a:xfrm>
-            <a:off x="4861864" y="3291840"/>
-            <a:ext cx="160934" cy="365760"/>
-          </a:xfrm>
-          <a:prstGeom prst="rect">
-            <a:avLst/>
-          </a:prstGeom>
-          <a:noFill/>
-        </p:spPr>
-        <p:txBody>
-          <a:bodyPr wrap="square">
-            <a:spAutoFit/>
-          </a:bodyPr>
-          <a:lstStyle/>
-          <a:p>
-            <a:pPr algn="ctr"/>
-            <a:r>
-              <a:rPr sz="1800" b="0">
-                <a:solidFill>
-                  <a:srgbClr val="FF7200"/>
-                </a:solidFill>
-                <a:latin typeface="Yu Gothic"/>
-              </a:rPr>
-              <a:t>▶</a:t>
-            </a:r>
-          </a:p>
-        </p:txBody>
-      </p:sp>
-      <p:sp>
-        <p:nvSpPr>
-          <p:cNvPr id="19" name="Rectangle 18"/>
+          <p:cNvPr id="16" name="Oval 15"/>
           <p:cNvSpPr/>
           <p:nvPr/>
         </p:nvSpPr>
         <p:spPr>
           <a:xfrm>
-            <a:off x="5042916" y="1508760"/>
-            <a:ext cx="2103120" cy="3931920"/>
-          </a:xfrm>
-          <a:prstGeom prst="rect">
+            <a:off x="3527853" y="2400000"/>
+            <a:ext cx="600000" cy="600000"/>
+          </a:xfrm>
+          <a:prstGeom prst="ellipse">
             <a:avLst/>
           </a:prstGeom>
           <a:solidFill>
-            <a:srgbClr val="FF7200"/>
+            <a:srgbClr val="FF8762"/>
           </a:solidFill>
           <a:ln>
             <a:noFill/>
           </a:ln>
+          <a:effectLst/>
         </p:spPr>
         <p:style>
           <a:lnRef idx="1">
@@ -4852,14 +5085,139 @@
       </p:sp>
       <p:sp>
         <p:nvSpPr>
+          <p:cNvPr id="17" name="TextBox 16"/>
+          <p:cNvSpPr txBox="1"/>
+          <p:nvPr/>
+        </p:nvSpPr>
+        <p:spPr>
+          <a:xfrm>
+            <a:off x="3527853" y="2400000"/>
+            <a:ext cx="600000" cy="600000"/>
+          </a:xfrm>
+          <a:prstGeom prst="rect">
+            <a:avLst/>
+          </a:prstGeom>
+          <a:noFill/>
+        </p:spPr>
+        <p:txBody>
+          <a:bodyPr wrap="square" anchor="ctr" lIns="0" rIns="0" tIns="0" bIns="0">
+            <a:spAutoFit/>
+          </a:bodyPr>
+          <a:lstStyle/>
+          <a:p>
+            <a:pPr algn="ctr"/>
+            <a:r>
+              <a:rPr sz="2000" b="1">
+                <a:solidFill>
+                  <a:srgbClr val="FFFFFF"/>
+                </a:solidFill>
+                <a:latin typeface="Yu Gothic"/>
+              </a:rPr>
+              <a:t>2</a:t>
+            </a:r>
+          </a:p>
+        </p:txBody>
+      </p:sp>
+      <p:sp>
+        <p:nvSpPr>
+          <p:cNvPr id="18" name="TextBox 17"/>
+          <p:cNvSpPr txBox="1"/>
+          <p:nvPr/>
+        </p:nvSpPr>
+        <p:spPr>
+          <a:xfrm>
+            <a:off x="2769542" y="3250000"/>
+            <a:ext cx="2116622" cy="700000"/>
+          </a:xfrm>
+          <a:prstGeom prst="rect">
+            <a:avLst/>
+          </a:prstGeom>
+          <a:noFill/>
+        </p:spPr>
+        <p:txBody>
+          <a:bodyPr wrap="square" anchor="t" lIns="0" rIns="0" tIns="0" bIns="0">
+            <a:spAutoFit/>
+          </a:bodyPr>
+          <a:lstStyle/>
+          <a:p>
+            <a:pPr algn="ctr">
+              <a:lnSpc>
+                <a:spcPct val="100000"/>
+              </a:lnSpc>
+            </a:pPr>
+            <a:r>
+              <a:rPr sz="1500" b="1">
+                <a:solidFill>
+                  <a:srgbClr val="4E4454"/>
+                </a:solidFill>
+                <a:latin typeface="Yu Gothic"/>
+              </a:rPr>
+              <a:t>共通点探し</a:t>
+            </a:r>
+          </a:p>
+          <a:p>
+            <a:pPr algn="ctr">
+              <a:lnSpc>
+                <a:spcPct val="100000"/>
+              </a:lnSpc>
+            </a:pPr>
+            <a:r>
+              <a:rPr sz="1500" b="1">
+                <a:solidFill>
+                  <a:srgbClr val="4E4454"/>
+                </a:solidFill>
+                <a:latin typeface="Yu Gothic"/>
+              </a:rPr>
+              <a:t>（グループ）</a:t>
+            </a:r>
+          </a:p>
+        </p:txBody>
+      </p:sp>
+      <p:sp>
+        <p:nvSpPr>
+          <p:cNvPr id="19" name="TextBox 18"/>
+          <p:cNvSpPr txBox="1"/>
+          <p:nvPr/>
+        </p:nvSpPr>
+        <p:spPr>
+          <a:xfrm>
+            <a:off x="2769542" y="4000000"/>
+            <a:ext cx="2116622" cy="350000"/>
+          </a:xfrm>
+          <a:prstGeom prst="rect">
+            <a:avLst/>
+          </a:prstGeom>
+          <a:noFill/>
+        </p:spPr>
+        <p:txBody>
+          <a:bodyPr wrap="square" anchor="t" lIns="0" rIns="0" tIns="0" bIns="0">
+            <a:spAutoFit/>
+          </a:bodyPr>
+          <a:lstStyle/>
+          <a:p>
+            <a:pPr algn="ctr"/>
+            <a:r>
+              <a:rPr sz="1300" b="1">
+                <a:solidFill>
+                  <a:srgbClr val="FF8762"/>
+                </a:solidFill>
+                <a:latin typeface="Yu Gothic"/>
+              </a:rPr>
+              <a:t>〜30分</a:t>
+            </a:r>
+          </a:p>
+        </p:txBody>
+      </p:sp>
+      <p:sp>
+        <p:nvSpPr>
           <p:cNvPr id="20" name="TextBox 19"/>
           <p:cNvSpPr txBox="1"/>
           <p:nvPr/>
         </p:nvSpPr>
         <p:spPr>
           <a:xfrm>
-            <a:off x="5042916" y="1618488"/>
-            <a:ext cx="2103120" cy="502920"/>
+            <a:off x="4846164" y="3150000"/>
+            <a:ext cx="230000" cy="300000"/>
           </a:xfrm>
           <a:prstGeom prst="rect">
             <a:avLst/>
@@ -4867,122 +5225,16 @@
           <a:noFill/>
         </p:spPr>
         <p:txBody>
-          <a:bodyPr wrap="square">
+          <a:bodyPr wrap="square" anchor="ctr" lIns="0" rIns="0" tIns="0" bIns="0">
             <a:spAutoFit/>
           </a:bodyPr>
           <a:lstStyle/>
           <a:p>
             <a:pPr algn="ctr"/>
             <a:r>
-              <a:rPr sz="2600" b="1">
-                <a:solidFill>
-                  <a:srgbClr val="FFFFFF"/>
-                </a:solidFill>
-                <a:latin typeface="Yu Gothic"/>
-              </a:rPr>
-              <a:t>3</a:t>
-            </a:r>
-          </a:p>
-        </p:txBody>
-      </p:sp>
-      <p:sp>
-        <p:nvSpPr>
-          <p:cNvPr id="21" name="TextBox 20"/>
-          <p:cNvSpPr txBox="1"/>
-          <p:nvPr/>
-        </p:nvSpPr>
-        <p:spPr>
-          <a:xfrm>
-            <a:off x="5042916" y="2167128"/>
-            <a:ext cx="2103120" cy="2011680"/>
-          </a:xfrm>
-          <a:prstGeom prst="rect">
-            <a:avLst/>
-          </a:prstGeom>
-          <a:noFill/>
-        </p:spPr>
-        <p:txBody>
-          <a:bodyPr wrap="square">
-            <a:spAutoFit/>
-          </a:bodyPr>
-          <a:lstStyle/>
-          <a:p>
-            <a:pPr algn="ctr"/>
-            <a:r>
-              <a:rPr sz="3000" b="1">
-                <a:solidFill>
-                  <a:srgbClr val="FFFFFF"/>
-                </a:solidFill>
-                <a:latin typeface="Yu Gothic"/>
-              </a:rPr>
-              <a:t>共通点発表
-（全体）</a:t>
-            </a:r>
-          </a:p>
-        </p:txBody>
-      </p:sp>
-      <p:sp>
-        <p:nvSpPr>
-          <p:cNvPr id="22" name="TextBox 21"/>
-          <p:cNvSpPr txBox="1"/>
-          <p:nvPr/>
-        </p:nvSpPr>
-        <p:spPr>
-          <a:xfrm>
-            <a:off x="5042916" y="4800600"/>
-            <a:ext cx="2103120" cy="502920"/>
-          </a:xfrm>
-          <a:prstGeom prst="rect">
-            <a:avLst/>
-          </a:prstGeom>
-          <a:noFill/>
-        </p:spPr>
-        <p:txBody>
-          <a:bodyPr wrap="square">
-            <a:spAutoFit/>
-          </a:bodyPr>
-          <a:lstStyle/>
-          <a:p>
-            <a:pPr algn="ctr"/>
-            <a:r>
-              <a:rPr sz="2200" b="0">
-                <a:solidFill>
-                  <a:srgbClr val="FFDDBB"/>
-                </a:solidFill>
-                <a:latin typeface="Yu Gothic"/>
-              </a:rPr>
-              <a:t>〜50分</a:t>
-            </a:r>
-          </a:p>
-        </p:txBody>
-      </p:sp>
-      <p:sp>
-        <p:nvSpPr>
-          <p:cNvPr id="23" name="TextBox 22"/>
-          <p:cNvSpPr txBox="1"/>
-          <p:nvPr/>
-        </p:nvSpPr>
-        <p:spPr>
-          <a:xfrm>
-            <a:off x="7166152" y="3291840"/>
-            <a:ext cx="160934" cy="365760"/>
-          </a:xfrm>
-          <a:prstGeom prst="rect">
-            <a:avLst/>
-          </a:prstGeom>
-          <a:noFill/>
-        </p:spPr>
-        <p:txBody>
-          <a:bodyPr wrap="square">
-            <a:spAutoFit/>
-          </a:bodyPr>
-          <a:lstStyle/>
-          <a:p>
-            <a:pPr algn="ctr"/>
-            <a:r>
-              <a:rPr sz="1800" b="0">
-                <a:solidFill>
-                  <a:srgbClr val="FF7200"/>
+              <a:rPr sz="1800" b="1">
+                <a:solidFill>
+                  <a:srgbClr val="FF8762"/>
                 </a:solidFill>
                 <a:latin typeface="Yu Gothic"/>
               </a:rPr>
@@ -4993,26 +5245,29 @@
       </p:sp>
       <p:sp>
         <p:nvSpPr>
-          <p:cNvPr id="24" name="Rectangle 23"/>
+          <p:cNvPr id="21" name="Rounded Rectangle 20"/>
           <p:cNvSpPr/>
           <p:nvPr/>
         </p:nvSpPr>
         <p:spPr>
           <a:xfrm>
-            <a:off x="7347204" y="1508760"/>
-            <a:ext cx="2103120" cy="3931920"/>
-          </a:xfrm>
-          <a:prstGeom prst="rect">
-            <a:avLst/>
+            <a:off x="5036164" y="2200000"/>
+            <a:ext cx="2116622" cy="2200000"/>
+          </a:xfrm>
+          <a:prstGeom prst="roundRect">
+            <a:avLst>
+              <a:gd name="adj" fmla="val 8000"/>
+            </a:avLst>
           </a:prstGeom>
           <a:solidFill>
             <a:srgbClr val="FFFFFF"/>
           </a:solidFill>
-          <a:ln w="31750">
+          <a:ln w="19050">
             <a:solidFill>
-              <a:srgbClr val="FF7200"/>
+              <a:srgbClr val="4E4454"/>
             </a:solidFill>
           </a:ln>
+          <a:effectLst/>
         </p:spPr>
         <p:style>
           <a:lnRef idx="1">
@@ -5038,166 +5293,25 @@
       </p:sp>
       <p:sp>
         <p:nvSpPr>
-          <p:cNvPr id="25" name="TextBox 24"/>
-          <p:cNvSpPr txBox="1"/>
-          <p:nvPr/>
-        </p:nvSpPr>
-        <p:spPr>
-          <a:xfrm>
-            <a:off x="7347204" y="1618488"/>
-            <a:ext cx="2103120" cy="502920"/>
-          </a:xfrm>
-          <a:prstGeom prst="rect">
-            <a:avLst/>
-          </a:prstGeom>
-          <a:noFill/>
-        </p:spPr>
-        <p:txBody>
-          <a:bodyPr wrap="square">
-            <a:spAutoFit/>
-          </a:bodyPr>
-          <a:lstStyle/>
-          <a:p>
-            <a:pPr algn="ctr"/>
-            <a:r>
-              <a:rPr sz="2600" b="1">
-                <a:solidFill>
-                  <a:srgbClr val="FF7200"/>
-                </a:solidFill>
-                <a:latin typeface="Yu Gothic"/>
-              </a:rPr>
-              <a:t>4</a:t>
-            </a:r>
-          </a:p>
-        </p:txBody>
-      </p:sp>
-      <p:sp>
-        <p:nvSpPr>
-          <p:cNvPr id="26" name="TextBox 25"/>
-          <p:cNvSpPr txBox="1"/>
-          <p:nvPr/>
-        </p:nvSpPr>
-        <p:spPr>
-          <a:xfrm>
-            <a:off x="7347204" y="2167128"/>
-            <a:ext cx="2103120" cy="2011680"/>
-          </a:xfrm>
-          <a:prstGeom prst="rect">
-            <a:avLst/>
-          </a:prstGeom>
-          <a:noFill/>
-        </p:spPr>
-        <p:txBody>
-          <a:bodyPr wrap="square">
-            <a:spAutoFit/>
-          </a:bodyPr>
-          <a:lstStyle/>
-          <a:p>
-            <a:pPr algn="ctr"/>
-            <a:r>
-              <a:rPr sz="3000" b="1">
-                <a:solidFill>
-                  <a:srgbClr val="1A1A1A"/>
-                </a:solidFill>
-                <a:latin typeface="Yu Gothic"/>
-              </a:rPr>
-              <a:t>会社説明</a:t>
-            </a:r>
-          </a:p>
-        </p:txBody>
-      </p:sp>
-      <p:sp>
-        <p:nvSpPr>
-          <p:cNvPr id="27" name="TextBox 26"/>
-          <p:cNvSpPr txBox="1"/>
-          <p:nvPr/>
-        </p:nvSpPr>
-        <p:spPr>
-          <a:xfrm>
-            <a:off x="7347204" y="4800600"/>
-            <a:ext cx="2103120" cy="502920"/>
-          </a:xfrm>
-          <a:prstGeom prst="rect">
-            <a:avLst/>
-          </a:prstGeom>
-          <a:noFill/>
-        </p:spPr>
-        <p:txBody>
-          <a:bodyPr wrap="square">
-            <a:spAutoFit/>
-          </a:bodyPr>
-          <a:lstStyle/>
-          <a:p>
-            <a:pPr algn="ctr"/>
-            <a:r>
-              <a:rPr sz="2200" b="0">
-                <a:solidFill>
-                  <a:srgbClr val="555555"/>
-                </a:solidFill>
-                <a:latin typeface="Yu Gothic"/>
-              </a:rPr>
-              <a:t>〜55分</a:t>
-            </a:r>
-          </a:p>
-        </p:txBody>
-      </p:sp>
-      <p:sp>
-        <p:nvSpPr>
-          <p:cNvPr id="28" name="TextBox 27"/>
-          <p:cNvSpPr txBox="1"/>
-          <p:nvPr/>
-        </p:nvSpPr>
-        <p:spPr>
-          <a:xfrm>
-            <a:off x="9470440" y="3291840"/>
-            <a:ext cx="160934" cy="365760"/>
-          </a:xfrm>
-          <a:prstGeom prst="rect">
-            <a:avLst/>
-          </a:prstGeom>
-          <a:noFill/>
-        </p:spPr>
-        <p:txBody>
-          <a:bodyPr wrap="square">
-            <a:spAutoFit/>
-          </a:bodyPr>
-          <a:lstStyle/>
-          <a:p>
-            <a:pPr algn="ctr"/>
-            <a:r>
-              <a:rPr sz="1800" b="0">
-                <a:solidFill>
-                  <a:srgbClr val="FF7200"/>
-                </a:solidFill>
-                <a:latin typeface="Yu Gothic"/>
-              </a:rPr>
-              <a:t>▶</a:t>
-            </a:r>
-          </a:p>
-        </p:txBody>
-      </p:sp>
-      <p:sp>
-        <p:nvSpPr>
-          <p:cNvPr id="29" name="Rectangle 28"/>
+          <p:cNvPr id="22" name="Oval 21"/>
           <p:cNvSpPr/>
           <p:nvPr/>
         </p:nvSpPr>
         <p:spPr>
           <a:xfrm>
-            <a:off x="9651492" y="1508760"/>
-            <a:ext cx="2103120" cy="3931920"/>
-          </a:xfrm>
-          <a:prstGeom prst="rect">
+            <a:off x="5794476" y="2400000"/>
+            <a:ext cx="600000" cy="600000"/>
+          </a:xfrm>
+          <a:prstGeom prst="ellipse">
             <a:avLst/>
           </a:prstGeom>
           <a:solidFill>
-            <a:srgbClr val="FFFFFF"/>
+            <a:srgbClr val="FF8762"/>
           </a:solidFill>
-          <a:ln w="31750">
-            <a:solidFill>
-              <a:srgbClr val="FF7200"/>
-            </a:solidFill>
+          <a:ln>
+            <a:noFill/>
           </a:ln>
+          <a:effectLst/>
         </p:spPr>
         <p:style>
           <a:lnRef idx="1">
@@ -5223,14 +5337,14 @@
       </p:sp>
       <p:sp>
         <p:nvSpPr>
-          <p:cNvPr id="30" name="TextBox 29"/>
+          <p:cNvPr id="23" name="TextBox 22"/>
           <p:cNvSpPr txBox="1"/>
           <p:nvPr/>
         </p:nvSpPr>
         <p:spPr>
           <a:xfrm>
-            <a:off x="9651492" y="1618488"/>
-            <a:ext cx="2103120" cy="502920"/>
+            <a:off x="5794476" y="2400000"/>
+            <a:ext cx="600000" cy="600000"/>
           </a:xfrm>
           <a:prstGeom prst="rect">
             <a:avLst/>
@@ -5238,34 +5352,34 @@
           <a:noFill/>
         </p:spPr>
         <p:txBody>
-          <a:bodyPr wrap="square">
+          <a:bodyPr wrap="square" anchor="ctr" lIns="0" rIns="0" tIns="0" bIns="0">
             <a:spAutoFit/>
           </a:bodyPr>
           <a:lstStyle/>
           <a:p>
             <a:pPr algn="ctr"/>
             <a:r>
-              <a:rPr sz="2600" b="1">
-                <a:solidFill>
-                  <a:srgbClr val="FF7200"/>
+              <a:rPr sz="2000" b="1">
+                <a:solidFill>
+                  <a:srgbClr val="FFFFFF"/>
                 </a:solidFill>
                 <a:latin typeface="Yu Gothic"/>
               </a:rPr>
-              <a:t>5</a:t>
-            </a:r>
-          </a:p>
-        </p:txBody>
-      </p:sp>
-      <p:sp>
-        <p:nvSpPr>
-          <p:cNvPr id="31" name="TextBox 30"/>
+              <a:t>3</a:t>
+            </a:r>
+          </a:p>
+        </p:txBody>
+      </p:sp>
+      <p:sp>
+        <p:nvSpPr>
+          <p:cNvPr id="24" name="TextBox 23"/>
           <p:cNvSpPr txBox="1"/>
           <p:nvPr/>
         </p:nvSpPr>
         <p:spPr>
           <a:xfrm>
-            <a:off x="9651492" y="2167128"/>
-            <a:ext cx="2103120" cy="2011680"/>
+            <a:off x="5036164" y="3250000"/>
+            <a:ext cx="2116622" cy="700000"/>
           </a:xfrm>
           <a:prstGeom prst="rect">
             <a:avLst/>
@@ -5273,34 +5387,54 @@
           <a:noFill/>
         </p:spPr>
         <p:txBody>
-          <a:bodyPr wrap="square">
+          <a:bodyPr wrap="square" anchor="t" lIns="0" rIns="0" tIns="0" bIns="0">
             <a:spAutoFit/>
           </a:bodyPr>
           <a:lstStyle/>
           <a:p>
-            <a:pPr algn="ctr"/>
-            <a:r>
-              <a:rPr sz="3000" b="1">
-                <a:solidFill>
-                  <a:srgbClr val="1A1A1A"/>
+            <a:pPr algn="ctr">
+              <a:lnSpc>
+                <a:spcPct val="100000"/>
+              </a:lnSpc>
+            </a:pPr>
+            <a:r>
+              <a:rPr sz="1500" b="1">
+                <a:solidFill>
+                  <a:srgbClr val="4E4454"/>
                 </a:solidFill>
                 <a:latin typeface="Yu Gothic"/>
               </a:rPr>
-              <a:t>クロージング</a:t>
-            </a:r>
-          </a:p>
-        </p:txBody>
-      </p:sp>
-      <p:sp>
-        <p:nvSpPr>
-          <p:cNvPr id="32" name="TextBox 31"/>
+              <a:t>共通点発表</a:t>
+            </a:r>
+          </a:p>
+          <a:p>
+            <a:pPr algn="ctr">
+              <a:lnSpc>
+                <a:spcPct val="100000"/>
+              </a:lnSpc>
+            </a:pPr>
+            <a:r>
+              <a:rPr sz="1500" b="1">
+                <a:solidFill>
+                  <a:srgbClr val="4E4454"/>
+                </a:solidFill>
+                <a:latin typeface="Yu Gothic"/>
+              </a:rPr>
+              <a:t>（全体）</a:t>
+            </a:r>
+          </a:p>
+        </p:txBody>
+      </p:sp>
+      <p:sp>
+        <p:nvSpPr>
+          <p:cNvPr id="25" name="TextBox 24"/>
           <p:cNvSpPr txBox="1"/>
           <p:nvPr/>
         </p:nvSpPr>
         <p:spPr>
           <a:xfrm>
-            <a:off x="9651492" y="4800600"/>
-            <a:ext cx="2103120" cy="502920"/>
+            <a:off x="5036164" y="4000000"/>
+            <a:ext cx="2116622" cy="350000"/>
           </a:xfrm>
           <a:prstGeom prst="rect">
             <a:avLst/>
@@ -5308,44 +5442,84 @@
           <a:noFill/>
         </p:spPr>
         <p:txBody>
-          <a:bodyPr wrap="square">
+          <a:bodyPr wrap="square" anchor="t" lIns="0" rIns="0" tIns="0" bIns="0">
             <a:spAutoFit/>
           </a:bodyPr>
           <a:lstStyle/>
           <a:p>
             <a:pPr algn="ctr"/>
             <a:r>
-              <a:rPr sz="2200" b="0">
-                <a:solidFill>
-                  <a:srgbClr val="555555"/>
+              <a:rPr sz="1300" b="1">
+                <a:solidFill>
+                  <a:srgbClr val="FF8762"/>
                 </a:solidFill>
                 <a:latin typeface="Yu Gothic"/>
               </a:rPr>
-              <a:t>〜60分</a:t>
-            </a:r>
-          </a:p>
-        </p:txBody>
-      </p:sp>
-      <p:sp>
-        <p:nvSpPr>
-          <p:cNvPr id="33" name="Rectangle 32"/>
+              <a:t>〜50分</a:t>
+            </a:r>
+          </a:p>
+        </p:txBody>
+      </p:sp>
+      <p:sp>
+        <p:nvSpPr>
+          <p:cNvPr id="26" name="TextBox 25"/>
+          <p:cNvSpPr txBox="1"/>
+          <p:nvPr/>
+        </p:nvSpPr>
+        <p:spPr>
+          <a:xfrm>
+            <a:off x="7112787" y="3150000"/>
+            <a:ext cx="230000" cy="300000"/>
+          </a:xfrm>
+          <a:prstGeom prst="rect">
+            <a:avLst/>
+          </a:prstGeom>
+          <a:noFill/>
+        </p:spPr>
+        <p:txBody>
+          <a:bodyPr wrap="square" anchor="ctr" lIns="0" rIns="0" tIns="0" bIns="0">
+            <a:spAutoFit/>
+          </a:bodyPr>
+          <a:lstStyle/>
+          <a:p>
+            <a:pPr algn="ctr"/>
+            <a:r>
+              <a:rPr sz="1800" b="1">
+                <a:solidFill>
+                  <a:srgbClr val="FF8762"/>
+                </a:solidFill>
+                <a:latin typeface="Yu Gothic"/>
+              </a:rPr>
+              <a:t>▶</a:t>
+            </a:r>
+          </a:p>
+        </p:txBody>
+      </p:sp>
+      <p:sp>
+        <p:nvSpPr>
+          <p:cNvPr id="27" name="Rounded Rectangle 26"/>
           <p:cNvSpPr/>
           <p:nvPr/>
         </p:nvSpPr>
         <p:spPr>
           <a:xfrm>
-            <a:off x="2738628" y="5513832"/>
-            <a:ext cx="4407408" cy="38100"/>
-          </a:xfrm>
-          <a:prstGeom prst="rect">
-            <a:avLst/>
+            <a:off x="7302787" y="2200000"/>
+            <a:ext cx="2116622" cy="2200000"/>
+          </a:xfrm>
+          <a:prstGeom prst="roundRect">
+            <a:avLst>
+              <a:gd name="adj" fmla="val 8000"/>
+            </a:avLst>
           </a:prstGeom>
           <a:solidFill>
-            <a:srgbClr val="FF7200"/>
+            <a:srgbClr val="FFFFFF"/>
           </a:solidFill>
-          <a:ln>
-            <a:noFill/>
+          <a:ln w="19050">
+            <a:solidFill>
+              <a:srgbClr val="4E4454"/>
+            </a:solidFill>
           </a:ln>
+          <a:effectLst/>
         </p:spPr>
         <p:style>
           <a:lnRef idx="1">
@@ -5371,14 +5545,58 @@
       </p:sp>
       <p:sp>
         <p:nvSpPr>
-          <p:cNvPr id="34" name="TextBox 33"/>
+          <p:cNvPr id="28" name="Oval 27"/>
+          <p:cNvSpPr/>
+          <p:nvPr/>
+        </p:nvSpPr>
+        <p:spPr>
+          <a:xfrm>
+            <a:off x="8061098" y="2400000"/>
+            <a:ext cx="600000" cy="600000"/>
+          </a:xfrm>
+          <a:prstGeom prst="ellipse">
+            <a:avLst/>
+          </a:prstGeom>
+          <a:solidFill>
+            <a:srgbClr val="FF8762"/>
+          </a:solidFill>
+          <a:ln>
+            <a:noFill/>
+          </a:ln>
+          <a:effectLst/>
+        </p:spPr>
+        <p:style>
+          <a:lnRef idx="1">
+            <a:schemeClr val="accent1"/>
+          </a:lnRef>
+          <a:fillRef idx="3">
+            <a:schemeClr val="accent1"/>
+          </a:fillRef>
+          <a:effectRef idx="2">
+            <a:schemeClr val="accent1"/>
+          </a:effectRef>
+          <a:fontRef idx="minor">
+            <a:schemeClr val="lt1"/>
+          </a:fontRef>
+        </p:style>
+        <p:txBody>
+          <a:bodyPr rtlCol="0" anchor="ctr"/>
+          <a:lstStyle/>
+          <a:p>
+            <a:pPr algn="ctr"/>
+          </a:p>
+        </p:txBody>
+      </p:sp>
+      <p:sp>
+        <p:nvSpPr>
+          <p:cNvPr id="29" name="TextBox 28"/>
           <p:cNvSpPr txBox="1"/>
           <p:nvPr/>
         </p:nvSpPr>
         <p:spPr>
           <a:xfrm>
-            <a:off x="2738628" y="5605272"/>
-            <a:ext cx="4407408" cy="411480"/>
+            <a:off x="8061098" y="2400000"/>
+            <a:ext cx="600000" cy="600000"/>
           </a:xfrm>
           <a:prstGeom prst="rect">
             <a:avLst/>
@@ -5386,16 +5604,407 @@
           <a:noFill/>
         </p:spPr>
         <p:txBody>
-          <a:bodyPr wrap="square">
+          <a:bodyPr wrap="square" anchor="ctr" lIns="0" rIns="0" tIns="0" bIns="0">
             <a:spAutoFit/>
           </a:bodyPr>
           <a:lstStyle/>
           <a:p>
             <a:pPr algn="ctr"/>
             <a:r>
+              <a:rPr sz="2000" b="1">
+                <a:solidFill>
+                  <a:srgbClr val="FFFFFF"/>
+                </a:solidFill>
+                <a:latin typeface="Yu Gothic"/>
+              </a:rPr>
+              <a:t>4</a:t>
+            </a:r>
+          </a:p>
+        </p:txBody>
+      </p:sp>
+      <p:sp>
+        <p:nvSpPr>
+          <p:cNvPr id="30" name="TextBox 29"/>
+          <p:cNvSpPr txBox="1"/>
+          <p:nvPr/>
+        </p:nvSpPr>
+        <p:spPr>
+          <a:xfrm>
+            <a:off x="7302787" y="3250000"/>
+            <a:ext cx="2116622" cy="700000"/>
+          </a:xfrm>
+          <a:prstGeom prst="rect">
+            <a:avLst/>
+          </a:prstGeom>
+          <a:noFill/>
+        </p:spPr>
+        <p:txBody>
+          <a:bodyPr wrap="square" anchor="t" lIns="0" rIns="0" tIns="0" bIns="0">
+            <a:spAutoFit/>
+          </a:bodyPr>
+          <a:lstStyle/>
+          <a:p>
+            <a:pPr algn="ctr">
+              <a:lnSpc>
+                <a:spcPct val="100000"/>
+              </a:lnSpc>
+            </a:pPr>
+            <a:r>
+              <a:rPr sz="1500" b="1">
+                <a:solidFill>
+                  <a:srgbClr val="4E4454"/>
+                </a:solidFill>
+                <a:latin typeface="Yu Gothic"/>
+              </a:rPr>
+              <a:t>会社説明</a:t>
+            </a:r>
+          </a:p>
+        </p:txBody>
+      </p:sp>
+      <p:sp>
+        <p:nvSpPr>
+          <p:cNvPr id="31" name="TextBox 30"/>
+          <p:cNvSpPr txBox="1"/>
+          <p:nvPr/>
+        </p:nvSpPr>
+        <p:spPr>
+          <a:xfrm>
+            <a:off x="7302787" y="4000000"/>
+            <a:ext cx="2116622" cy="350000"/>
+          </a:xfrm>
+          <a:prstGeom prst="rect">
+            <a:avLst/>
+          </a:prstGeom>
+          <a:noFill/>
+        </p:spPr>
+        <p:txBody>
+          <a:bodyPr wrap="square" anchor="t" lIns="0" rIns="0" tIns="0" bIns="0">
+            <a:spAutoFit/>
+          </a:bodyPr>
+          <a:lstStyle/>
+          <a:p>
+            <a:pPr algn="ctr"/>
+            <a:r>
+              <a:rPr sz="1300" b="1">
+                <a:solidFill>
+                  <a:srgbClr val="FF8762"/>
+                </a:solidFill>
+                <a:latin typeface="Yu Gothic"/>
+              </a:rPr>
+              <a:t>〜55分</a:t>
+            </a:r>
+          </a:p>
+        </p:txBody>
+      </p:sp>
+      <p:sp>
+        <p:nvSpPr>
+          <p:cNvPr id="32" name="TextBox 31"/>
+          <p:cNvSpPr txBox="1"/>
+          <p:nvPr/>
+        </p:nvSpPr>
+        <p:spPr>
+          <a:xfrm>
+            <a:off x="9379409" y="3150000"/>
+            <a:ext cx="230000" cy="300000"/>
+          </a:xfrm>
+          <a:prstGeom prst="rect">
+            <a:avLst/>
+          </a:prstGeom>
+          <a:noFill/>
+        </p:spPr>
+        <p:txBody>
+          <a:bodyPr wrap="square" anchor="ctr" lIns="0" rIns="0" tIns="0" bIns="0">
+            <a:spAutoFit/>
+          </a:bodyPr>
+          <a:lstStyle/>
+          <a:p>
+            <a:pPr algn="ctr"/>
+            <a:r>
               <a:rPr sz="1800" b="1">
                 <a:solidFill>
-                  <a:srgbClr val="FF7200"/>
+                  <a:srgbClr val="FF8762"/>
+                </a:solidFill>
+                <a:latin typeface="Yu Gothic"/>
+              </a:rPr>
+              <a:t>▶</a:t>
+            </a:r>
+          </a:p>
+        </p:txBody>
+      </p:sp>
+      <p:sp>
+        <p:nvSpPr>
+          <p:cNvPr id="33" name="Rounded Rectangle 32"/>
+          <p:cNvSpPr/>
+          <p:nvPr/>
+        </p:nvSpPr>
+        <p:spPr>
+          <a:xfrm>
+            <a:off x="9569409" y="2200000"/>
+            <a:ext cx="2116622" cy="2200000"/>
+          </a:xfrm>
+          <a:prstGeom prst="roundRect">
+            <a:avLst>
+              <a:gd name="adj" fmla="val 8000"/>
+            </a:avLst>
+          </a:prstGeom>
+          <a:solidFill>
+            <a:srgbClr val="FFFFFF"/>
+          </a:solidFill>
+          <a:ln w="19050">
+            <a:solidFill>
+              <a:srgbClr val="4E4454"/>
+            </a:solidFill>
+          </a:ln>
+          <a:effectLst/>
+        </p:spPr>
+        <p:style>
+          <a:lnRef idx="1">
+            <a:schemeClr val="accent1"/>
+          </a:lnRef>
+          <a:fillRef idx="3">
+            <a:schemeClr val="accent1"/>
+          </a:fillRef>
+          <a:effectRef idx="2">
+            <a:schemeClr val="accent1"/>
+          </a:effectRef>
+          <a:fontRef idx="minor">
+            <a:schemeClr val="lt1"/>
+          </a:fontRef>
+        </p:style>
+        <p:txBody>
+          <a:bodyPr rtlCol="0" anchor="ctr"/>
+          <a:lstStyle/>
+          <a:p>
+            <a:pPr algn="ctr"/>
+          </a:p>
+        </p:txBody>
+      </p:sp>
+      <p:sp>
+        <p:nvSpPr>
+          <p:cNvPr id="34" name="Oval 33"/>
+          <p:cNvSpPr/>
+          <p:nvPr/>
+        </p:nvSpPr>
+        <p:spPr>
+          <a:xfrm>
+            <a:off x="10327720" y="2400000"/>
+            <a:ext cx="600000" cy="600000"/>
+          </a:xfrm>
+          <a:prstGeom prst="ellipse">
+            <a:avLst/>
+          </a:prstGeom>
+          <a:solidFill>
+            <a:srgbClr val="FF8762"/>
+          </a:solidFill>
+          <a:ln>
+            <a:noFill/>
+          </a:ln>
+          <a:effectLst/>
+        </p:spPr>
+        <p:style>
+          <a:lnRef idx="1">
+            <a:schemeClr val="accent1"/>
+          </a:lnRef>
+          <a:fillRef idx="3">
+            <a:schemeClr val="accent1"/>
+          </a:fillRef>
+          <a:effectRef idx="2">
+            <a:schemeClr val="accent1"/>
+          </a:effectRef>
+          <a:fontRef idx="minor">
+            <a:schemeClr val="lt1"/>
+          </a:fontRef>
+        </p:style>
+        <p:txBody>
+          <a:bodyPr rtlCol="0" anchor="ctr"/>
+          <a:lstStyle/>
+          <a:p>
+            <a:pPr algn="ctr"/>
+          </a:p>
+        </p:txBody>
+      </p:sp>
+      <p:sp>
+        <p:nvSpPr>
+          <p:cNvPr id="35" name="TextBox 34"/>
+          <p:cNvSpPr txBox="1"/>
+          <p:nvPr/>
+        </p:nvSpPr>
+        <p:spPr>
+          <a:xfrm>
+            <a:off x="10327720" y="2400000"/>
+            <a:ext cx="600000" cy="600000"/>
+          </a:xfrm>
+          <a:prstGeom prst="rect">
+            <a:avLst/>
+          </a:prstGeom>
+          <a:noFill/>
+        </p:spPr>
+        <p:txBody>
+          <a:bodyPr wrap="square" anchor="ctr" lIns="0" rIns="0" tIns="0" bIns="0">
+            <a:spAutoFit/>
+          </a:bodyPr>
+          <a:lstStyle/>
+          <a:p>
+            <a:pPr algn="ctr"/>
+            <a:r>
+              <a:rPr sz="2000" b="1">
+                <a:solidFill>
+                  <a:srgbClr val="FFFFFF"/>
+                </a:solidFill>
+                <a:latin typeface="Yu Gothic"/>
+              </a:rPr>
+              <a:t>5</a:t>
+            </a:r>
+          </a:p>
+        </p:txBody>
+      </p:sp>
+      <p:sp>
+        <p:nvSpPr>
+          <p:cNvPr id="36" name="TextBox 35"/>
+          <p:cNvSpPr txBox="1"/>
+          <p:nvPr/>
+        </p:nvSpPr>
+        <p:spPr>
+          <a:xfrm>
+            <a:off x="9569409" y="3250000"/>
+            <a:ext cx="2116622" cy="700000"/>
+          </a:xfrm>
+          <a:prstGeom prst="rect">
+            <a:avLst/>
+          </a:prstGeom>
+          <a:noFill/>
+        </p:spPr>
+        <p:txBody>
+          <a:bodyPr wrap="square" anchor="t" lIns="0" rIns="0" tIns="0" bIns="0">
+            <a:spAutoFit/>
+          </a:bodyPr>
+          <a:lstStyle/>
+          <a:p>
+            <a:pPr algn="ctr">
+              <a:lnSpc>
+                <a:spcPct val="100000"/>
+              </a:lnSpc>
+            </a:pPr>
+            <a:r>
+              <a:rPr sz="1500" b="1">
+                <a:solidFill>
+                  <a:srgbClr val="4E4454"/>
+                </a:solidFill>
+                <a:latin typeface="Yu Gothic"/>
+              </a:rPr>
+              <a:t>クロージング</a:t>
+            </a:r>
+          </a:p>
+        </p:txBody>
+      </p:sp>
+      <p:sp>
+        <p:nvSpPr>
+          <p:cNvPr id="37" name="TextBox 36"/>
+          <p:cNvSpPr txBox="1"/>
+          <p:nvPr/>
+        </p:nvSpPr>
+        <p:spPr>
+          <a:xfrm>
+            <a:off x="9569409" y="4000000"/>
+            <a:ext cx="2116622" cy="350000"/>
+          </a:xfrm>
+          <a:prstGeom prst="rect">
+            <a:avLst/>
+          </a:prstGeom>
+          <a:noFill/>
+        </p:spPr>
+        <p:txBody>
+          <a:bodyPr wrap="square" anchor="t" lIns="0" rIns="0" tIns="0" bIns="0">
+            <a:spAutoFit/>
+          </a:bodyPr>
+          <a:lstStyle/>
+          <a:p>
+            <a:pPr algn="ctr"/>
+            <a:r>
+              <a:rPr sz="1300" b="1">
+                <a:solidFill>
+                  <a:srgbClr val="FF8762"/>
+                </a:solidFill>
+                <a:latin typeface="Yu Gothic"/>
+              </a:rPr>
+              <a:t>〜60分</a:t>
+            </a:r>
+          </a:p>
+        </p:txBody>
+      </p:sp>
+      <p:sp>
+        <p:nvSpPr>
+          <p:cNvPr id="38" name="Rounded Rectangle 37"/>
+          <p:cNvSpPr/>
+          <p:nvPr/>
+        </p:nvSpPr>
+        <p:spPr>
+          <a:xfrm>
+            <a:off x="502920" y="4900000"/>
+            <a:ext cx="6500000" cy="600000"/>
+          </a:xfrm>
+          <a:prstGeom prst="roundRect">
+            <a:avLst>
+              <a:gd name="adj" fmla="val 50000"/>
+            </a:avLst>
+          </a:prstGeom>
+          <a:solidFill>
+            <a:srgbClr val="FFF3CC"/>
+          </a:solidFill>
+          <a:ln>
+            <a:noFill/>
+          </a:ln>
+          <a:effectLst/>
+        </p:spPr>
+        <p:style>
+          <a:lnRef idx="1">
+            <a:schemeClr val="accent1"/>
+          </a:lnRef>
+          <a:fillRef idx="3">
+            <a:schemeClr val="accent1"/>
+          </a:fillRef>
+          <a:effectRef idx="2">
+            <a:schemeClr val="accent1"/>
+          </a:effectRef>
+          <a:fontRef idx="minor">
+            <a:schemeClr val="lt1"/>
+          </a:fontRef>
+        </p:style>
+        <p:txBody>
+          <a:bodyPr rtlCol="0" anchor="ctr"/>
+          <a:lstStyle/>
+          <a:p>
+            <a:pPr algn="ctr"/>
+          </a:p>
+        </p:txBody>
+      </p:sp>
+      <p:sp>
+        <p:nvSpPr>
+          <p:cNvPr id="39" name="TextBox 38"/>
+          <p:cNvSpPr txBox="1"/>
+          <p:nvPr/>
+        </p:nvSpPr>
+        <p:spPr>
+          <a:xfrm>
+            <a:off x="502920" y="4900000"/>
+            <a:ext cx="6500000" cy="600000"/>
+          </a:xfrm>
+          <a:prstGeom prst="rect">
+            <a:avLst/>
+          </a:prstGeom>
+          <a:noFill/>
+        </p:spPr>
+        <p:txBody>
+          <a:bodyPr wrap="square" anchor="ctr" lIns="0" rIns="0" tIns="0" bIns="0">
+            <a:spAutoFit/>
+          </a:bodyPr>
+          <a:lstStyle/>
+          <a:p>
+            <a:pPr algn="ctr"/>
+            <a:r>
+              <a:rPr sz="1500" b="1">
+                <a:solidFill>
+                  <a:srgbClr val="4E4454"/>
                 </a:solidFill>
                 <a:latin typeface="Yu Gothic"/>
               </a:rPr>
@@ -5437,11 +6046,12 @@
             <a:avLst/>
           </a:prstGeom>
           <a:solidFill>
-            <a:srgbClr val="FFFFFF"/>
+            <a:srgbClr val="FFFCF2"/>
           </a:solidFill>
           <a:ln>
             <a:noFill/>
           </a:ln>
+          <a:effectLst/>
         </p:spPr>
         <p:style>
           <a:lnRef idx="1">
@@ -5465,26 +6075,63 @@
           </a:p>
         </p:txBody>
       </p:sp>
-      <p:sp>
-        <p:nvSpPr>
-          <p:cNvPr id="3" name="Rectangle 2"/>
+      <p:cxnSp>
+        <p:nvCxnSpPr>
+          <p:cNvPr id="3" name="Connector 2"/>
+          <p:cNvCxnSpPr/>
+          <p:nvPr/>
+        </p:nvCxnSpPr>
+        <p:spPr>
+          <a:xfrm>
+            <a:off x="228600" y="0"/>
+            <a:ext cx="0" cy="6858000"/>
+          </a:xfrm>
+          <a:prstGeom prst="line">
+            <a:avLst/>
+          </a:prstGeom>
+          <a:ln w="12700">
+            <a:solidFill>
+              <a:srgbClr val="4E4454"/>
+            </a:solidFill>
+          </a:ln>
+          <a:effectLst/>
+        </p:spPr>
+        <p:style>
+          <a:lnRef idx="2">
+            <a:schemeClr val="accent1"/>
+          </a:lnRef>
+          <a:fillRef idx="0">
+            <a:schemeClr val="accent1"/>
+          </a:fillRef>
+          <a:effectRef idx="1">
+            <a:schemeClr val="accent1"/>
+          </a:effectRef>
+          <a:fontRef idx="minor">
+            <a:schemeClr val="tx1"/>
+          </a:fontRef>
+        </p:style>
+      </p:cxnSp>
+      <p:sp>
+        <p:nvSpPr>
+          <p:cNvPr id="4" name="Rectangle 3"/>
           <p:cNvSpPr/>
           <p:nvPr/>
         </p:nvSpPr>
         <p:spPr>
           <a:xfrm>
-            <a:off x="0" y="0"/>
-            <a:ext cx="201168" cy="6858000"/>
+            <a:off x="365760" y="502920"/>
+            <a:ext cx="4800600" cy="685800"/>
           </a:xfrm>
           <a:prstGeom prst="rect">
             <a:avLst/>
           </a:prstGeom>
           <a:solidFill>
-            <a:srgbClr val="FF7200"/>
+            <a:srgbClr val="4E4454"/>
           </a:solidFill>
           <a:ln>
             <a:noFill/>
           </a:ln>
+          <a:effectLst/>
         </p:spPr>
         <p:style>
           <a:lnRef idx="1">
@@ -5510,14 +6157,14 @@
       </p:sp>
       <p:sp>
         <p:nvSpPr>
-          <p:cNvPr id="4" name="Rectangle 3"/>
+          <p:cNvPr id="5" name="Rectangle 4"/>
           <p:cNvSpPr/>
           <p:nvPr/>
         </p:nvSpPr>
         <p:spPr>
           <a:xfrm>
-            <a:off x="0" y="0"/>
-            <a:ext cx="12188952" cy="1325880"/>
+            <a:off x="320040" y="457200"/>
+            <a:ext cx="4800600" cy="685800"/>
           </a:xfrm>
           <a:prstGeom prst="rect">
             <a:avLst/>
@@ -5525,9 +6172,12 @@
           <a:solidFill>
             <a:srgbClr val="FFFFFF"/>
           </a:solidFill>
-          <a:ln>
-            <a:noFill/>
+          <a:ln w="28575">
+            <a:solidFill>
+              <a:srgbClr val="4E4454"/>
+            </a:solidFill>
           </a:ln>
+          <a:effectLst/>
         </p:spPr>
         <p:style>
           <a:lnRef idx="1">
@@ -5553,24 +6203,64 @@
       </p:sp>
       <p:sp>
         <p:nvSpPr>
-          <p:cNvPr id="5" name="Rectangle 4"/>
+          <p:cNvPr id="6" name="TextBox 5"/>
+          <p:cNvSpPr txBox="1"/>
+          <p:nvPr/>
+        </p:nvSpPr>
+        <p:spPr>
+          <a:xfrm>
+            <a:off x="502920" y="457200"/>
+            <a:ext cx="4500000" cy="685800"/>
+          </a:xfrm>
+          <a:prstGeom prst="rect">
+            <a:avLst/>
+          </a:prstGeom>
+          <a:noFill/>
+        </p:spPr>
+        <p:txBody>
+          <a:bodyPr wrap="square" anchor="ctr" lIns="0" rIns="0" tIns="0" bIns="0">
+            <a:spAutoFit/>
+          </a:bodyPr>
+          <a:lstStyle/>
+          <a:p>
+            <a:pPr algn="l"/>
+            <a:r>
+              <a:rPr sz="2200" b="1">
+                <a:solidFill>
+                  <a:srgbClr val="4E4454"/>
+                </a:solidFill>
+                <a:latin typeface="Yu Gothic"/>
+              </a:rPr>
+              <a:t>①　自己紹介リレー</a:t>
+            </a:r>
+          </a:p>
+        </p:txBody>
+      </p:sp>
+      <p:sp>
+        <p:nvSpPr>
+          <p:cNvPr id="7" name="Rounded Rectangle 6"/>
           <p:cNvSpPr/>
           <p:nvPr/>
         </p:nvSpPr>
         <p:spPr>
           <a:xfrm>
-            <a:off x="0" y="1325880"/>
-            <a:ext cx="12188952" cy="38100"/>
-          </a:xfrm>
-          <a:prstGeom prst="rect">
-            <a:avLst/>
+            <a:off x="9994392" y="502920"/>
+            <a:ext cx="1828800" cy="502920"/>
+          </a:xfrm>
+          <a:prstGeom prst="roundRect">
+            <a:avLst>
+              <a:gd name="adj" fmla="val 50000"/>
+            </a:avLst>
           </a:prstGeom>
           <a:solidFill>
-            <a:srgbClr val="FF7200"/>
+            <a:srgbClr val="FFFFFF"/>
           </a:solidFill>
-          <a:ln>
-            <a:noFill/>
+          <a:ln w="19050">
+            <a:solidFill>
+              <a:srgbClr val="4E4454"/>
+            </a:solidFill>
           </a:ln>
+          <a:effectLst/>
         </p:spPr>
         <p:style>
           <a:lnRef idx="1">
@@ -5596,14 +6286,14 @@
       </p:sp>
       <p:sp>
         <p:nvSpPr>
-          <p:cNvPr id="6" name="TextBox 5"/>
+          <p:cNvPr id="8" name="TextBox 7"/>
           <p:cNvSpPr txBox="1"/>
           <p:nvPr/>
         </p:nvSpPr>
         <p:spPr>
           <a:xfrm>
-            <a:off x="457200" y="164592"/>
-            <a:ext cx="9262872" cy="1005840"/>
+            <a:off x="9994392" y="502920"/>
+            <a:ext cx="1828800" cy="502920"/>
           </a:xfrm>
           <a:prstGeom prst="rect">
             <a:avLst/>
@@ -5611,44 +6301,49 @@
           <a:noFill/>
         </p:spPr>
         <p:txBody>
-          <a:bodyPr wrap="square">
+          <a:bodyPr wrap="square" anchor="ctr" lIns="0" rIns="0" tIns="0" bIns="0">
             <a:spAutoFit/>
           </a:bodyPr>
           <a:lstStyle/>
           <a:p>
-            <a:pPr algn="l"/>
-            <a:r>
-              <a:rPr sz="4400" b="1">
-                <a:solidFill>
-                  <a:srgbClr val="1A1A1A"/>
+            <a:pPr algn="ctr"/>
+            <a:r>
+              <a:rPr sz="1400" b="1">
+                <a:solidFill>
+                  <a:srgbClr val="FF8762"/>
                 </a:solidFill>
                 <a:latin typeface="Yu Gothic"/>
               </a:rPr>
-              <a:t>①　自己紹介リレー</a:t>
-            </a:r>
-          </a:p>
-        </p:txBody>
-      </p:sp>
-      <p:sp>
-        <p:nvSpPr>
-          <p:cNvPr id="7" name="Rectangle 6"/>
+              <a:t>0〜15分</a:t>
+            </a:r>
+          </a:p>
+        </p:txBody>
+      </p:sp>
+      <p:sp>
+        <p:nvSpPr>
+          <p:cNvPr id="9" name="Rounded Rectangle 8"/>
           <p:cNvSpPr/>
           <p:nvPr/>
         </p:nvSpPr>
         <p:spPr>
           <a:xfrm>
-            <a:off x="9628632" y="164592"/>
-            <a:ext cx="2194560" cy="566928"/>
-          </a:xfrm>
-          <a:prstGeom prst="rect">
-            <a:avLst/>
+            <a:off x="502920" y="1900000"/>
+            <a:ext cx="11183112" cy="1450000"/>
+          </a:xfrm>
+          <a:prstGeom prst="roundRect">
+            <a:avLst>
+              <a:gd name="adj" fmla="val 6000"/>
+            </a:avLst>
           </a:prstGeom>
           <a:solidFill>
-            <a:srgbClr val="FF7200"/>
+            <a:srgbClr val="FFFFFF"/>
           </a:solidFill>
-          <a:ln>
-            <a:noFill/>
+          <a:ln w="19050">
+            <a:solidFill>
+              <a:srgbClr val="4E4454"/>
+            </a:solidFill>
           </a:ln>
+          <a:effectLst/>
         </p:spPr>
         <p:style>
           <a:lnRef idx="1">
@@ -5674,59 +6369,27 @@
       </p:sp>
       <p:sp>
         <p:nvSpPr>
-          <p:cNvPr id="8" name="TextBox 7"/>
-          <p:cNvSpPr txBox="1"/>
-          <p:nvPr/>
-        </p:nvSpPr>
-        <p:spPr>
-          <a:xfrm>
-            <a:off x="9674352" y="201168"/>
-            <a:ext cx="2103120" cy="502920"/>
-          </a:xfrm>
-          <a:prstGeom prst="rect">
-            <a:avLst/>
-          </a:prstGeom>
-          <a:noFill/>
-        </p:spPr>
-        <p:txBody>
-          <a:bodyPr wrap="square">
-            <a:spAutoFit/>
-          </a:bodyPr>
-          <a:lstStyle/>
-          <a:p>
-            <a:pPr algn="ctr"/>
-            <a:r>
-              <a:rPr sz="2400" b="1">
-                <a:solidFill>
-                  <a:srgbClr val="FFFFFF"/>
-                </a:solidFill>
-                <a:latin typeface="Yu Gothic"/>
-              </a:rPr>
-              <a:t>0〜15分</a:t>
-            </a:r>
-          </a:p>
-        </p:txBody>
-      </p:sp>
-      <p:sp>
-        <p:nvSpPr>
-          <p:cNvPr id="9" name="Rectangle 8"/>
+          <p:cNvPr id="10" name="Rounded Rectangle 9"/>
           <p:cNvSpPr/>
           <p:nvPr/>
         </p:nvSpPr>
         <p:spPr>
           <a:xfrm>
-            <a:off x="457200" y="1554480"/>
-            <a:ext cx="1920240" cy="1234440"/>
-          </a:xfrm>
-          <a:prstGeom prst="rect">
-            <a:avLst/>
+            <a:off x="502920" y="1900000"/>
+            <a:ext cx="1900000" cy="600000"/>
+          </a:xfrm>
+          <a:prstGeom prst="roundRect">
+            <a:avLst>
+              <a:gd name="adj" fmla="val 0"/>
+            </a:avLst>
           </a:prstGeom>
           <a:solidFill>
-            <a:srgbClr val="FF7200"/>
+            <a:srgbClr val="FF8762"/>
           </a:solidFill>
           <a:ln>
             <a:noFill/>
           </a:ln>
+          <a:effectLst/>
         </p:spPr>
         <p:style>
           <a:lnRef idx="1">
@@ -5752,14 +6415,14 @@
       </p:sp>
       <p:sp>
         <p:nvSpPr>
-          <p:cNvPr id="10" name="TextBox 9"/>
+          <p:cNvPr id="11" name="TextBox 10"/>
           <p:cNvSpPr txBox="1"/>
           <p:nvPr/>
         </p:nvSpPr>
         <p:spPr>
           <a:xfrm>
-            <a:off x="457200" y="1828800"/>
-            <a:ext cx="1920240" cy="685800"/>
+            <a:off x="502920" y="1900000"/>
+            <a:ext cx="1900000" cy="600000"/>
           </a:xfrm>
           <a:prstGeom prst="rect">
             <a:avLst/>
@@ -5767,14 +6430,14 @@
           <a:noFill/>
         </p:spPr>
         <p:txBody>
-          <a:bodyPr wrap="square">
+          <a:bodyPr wrap="square" anchor="ctr" lIns="0" rIns="0" tIns="0" bIns="0">
             <a:spAutoFit/>
           </a:bodyPr>
           <a:lstStyle/>
           <a:p>
             <a:pPr algn="ctr"/>
             <a:r>
-              <a:rPr sz="2600" b="1">
+              <a:rPr sz="1500" b="1">
                 <a:solidFill>
                   <a:srgbClr val="FFFFFF"/>
                 </a:solidFill>
@@ -5787,14 +6450,14 @@
       </p:sp>
       <p:sp>
         <p:nvSpPr>
-          <p:cNvPr id="11" name="TextBox 10"/>
+          <p:cNvPr id="12" name="TextBox 11"/>
           <p:cNvSpPr txBox="1"/>
           <p:nvPr/>
         </p:nvSpPr>
         <p:spPr>
           <a:xfrm>
-            <a:off x="2743200" y="1627632"/>
-            <a:ext cx="9079992" cy="1188720"/>
+            <a:off x="752920" y="2650000"/>
+            <a:ext cx="10683112" cy="500000"/>
           </a:xfrm>
           <a:prstGeom prst="rect">
             <a:avLst/>
@@ -5802,46 +6465,53 @@
           <a:noFill/>
         </p:spPr>
         <p:txBody>
-          <a:bodyPr wrap="square">
+          <a:bodyPr wrap="square" anchor="t" lIns="0" rIns="0" tIns="0" bIns="0">
             <a:spAutoFit/>
           </a:bodyPr>
           <a:lstStyle/>
           <a:p>
-            <a:pPr algn="l"/>
-            <a:r>
-              <a:rPr sz="2800" b="0">
-                <a:solidFill>
-                  <a:srgbClr val="1A1A1A"/>
+            <a:pPr algn="l">
+              <a:lnSpc>
+                <a:spcPct val="130000"/>
+              </a:lnSpc>
+            </a:pPr>
+            <a:r>
+              <a:rPr sz="1500" b="0">
+                <a:solidFill>
+                  <a:srgbClr val="6B6272"/>
                 </a:solidFill>
                 <a:latin typeface="Yu Gothic"/>
               </a:rPr>
-              <a:t>① 名前・大学
-② 最近の推し or マイブーム
-③ 一言キャッチフレーズ</a:t>
-            </a:r>
-          </a:p>
-        </p:txBody>
-      </p:sp>
-      <p:sp>
-        <p:nvSpPr>
-          <p:cNvPr id="12" name="Rectangle 11"/>
+              <a:t>① 名前・大学　　② 最近の推し or マイブーム　　③ 一言キャッチフレーズ</a:t>
+            </a:r>
+          </a:p>
+        </p:txBody>
+      </p:sp>
+      <p:sp>
+        <p:nvSpPr>
+          <p:cNvPr id="13" name="Rounded Rectangle 12"/>
           <p:cNvSpPr/>
           <p:nvPr/>
         </p:nvSpPr>
         <p:spPr>
           <a:xfrm>
-            <a:off x="457200" y="2816352"/>
-            <a:ext cx="11503152" cy="12700"/>
-          </a:xfrm>
-          <a:prstGeom prst="rect">
-            <a:avLst/>
+            <a:off x="502920" y="3550000"/>
+            <a:ext cx="5450000" cy="1450000"/>
+          </a:xfrm>
+          <a:prstGeom prst="roundRect">
+            <a:avLst>
+              <a:gd name="adj" fmla="val 6000"/>
+            </a:avLst>
           </a:prstGeom>
           <a:solidFill>
-            <a:srgbClr val="F4F4F4"/>
+            <a:srgbClr val="FFFFFF"/>
           </a:solidFill>
-          <a:ln>
-            <a:noFill/>
+          <a:ln w="19050">
+            <a:solidFill>
+              <a:srgbClr val="4E4454"/>
+            </a:solidFill>
           </a:ln>
+          <a:effectLst/>
         </p:spPr>
         <p:style>
           <a:lnRef idx="1">
@@ -5867,24 +6537,27 @@
       </p:sp>
       <p:sp>
         <p:nvSpPr>
-          <p:cNvPr id="13" name="Rectangle 12"/>
+          <p:cNvPr id="14" name="Rounded Rectangle 13"/>
           <p:cNvSpPr/>
           <p:nvPr/>
         </p:nvSpPr>
         <p:spPr>
           <a:xfrm>
-            <a:off x="457200" y="3154680"/>
-            <a:ext cx="1920240" cy="1234440"/>
-          </a:xfrm>
-          <a:prstGeom prst="rect">
-            <a:avLst/>
+            <a:off x="502920" y="3550000"/>
+            <a:ext cx="1900000" cy="600000"/>
+          </a:xfrm>
+          <a:prstGeom prst="roundRect">
+            <a:avLst>
+              <a:gd name="adj" fmla="val 0"/>
+            </a:avLst>
           </a:prstGeom>
           <a:solidFill>
-            <a:srgbClr val="FF7200"/>
+            <a:srgbClr val="FF8762"/>
           </a:solidFill>
           <a:ln>
             <a:noFill/>
           </a:ln>
+          <a:effectLst/>
         </p:spPr>
         <p:style>
           <a:lnRef idx="1">
@@ -5910,14 +6583,14 @@
       </p:sp>
       <p:sp>
         <p:nvSpPr>
-          <p:cNvPr id="14" name="TextBox 13"/>
+          <p:cNvPr id="15" name="TextBox 14"/>
           <p:cNvSpPr txBox="1"/>
           <p:nvPr/>
         </p:nvSpPr>
         <p:spPr>
           <a:xfrm>
-            <a:off x="457200" y="3429000"/>
-            <a:ext cx="1920240" cy="685800"/>
+            <a:off x="502920" y="3550000"/>
+            <a:ext cx="1900000" cy="600000"/>
           </a:xfrm>
           <a:prstGeom prst="rect">
             <a:avLst/>
@@ -5925,14 +6598,14 @@
           <a:noFill/>
         </p:spPr>
         <p:txBody>
-          <a:bodyPr wrap="square">
+          <a:bodyPr wrap="square" anchor="ctr" lIns="0" rIns="0" tIns="0" bIns="0">
             <a:spAutoFit/>
           </a:bodyPr>
           <a:lstStyle/>
           <a:p>
             <a:pPr algn="ctr"/>
             <a:r>
-              <a:rPr sz="2600" b="1">
+              <a:rPr sz="1500" b="1">
                 <a:solidFill>
                   <a:srgbClr val="FFFFFF"/>
                 </a:solidFill>
@@ -5945,14 +6618,14 @@
       </p:sp>
       <p:sp>
         <p:nvSpPr>
-          <p:cNvPr id="15" name="TextBox 14"/>
+          <p:cNvPr id="16" name="TextBox 15"/>
           <p:cNvSpPr txBox="1"/>
           <p:nvPr/>
         </p:nvSpPr>
         <p:spPr>
           <a:xfrm>
-            <a:off x="2743200" y="3227832"/>
-            <a:ext cx="9079992" cy="1188720"/>
+            <a:off x="752920" y="4300000"/>
+            <a:ext cx="4950000" cy="500000"/>
           </a:xfrm>
           <a:prstGeom prst="rect">
             <a:avLst/>
@@ -5960,16 +6633,20 @@
           <a:noFill/>
         </p:spPr>
         <p:txBody>
-          <a:bodyPr wrap="square">
+          <a:bodyPr wrap="square" anchor="t" lIns="0" rIns="0" tIns="0" bIns="0">
             <a:spAutoFit/>
           </a:bodyPr>
           <a:lstStyle/>
           <a:p>
-            <a:pPr algn="l"/>
-            <a:r>
-              <a:rPr sz="2800" b="0">
-                <a:solidFill>
-                  <a:srgbClr val="1A1A1A"/>
+            <a:pPr algn="l">
+              <a:lnSpc>
+                <a:spcPct val="130000"/>
+              </a:lnSpc>
+            </a:pPr>
+            <a:r>
+              <a:rPr sz="1500" b="0">
+                <a:solidFill>
+                  <a:srgbClr val="6B6272"/>
                 </a:solidFill>
                 <a:latin typeface="Yu Gothic"/>
               </a:rPr>
@@ -5980,24 +6657,29 @@
       </p:sp>
       <p:sp>
         <p:nvSpPr>
-          <p:cNvPr id="16" name="Rectangle 15"/>
+          <p:cNvPr id="17" name="Rounded Rectangle 16"/>
           <p:cNvSpPr/>
           <p:nvPr/>
         </p:nvSpPr>
         <p:spPr>
           <a:xfrm>
-            <a:off x="457200" y="4416552"/>
-            <a:ext cx="11503152" cy="12700"/>
-          </a:xfrm>
-          <a:prstGeom prst="rect">
-            <a:avLst/>
+            <a:off x="6235992" y="3550000"/>
+            <a:ext cx="5450000" cy="1450000"/>
+          </a:xfrm>
+          <a:prstGeom prst="roundRect">
+            <a:avLst>
+              <a:gd name="adj" fmla="val 6000"/>
+            </a:avLst>
           </a:prstGeom>
           <a:solidFill>
-            <a:srgbClr val="F4F4F4"/>
+            <a:srgbClr val="FFFFFF"/>
           </a:solidFill>
-          <a:ln>
-            <a:noFill/>
+          <a:ln w="19050">
+            <a:solidFill>
+              <a:srgbClr val="4E4454"/>
+            </a:solidFill>
           </a:ln>
+          <a:effectLst/>
         </p:spPr>
         <p:style>
           <a:lnRef idx="1">
@@ -6023,24 +6705,27 @@
       </p:sp>
       <p:sp>
         <p:nvSpPr>
-          <p:cNvPr id="17" name="Rectangle 16"/>
+          <p:cNvPr id="18" name="Rounded Rectangle 17"/>
           <p:cNvSpPr/>
           <p:nvPr/>
         </p:nvSpPr>
         <p:spPr>
           <a:xfrm>
-            <a:off x="457200" y="4754880"/>
-            <a:ext cx="1920240" cy="1234440"/>
-          </a:xfrm>
-          <a:prstGeom prst="rect">
-            <a:avLst/>
+            <a:off x="6235992" y="3550000"/>
+            <a:ext cx="1900000" cy="600000"/>
+          </a:xfrm>
+          <a:prstGeom prst="roundRect">
+            <a:avLst>
+              <a:gd name="adj" fmla="val 0"/>
+            </a:avLst>
           </a:prstGeom>
           <a:solidFill>
-            <a:srgbClr val="FF7200"/>
+            <a:srgbClr val="FF8762"/>
           </a:solidFill>
           <a:ln>
             <a:noFill/>
           </a:ln>
+          <a:effectLst/>
         </p:spPr>
         <p:style>
           <a:lnRef idx="1">
@@ -6066,14 +6751,14 @@
       </p:sp>
       <p:sp>
         <p:nvSpPr>
-          <p:cNvPr id="18" name="TextBox 17"/>
+          <p:cNvPr id="19" name="TextBox 18"/>
           <p:cNvSpPr txBox="1"/>
           <p:nvPr/>
         </p:nvSpPr>
         <p:spPr>
           <a:xfrm>
-            <a:off x="457200" y="5029200"/>
-            <a:ext cx="1920240" cy="685800"/>
+            <a:off x="6235992" y="3550000"/>
+            <a:ext cx="1900000" cy="600000"/>
           </a:xfrm>
           <a:prstGeom prst="rect">
             <a:avLst/>
@@ -6081,14 +6766,14 @@
           <a:noFill/>
         </p:spPr>
         <p:txBody>
-          <a:bodyPr wrap="square">
+          <a:bodyPr wrap="square" anchor="ctr" lIns="0" rIns="0" tIns="0" bIns="0">
             <a:spAutoFit/>
           </a:bodyPr>
           <a:lstStyle/>
           <a:p>
             <a:pPr algn="ctr"/>
             <a:r>
-              <a:rPr sz="2600" b="1">
+              <a:rPr sz="1500" b="1">
                 <a:solidFill>
                   <a:srgbClr val="FFFFFF"/>
                 </a:solidFill>
@@ -6101,14 +6786,14 @@
       </p:sp>
       <p:sp>
         <p:nvSpPr>
-          <p:cNvPr id="19" name="TextBox 18"/>
+          <p:cNvPr id="20" name="TextBox 19"/>
           <p:cNvSpPr txBox="1"/>
           <p:nvPr/>
         </p:nvSpPr>
         <p:spPr>
           <a:xfrm>
-            <a:off x="2743200" y="4828032"/>
-            <a:ext cx="9079992" cy="1188720"/>
+            <a:off x="6485992" y="4300000"/>
+            <a:ext cx="4950000" cy="500000"/>
           </a:xfrm>
           <a:prstGeom prst="rect">
             <a:avLst/>
@@ -6116,21 +6801,40 @@
           <a:noFill/>
         </p:spPr>
         <p:txBody>
-          <a:bodyPr wrap="square">
+          <a:bodyPr wrap="square" anchor="t" lIns="0" rIns="0" tIns="0" bIns="0">
             <a:spAutoFit/>
           </a:bodyPr>
           <a:lstStyle/>
           <a:p>
-            <a:pPr algn="l"/>
-            <a:r>
-              <a:rPr sz="2800" b="0">
-                <a:solidFill>
-                  <a:srgbClr val="1A1A1A"/>
+            <a:pPr algn="l">
+              <a:lnSpc>
+                <a:spcPct val="130000"/>
+              </a:lnSpc>
+            </a:pPr>
+            <a:r>
+              <a:rPr sz="1500" b="0">
+                <a:solidFill>
+                  <a:srgbClr val="6B6272"/>
                 </a:solidFill>
                 <a:latin typeface="Yu Gothic"/>
               </a:rPr>
-              <a:t>スタンプ・チャットでリアクション大歓迎！
-推しはモノ・人・食べ物・なんでもOK</a:t>
+              <a:t>スタンプ・チャットでリアクション大歓迎！</a:t>
+            </a:r>
+          </a:p>
+          <a:p>
+            <a:pPr algn="l">
+              <a:lnSpc>
+                <a:spcPct val="130000"/>
+              </a:lnSpc>
+            </a:pPr>
+            <a:r>
+              <a:rPr sz="1500" b="0">
+                <a:solidFill>
+                  <a:srgbClr val="6B6272"/>
+                </a:solidFill>
+                <a:latin typeface="Yu Gothic"/>
+              </a:rPr>
+              <a:t>推しはモノ・人・食べ物・なんでもOK</a:t>
             </a:r>
           </a:p>
         </p:txBody>
@@ -6168,11 +6872,12 @@
             <a:avLst/>
           </a:prstGeom>
           <a:solidFill>
-            <a:srgbClr val="FFFFFF"/>
+            <a:srgbClr val="FFFCF2"/>
           </a:solidFill>
           <a:ln>
             <a:noFill/>
           </a:ln>
+          <a:effectLst/>
         </p:spPr>
         <p:style>
           <a:lnRef idx="1">
@@ -6196,26 +6901,63 @@
           </a:p>
         </p:txBody>
       </p:sp>
-      <p:sp>
-        <p:nvSpPr>
-          <p:cNvPr id="3" name="Rectangle 2"/>
+      <p:cxnSp>
+        <p:nvCxnSpPr>
+          <p:cNvPr id="3" name="Connector 2"/>
+          <p:cNvCxnSpPr/>
+          <p:nvPr/>
+        </p:nvCxnSpPr>
+        <p:spPr>
+          <a:xfrm>
+            <a:off x="228600" y="0"/>
+            <a:ext cx="0" cy="6858000"/>
+          </a:xfrm>
+          <a:prstGeom prst="line">
+            <a:avLst/>
+          </a:prstGeom>
+          <a:ln w="12700">
+            <a:solidFill>
+              <a:srgbClr val="4E4454"/>
+            </a:solidFill>
+          </a:ln>
+          <a:effectLst/>
+        </p:spPr>
+        <p:style>
+          <a:lnRef idx="2">
+            <a:schemeClr val="accent1"/>
+          </a:lnRef>
+          <a:fillRef idx="0">
+            <a:schemeClr val="accent1"/>
+          </a:fillRef>
+          <a:effectRef idx="1">
+            <a:schemeClr val="accent1"/>
+          </a:effectRef>
+          <a:fontRef idx="minor">
+            <a:schemeClr val="tx1"/>
+          </a:fontRef>
+        </p:style>
+      </p:cxnSp>
+      <p:sp>
+        <p:nvSpPr>
+          <p:cNvPr id="4" name="Rectangle 3"/>
           <p:cNvSpPr/>
           <p:nvPr/>
         </p:nvSpPr>
         <p:spPr>
           <a:xfrm>
-            <a:off x="0" y="0"/>
-            <a:ext cx="201168" cy="6858000"/>
+            <a:off x="365760" y="502920"/>
+            <a:ext cx="4800600" cy="685800"/>
           </a:xfrm>
           <a:prstGeom prst="rect">
             <a:avLst/>
           </a:prstGeom>
           <a:solidFill>
-            <a:srgbClr val="FF7200"/>
+            <a:srgbClr val="4E4454"/>
           </a:solidFill>
           <a:ln>
             <a:noFill/>
           </a:ln>
+          <a:effectLst/>
         </p:spPr>
         <p:style>
           <a:lnRef idx="1">
@@ -6241,14 +6983,14 @@
       </p:sp>
       <p:sp>
         <p:nvSpPr>
-          <p:cNvPr id="4" name="Rectangle 3"/>
+          <p:cNvPr id="5" name="Rectangle 4"/>
           <p:cNvSpPr/>
           <p:nvPr/>
         </p:nvSpPr>
         <p:spPr>
           <a:xfrm>
-            <a:off x="0" y="0"/>
-            <a:ext cx="12188952" cy="1325880"/>
+            <a:off x="320040" y="457200"/>
+            <a:ext cx="4800600" cy="685800"/>
           </a:xfrm>
           <a:prstGeom prst="rect">
             <a:avLst/>
@@ -6256,9 +6998,12 @@
           <a:solidFill>
             <a:srgbClr val="FFFFFF"/>
           </a:solidFill>
-          <a:ln>
-            <a:noFill/>
+          <a:ln w="28575">
+            <a:solidFill>
+              <a:srgbClr val="4E4454"/>
+            </a:solidFill>
           </a:ln>
+          <a:effectLst/>
         </p:spPr>
         <p:style>
           <a:lnRef idx="1">
@@ -6284,24 +7029,64 @@
       </p:sp>
       <p:sp>
         <p:nvSpPr>
-          <p:cNvPr id="5" name="Rectangle 4"/>
+          <p:cNvPr id="6" name="TextBox 5"/>
+          <p:cNvSpPr txBox="1"/>
+          <p:nvPr/>
+        </p:nvSpPr>
+        <p:spPr>
+          <a:xfrm>
+            <a:off x="502920" y="457200"/>
+            <a:ext cx="4500000" cy="685800"/>
+          </a:xfrm>
+          <a:prstGeom prst="rect">
+            <a:avLst/>
+          </a:prstGeom>
+          <a:noFill/>
+        </p:spPr>
+        <p:txBody>
+          <a:bodyPr wrap="square" anchor="ctr" lIns="0" rIns="0" tIns="0" bIns="0">
+            <a:spAutoFit/>
+          </a:bodyPr>
+          <a:lstStyle/>
+          <a:p>
+            <a:pPr algn="l"/>
+            <a:r>
+              <a:rPr sz="2200" b="1">
+                <a:solidFill>
+                  <a:srgbClr val="4E4454"/>
+                </a:solidFill>
+                <a:latin typeface="Yu Gothic"/>
+              </a:rPr>
+              <a:t>②　共通点探し　【グループ内】</a:t>
+            </a:r>
+          </a:p>
+        </p:txBody>
+      </p:sp>
+      <p:sp>
+        <p:nvSpPr>
+          <p:cNvPr id="7" name="Rounded Rectangle 6"/>
           <p:cNvSpPr/>
           <p:nvPr/>
         </p:nvSpPr>
         <p:spPr>
           <a:xfrm>
-            <a:off x="0" y="1325880"/>
-            <a:ext cx="12188952" cy="38100"/>
-          </a:xfrm>
-          <a:prstGeom prst="rect">
-            <a:avLst/>
+            <a:off x="9994392" y="502920"/>
+            <a:ext cx="1828800" cy="502920"/>
+          </a:xfrm>
+          <a:prstGeom prst="roundRect">
+            <a:avLst>
+              <a:gd name="adj" fmla="val 50000"/>
+            </a:avLst>
           </a:prstGeom>
           <a:solidFill>
-            <a:srgbClr val="FF7200"/>
+            <a:srgbClr val="FFFFFF"/>
           </a:solidFill>
-          <a:ln>
-            <a:noFill/>
+          <a:ln w="19050">
+            <a:solidFill>
+              <a:srgbClr val="4E4454"/>
+            </a:solidFill>
           </a:ln>
+          <a:effectLst/>
         </p:spPr>
         <p:style>
           <a:lnRef idx="1">
@@ -6327,14 +7112,14 @@
       </p:sp>
       <p:sp>
         <p:nvSpPr>
-          <p:cNvPr id="6" name="TextBox 5"/>
+          <p:cNvPr id="8" name="TextBox 7"/>
           <p:cNvSpPr txBox="1"/>
           <p:nvPr/>
         </p:nvSpPr>
         <p:spPr>
           <a:xfrm>
-            <a:off x="457200" y="164592"/>
-            <a:ext cx="9262872" cy="1005840"/>
+            <a:off x="9994392" y="502920"/>
+            <a:ext cx="1828800" cy="502920"/>
           </a:xfrm>
           <a:prstGeom prst="rect">
             <a:avLst/>
@@ -6342,44 +7127,49 @@
           <a:noFill/>
         </p:spPr>
         <p:txBody>
-          <a:bodyPr wrap="square">
+          <a:bodyPr wrap="square" anchor="ctr" lIns="0" rIns="0" tIns="0" bIns="0">
             <a:spAutoFit/>
           </a:bodyPr>
           <a:lstStyle/>
           <a:p>
-            <a:pPr algn="l"/>
-            <a:r>
-              <a:rPr sz="4400" b="1">
-                <a:solidFill>
-                  <a:srgbClr val="1A1A1A"/>
+            <a:pPr algn="ctr"/>
+            <a:r>
+              <a:rPr sz="1400" b="1">
+                <a:solidFill>
+                  <a:srgbClr val="FF8762"/>
                 </a:solidFill>
                 <a:latin typeface="Yu Gothic"/>
               </a:rPr>
-              <a:t>②　共通点探し　【グループ内】</a:t>
-            </a:r>
-          </a:p>
-        </p:txBody>
-      </p:sp>
-      <p:sp>
-        <p:nvSpPr>
-          <p:cNvPr id="7" name="Rectangle 6"/>
+              <a:t>15〜30分</a:t>
+            </a:r>
+          </a:p>
+        </p:txBody>
+      </p:sp>
+      <p:sp>
+        <p:nvSpPr>
+          <p:cNvPr id="9" name="Rounded Rectangle 8"/>
           <p:cNvSpPr/>
           <p:nvPr/>
         </p:nvSpPr>
         <p:spPr>
           <a:xfrm>
-            <a:off x="9628632" y="164592"/>
-            <a:ext cx="2194560" cy="566928"/>
-          </a:xfrm>
-          <a:prstGeom prst="rect">
-            <a:avLst/>
+            <a:off x="502920" y="1850000"/>
+            <a:ext cx="11183112" cy="1020000"/>
+          </a:xfrm>
+          <a:prstGeom prst="roundRect">
+            <a:avLst>
+              <a:gd name="adj" fmla="val 10000"/>
+            </a:avLst>
           </a:prstGeom>
           <a:solidFill>
-            <a:srgbClr val="FF7200"/>
+            <a:srgbClr val="FFFFFF"/>
           </a:solidFill>
-          <a:ln>
-            <a:noFill/>
+          <a:ln w="15875">
+            <a:solidFill>
+              <a:srgbClr val="4E4454"/>
+            </a:solidFill>
           </a:ln>
+          <a:effectLst/>
         </p:spPr>
         <p:style>
           <a:lnRef idx="1">
@@ -6405,59 +7195,25 @@
       </p:sp>
       <p:sp>
         <p:nvSpPr>
-          <p:cNvPr id="8" name="TextBox 7"/>
-          <p:cNvSpPr txBox="1"/>
-          <p:nvPr/>
-        </p:nvSpPr>
-        <p:spPr>
-          <a:xfrm>
-            <a:off x="9674352" y="201168"/>
-            <a:ext cx="2103120" cy="502920"/>
-          </a:xfrm>
-          <a:prstGeom prst="rect">
-            <a:avLst/>
-          </a:prstGeom>
-          <a:noFill/>
-        </p:spPr>
-        <p:txBody>
-          <a:bodyPr wrap="square">
-            <a:spAutoFit/>
-          </a:bodyPr>
-          <a:lstStyle/>
-          <a:p>
-            <a:pPr algn="ctr"/>
-            <a:r>
-              <a:rPr sz="2400" b="1">
-                <a:solidFill>
-                  <a:srgbClr val="FFFFFF"/>
-                </a:solidFill>
-                <a:latin typeface="Yu Gothic"/>
-              </a:rPr>
-              <a:t>15〜30分</a:t>
-            </a:r>
-          </a:p>
-        </p:txBody>
-      </p:sp>
-      <p:sp>
-        <p:nvSpPr>
-          <p:cNvPr id="9" name="Rectangle 8"/>
+          <p:cNvPr id="10" name="Oval 9"/>
           <p:cNvSpPr/>
           <p:nvPr/>
         </p:nvSpPr>
         <p:spPr>
           <a:xfrm>
-            <a:off x="457200" y="1600200"/>
-            <a:ext cx="594360" cy="594360"/>
-          </a:xfrm>
-          <a:prstGeom prst="rect">
+            <a:off x="650000" y="2110000"/>
+            <a:ext cx="500000" cy="500000"/>
+          </a:xfrm>
+          <a:prstGeom prst="ellipse">
             <a:avLst/>
           </a:prstGeom>
           <a:solidFill>
-            <a:srgbClr val="FF7200"/>
+            <a:srgbClr val="FF8762"/>
           </a:solidFill>
           <a:ln>
             <a:noFill/>
           </a:ln>
+          <a:effectLst/>
         </p:spPr>
         <p:style>
           <a:lnRef idx="1">
@@ -6483,14 +7239,14 @@
       </p:sp>
       <p:sp>
         <p:nvSpPr>
-          <p:cNvPr id="10" name="TextBox 9"/>
+          <p:cNvPr id="11" name="TextBox 10"/>
           <p:cNvSpPr txBox="1"/>
           <p:nvPr/>
         </p:nvSpPr>
         <p:spPr>
           <a:xfrm>
-            <a:off x="457200" y="1618488"/>
-            <a:ext cx="594360" cy="548640"/>
+            <a:off x="650000" y="2110000"/>
+            <a:ext cx="500000" cy="500000"/>
           </a:xfrm>
           <a:prstGeom prst="rect">
             <a:avLst/>
@@ -6498,14 +7254,14 @@
           <a:noFill/>
         </p:spPr>
         <p:txBody>
-          <a:bodyPr wrap="square">
+          <a:bodyPr wrap="square" anchor="ctr" lIns="0" rIns="0" tIns="0" bIns="0">
             <a:spAutoFit/>
           </a:bodyPr>
           <a:lstStyle/>
           <a:p>
             <a:pPr algn="ctr"/>
             <a:r>
-              <a:rPr sz="2800" b="1">
+              <a:rPr sz="1800" b="1">
                 <a:solidFill>
                   <a:srgbClr val="FFFFFF"/>
                 </a:solidFill>
@@ -6518,14 +7274,14 @@
       </p:sp>
       <p:sp>
         <p:nvSpPr>
-          <p:cNvPr id="11" name="TextBox 10"/>
+          <p:cNvPr id="12" name="TextBox 11"/>
           <p:cNvSpPr txBox="1"/>
           <p:nvPr/>
         </p:nvSpPr>
         <p:spPr>
           <a:xfrm>
-            <a:off x="1280160" y="1508760"/>
-            <a:ext cx="10543032" cy="1188720"/>
+            <a:off x="1350000" y="1850000"/>
+            <a:ext cx="10100000" cy="1020000"/>
           </a:xfrm>
           <a:prstGeom prst="rect">
             <a:avLst/>
@@ -6533,16 +7289,20 @@
           <a:noFill/>
         </p:spPr>
         <p:txBody>
-          <a:bodyPr wrap="square">
+          <a:bodyPr wrap="square" anchor="ctr" lIns="0" rIns="0" tIns="0" bIns="0">
             <a:spAutoFit/>
           </a:bodyPr>
           <a:lstStyle/>
           <a:p>
-            <a:pPr algn="l"/>
-            <a:r>
-              <a:rPr sz="2800" b="0">
-                <a:solidFill>
-                  <a:srgbClr val="1A1A1A"/>
+            <a:pPr algn="l">
+              <a:lnSpc>
+                <a:spcPct val="115000"/>
+              </a:lnSpc>
+            </a:pPr>
+            <a:r>
+              <a:rPr sz="1500" b="0">
+                <a:solidFill>
+                  <a:srgbClr val="4E4454"/>
                 </a:solidFill>
                 <a:latin typeface="Yu Gothic"/>
               </a:rPr>
@@ -6553,24 +7313,29 @@
       </p:sp>
       <p:sp>
         <p:nvSpPr>
-          <p:cNvPr id="12" name="Rectangle 11"/>
+          <p:cNvPr id="13" name="Rounded Rectangle 12"/>
           <p:cNvSpPr/>
           <p:nvPr/>
         </p:nvSpPr>
         <p:spPr>
           <a:xfrm>
-            <a:off x="457200" y="2697480"/>
-            <a:ext cx="11503152" cy="12700"/>
-          </a:xfrm>
-          <a:prstGeom prst="rect">
-            <a:avLst/>
+            <a:off x="502920" y="2950000"/>
+            <a:ext cx="11183112" cy="1020000"/>
+          </a:xfrm>
+          <a:prstGeom prst="roundRect">
+            <a:avLst>
+              <a:gd name="adj" fmla="val 10000"/>
+            </a:avLst>
           </a:prstGeom>
           <a:solidFill>
-            <a:srgbClr val="F4F4F4"/>
+            <a:srgbClr val="FFFFFF"/>
           </a:solidFill>
-          <a:ln>
-            <a:noFill/>
+          <a:ln w="15875">
+            <a:solidFill>
+              <a:srgbClr val="4E4454"/>
+            </a:solidFill>
           </a:ln>
+          <a:effectLst/>
         </p:spPr>
         <p:style>
           <a:lnRef idx="1">
@@ -6596,24 +7361,25 @@
       </p:sp>
       <p:sp>
         <p:nvSpPr>
-          <p:cNvPr id="13" name="Rectangle 12"/>
+          <p:cNvPr id="14" name="Oval 13"/>
           <p:cNvSpPr/>
           <p:nvPr/>
         </p:nvSpPr>
         <p:spPr>
           <a:xfrm>
-            <a:off x="457200" y="2834640"/>
-            <a:ext cx="594360" cy="594360"/>
-          </a:xfrm>
-          <a:prstGeom prst="rect">
+            <a:off x="650000" y="3210000"/>
+            <a:ext cx="500000" cy="500000"/>
+          </a:xfrm>
+          <a:prstGeom prst="ellipse">
             <a:avLst/>
           </a:prstGeom>
           <a:solidFill>
-            <a:srgbClr val="FF7200"/>
+            <a:srgbClr val="FF8762"/>
           </a:solidFill>
           <a:ln>
             <a:noFill/>
           </a:ln>
+          <a:effectLst/>
         </p:spPr>
         <p:style>
           <a:lnRef idx="1">
@@ -6639,14 +7405,14 @@
       </p:sp>
       <p:sp>
         <p:nvSpPr>
-          <p:cNvPr id="14" name="TextBox 13"/>
+          <p:cNvPr id="15" name="TextBox 14"/>
           <p:cNvSpPr txBox="1"/>
           <p:nvPr/>
         </p:nvSpPr>
         <p:spPr>
           <a:xfrm>
-            <a:off x="457200" y="2852928"/>
-            <a:ext cx="594360" cy="548640"/>
+            <a:off x="650000" y="3210000"/>
+            <a:ext cx="500000" cy="500000"/>
           </a:xfrm>
           <a:prstGeom prst="rect">
             <a:avLst/>
@@ -6654,14 +7420,14 @@
           <a:noFill/>
         </p:spPr>
         <p:txBody>
-          <a:bodyPr wrap="square">
+          <a:bodyPr wrap="square" anchor="ctr" lIns="0" rIns="0" tIns="0" bIns="0">
             <a:spAutoFit/>
           </a:bodyPr>
           <a:lstStyle/>
           <a:p>
             <a:pPr algn="ctr"/>
             <a:r>
-              <a:rPr sz="2800" b="1">
+              <a:rPr sz="1800" b="1">
                 <a:solidFill>
                   <a:srgbClr val="FFFFFF"/>
                 </a:solidFill>
@@ -6674,14 +7440,14 @@
       </p:sp>
       <p:sp>
         <p:nvSpPr>
-          <p:cNvPr id="15" name="TextBox 14"/>
+          <p:cNvPr id="16" name="TextBox 15"/>
           <p:cNvSpPr txBox="1"/>
           <p:nvPr/>
         </p:nvSpPr>
         <p:spPr>
           <a:xfrm>
-            <a:off x="1280160" y="2743200"/>
-            <a:ext cx="10543032" cy="1188720"/>
+            <a:off x="1350000" y="2950000"/>
+            <a:ext cx="10100000" cy="1020000"/>
           </a:xfrm>
           <a:prstGeom prst="rect">
             <a:avLst/>
@@ -6689,45 +7455,69 @@
           <a:noFill/>
         </p:spPr>
         <p:txBody>
-          <a:bodyPr wrap="square">
+          <a:bodyPr wrap="square" anchor="ctr" lIns="0" rIns="0" tIns="0" bIns="0">
             <a:spAutoFit/>
           </a:bodyPr>
           <a:lstStyle/>
           <a:p>
-            <a:pPr algn="l"/>
-            <a:r>
-              <a:rPr sz="2800" b="0">
-                <a:solidFill>
-                  <a:srgbClr val="1A1A1A"/>
+            <a:pPr algn="l">
+              <a:lnSpc>
+                <a:spcPct val="115000"/>
+              </a:lnSpc>
+            </a:pPr>
+            <a:r>
+              <a:rPr sz="1500" b="0">
+                <a:solidFill>
+                  <a:srgbClr val="4E4454"/>
                 </a:solidFill>
                 <a:latin typeface="Yu Gothic"/>
               </a:rPr>
-              <a:t>"当たり前すぎる共通点"は禁止
-（大学生・服を着ている・スマホを持っている… NG！）</a:t>
-            </a:r>
-          </a:p>
-        </p:txBody>
-      </p:sp>
-      <p:sp>
-        <p:nvSpPr>
-          <p:cNvPr id="16" name="Rectangle 15"/>
+              <a:t>"当たり前すぎる共通点"は禁止</a:t>
+            </a:r>
+          </a:p>
+          <a:p>
+            <a:pPr algn="l">
+              <a:lnSpc>
+                <a:spcPct val="115000"/>
+              </a:lnSpc>
+            </a:pPr>
+            <a:r>
+              <a:rPr sz="1500" b="0">
+                <a:solidFill>
+                  <a:srgbClr val="4E4454"/>
+                </a:solidFill>
+                <a:latin typeface="Yu Gothic"/>
+              </a:rPr>
+              <a:t>（大学生・服を着ている・スマホを持っている… NG！）</a:t>
+            </a:r>
+          </a:p>
+        </p:txBody>
+      </p:sp>
+      <p:sp>
+        <p:nvSpPr>
+          <p:cNvPr id="17" name="Rounded Rectangle 16"/>
           <p:cNvSpPr/>
           <p:nvPr/>
         </p:nvSpPr>
         <p:spPr>
           <a:xfrm>
-            <a:off x="457200" y="3931920"/>
-            <a:ext cx="11503152" cy="12700"/>
-          </a:xfrm>
-          <a:prstGeom prst="rect">
-            <a:avLst/>
+            <a:off x="502920" y="4050000"/>
+            <a:ext cx="11183112" cy="1020000"/>
+          </a:xfrm>
+          <a:prstGeom prst="roundRect">
+            <a:avLst>
+              <a:gd name="adj" fmla="val 10000"/>
+            </a:avLst>
           </a:prstGeom>
           <a:solidFill>
-            <a:srgbClr val="F4F4F4"/>
+            <a:srgbClr val="FFFFFF"/>
           </a:solidFill>
-          <a:ln>
-            <a:noFill/>
+          <a:ln w="15875">
+            <a:solidFill>
+              <a:srgbClr val="4E4454"/>
+            </a:solidFill>
           </a:ln>
+          <a:effectLst/>
         </p:spPr>
         <p:style>
           <a:lnRef idx="1">
@@ -6753,24 +7543,25 @@
       </p:sp>
       <p:sp>
         <p:nvSpPr>
-          <p:cNvPr id="17" name="Rectangle 16"/>
+          <p:cNvPr id="18" name="Oval 17"/>
           <p:cNvSpPr/>
           <p:nvPr/>
         </p:nvSpPr>
         <p:spPr>
           <a:xfrm>
-            <a:off x="457200" y="4069080"/>
-            <a:ext cx="594360" cy="594360"/>
-          </a:xfrm>
-          <a:prstGeom prst="rect">
+            <a:off x="650000" y="4310000"/>
+            <a:ext cx="500000" cy="500000"/>
+          </a:xfrm>
+          <a:prstGeom prst="ellipse">
             <a:avLst/>
           </a:prstGeom>
           <a:solidFill>
-            <a:srgbClr val="FF7200"/>
+            <a:srgbClr val="FF8762"/>
           </a:solidFill>
           <a:ln>
             <a:noFill/>
           </a:ln>
+          <a:effectLst/>
         </p:spPr>
         <p:style>
           <a:lnRef idx="1">
@@ -6796,14 +7587,14 @@
       </p:sp>
       <p:sp>
         <p:nvSpPr>
-          <p:cNvPr id="18" name="TextBox 17"/>
+          <p:cNvPr id="19" name="TextBox 18"/>
           <p:cNvSpPr txBox="1"/>
           <p:nvPr/>
         </p:nvSpPr>
         <p:spPr>
           <a:xfrm>
-            <a:off x="457200" y="4087368"/>
-            <a:ext cx="594360" cy="548640"/>
+            <a:off x="650000" y="4310000"/>
+            <a:ext cx="500000" cy="500000"/>
           </a:xfrm>
           <a:prstGeom prst="rect">
             <a:avLst/>
@@ -6811,14 +7602,14 @@
           <a:noFill/>
         </p:spPr>
         <p:txBody>
-          <a:bodyPr wrap="square">
+          <a:bodyPr wrap="square" anchor="ctr" lIns="0" rIns="0" tIns="0" bIns="0">
             <a:spAutoFit/>
           </a:bodyPr>
           <a:lstStyle/>
           <a:p>
             <a:pPr algn="ctr"/>
             <a:r>
-              <a:rPr sz="2800" b="1">
+              <a:rPr sz="1800" b="1">
                 <a:solidFill>
                   <a:srgbClr val="FFFFFF"/>
                 </a:solidFill>
@@ -6831,14 +7622,14 @@
       </p:sp>
       <p:sp>
         <p:nvSpPr>
-          <p:cNvPr id="19" name="TextBox 18"/>
+          <p:cNvPr id="20" name="TextBox 19"/>
           <p:cNvSpPr txBox="1"/>
           <p:nvPr/>
         </p:nvSpPr>
         <p:spPr>
           <a:xfrm>
-            <a:off x="1280160" y="3977640"/>
-            <a:ext cx="10543032" cy="1188720"/>
+            <a:off x="1350000" y="4050000"/>
+            <a:ext cx="10100000" cy="1020000"/>
           </a:xfrm>
           <a:prstGeom prst="rect">
             <a:avLst/>
@@ -6846,45 +7637,69 @@
           <a:noFill/>
         </p:spPr>
         <p:txBody>
-          <a:bodyPr wrap="square">
+          <a:bodyPr wrap="square" anchor="ctr" lIns="0" rIns="0" tIns="0" bIns="0">
             <a:spAutoFit/>
           </a:bodyPr>
           <a:lstStyle/>
           <a:p>
-            <a:pPr algn="l"/>
-            <a:r>
-              <a:rPr sz="2800" b="0">
-                <a:solidFill>
-                  <a:srgbClr val="1A1A1A"/>
+            <a:pPr algn="l">
+              <a:lnSpc>
+                <a:spcPct val="115000"/>
+              </a:lnSpc>
+            </a:pPr>
+            <a:r>
+              <a:rPr sz="1500" b="0">
+                <a:solidFill>
+                  <a:srgbClr val="4E4454"/>
                 </a:solidFill>
                 <a:latin typeface="Yu Gothic"/>
               </a:rPr>
-              <a:t>深い共通点ほど価値が高い
-（"日本人" ＜ "小学校で習い事を途中で辞めた経験あり"）</a:t>
-            </a:r>
-          </a:p>
-        </p:txBody>
-      </p:sp>
-      <p:sp>
-        <p:nvSpPr>
-          <p:cNvPr id="20" name="Rectangle 19"/>
+              <a:t>深い共通点ほど価値が高い</a:t>
+            </a:r>
+          </a:p>
+          <a:p>
+            <a:pPr algn="l">
+              <a:lnSpc>
+                <a:spcPct val="115000"/>
+              </a:lnSpc>
+            </a:pPr>
+            <a:r>
+              <a:rPr sz="1500" b="0">
+                <a:solidFill>
+                  <a:srgbClr val="4E4454"/>
+                </a:solidFill>
+                <a:latin typeface="Yu Gothic"/>
+              </a:rPr>
+              <a:t>（"日本人" ＜ "小学校で習い事を途中で辞めた経験あり"）</a:t>
+            </a:r>
+          </a:p>
+        </p:txBody>
+      </p:sp>
+      <p:sp>
+        <p:nvSpPr>
+          <p:cNvPr id="21" name="Rounded Rectangle 20"/>
           <p:cNvSpPr/>
           <p:nvPr/>
         </p:nvSpPr>
         <p:spPr>
           <a:xfrm>
-            <a:off x="457200" y="5166360"/>
-            <a:ext cx="11503152" cy="12700"/>
-          </a:xfrm>
-          <a:prstGeom prst="rect">
-            <a:avLst/>
+            <a:off x="502920" y="5150000"/>
+            <a:ext cx="11183112" cy="1020000"/>
+          </a:xfrm>
+          <a:prstGeom prst="roundRect">
+            <a:avLst>
+              <a:gd name="adj" fmla="val 10000"/>
+            </a:avLst>
           </a:prstGeom>
           <a:solidFill>
-            <a:srgbClr val="F4F4F4"/>
+            <a:srgbClr val="FFFFFF"/>
           </a:solidFill>
-          <a:ln>
-            <a:noFill/>
+          <a:ln w="15875">
+            <a:solidFill>
+              <a:srgbClr val="4E4454"/>
+            </a:solidFill>
           </a:ln>
+          <a:effectLst/>
         </p:spPr>
         <p:style>
           <a:lnRef idx="1">
@@ -6910,24 +7725,25 @@
       </p:sp>
       <p:sp>
         <p:nvSpPr>
-          <p:cNvPr id="21" name="Rectangle 20"/>
+          <p:cNvPr id="22" name="Oval 21"/>
           <p:cNvSpPr/>
           <p:nvPr/>
         </p:nvSpPr>
         <p:spPr>
           <a:xfrm>
-            <a:off x="457200" y="5303520"/>
-            <a:ext cx="594360" cy="594360"/>
-          </a:xfrm>
-          <a:prstGeom prst="rect">
+            <a:off x="650000" y="5410000"/>
+            <a:ext cx="500000" cy="500000"/>
+          </a:xfrm>
+          <a:prstGeom prst="ellipse">
             <a:avLst/>
           </a:prstGeom>
           <a:solidFill>
-            <a:srgbClr val="FF7200"/>
+            <a:srgbClr val="FF8762"/>
           </a:solidFill>
           <a:ln>
             <a:noFill/>
           </a:ln>
+          <a:effectLst/>
         </p:spPr>
         <p:style>
           <a:lnRef idx="1">
@@ -6953,14 +7769,14 @@
       </p:sp>
       <p:sp>
         <p:nvSpPr>
-          <p:cNvPr id="22" name="TextBox 21"/>
+          <p:cNvPr id="23" name="TextBox 22"/>
           <p:cNvSpPr txBox="1"/>
           <p:nvPr/>
         </p:nvSpPr>
         <p:spPr>
           <a:xfrm>
-            <a:off x="457200" y="5321808"/>
-            <a:ext cx="594360" cy="548640"/>
+            <a:off x="650000" y="5410000"/>
+            <a:ext cx="500000" cy="500000"/>
           </a:xfrm>
           <a:prstGeom prst="rect">
             <a:avLst/>
@@ -6968,14 +7784,14 @@
           <a:noFill/>
         </p:spPr>
         <p:txBody>
-          <a:bodyPr wrap="square">
+          <a:bodyPr wrap="square" anchor="ctr" lIns="0" rIns="0" tIns="0" bIns="0">
             <a:spAutoFit/>
           </a:bodyPr>
           <a:lstStyle/>
           <a:p>
             <a:pPr algn="ctr"/>
             <a:r>
-              <a:rPr sz="2800" b="1">
+              <a:rPr sz="1800" b="1">
                 <a:solidFill>
                   <a:srgbClr val="FFFFFF"/>
                 </a:solidFill>
@@ -6988,14 +7804,14 @@
       </p:sp>
       <p:sp>
         <p:nvSpPr>
-          <p:cNvPr id="23" name="TextBox 22"/>
+          <p:cNvPr id="24" name="TextBox 23"/>
           <p:cNvSpPr txBox="1"/>
           <p:nvPr/>
         </p:nvSpPr>
         <p:spPr>
           <a:xfrm>
-            <a:off x="1280160" y="5212080"/>
-            <a:ext cx="10543032" cy="1188720"/>
+            <a:off x="1350000" y="5150000"/>
+            <a:ext cx="10100000" cy="1020000"/>
           </a:xfrm>
           <a:prstGeom prst="rect">
             <a:avLst/>
@@ -7003,21 +7819,40 @@
           <a:noFill/>
         </p:spPr>
         <p:txBody>
-          <a:bodyPr wrap="square">
+          <a:bodyPr wrap="square" anchor="ctr" lIns="0" rIns="0" tIns="0" bIns="0">
             <a:spAutoFit/>
           </a:bodyPr>
           <a:lstStyle/>
           <a:p>
-            <a:pPr algn="l"/>
-            <a:r>
-              <a:rPr sz="2800" b="0">
-                <a:solidFill>
-                  <a:srgbClr val="1A1A1A"/>
+            <a:pPr algn="l">
+              <a:lnSpc>
+                <a:spcPct val="115000"/>
+              </a:lnSpc>
+            </a:pPr>
+            <a:r>
+              <a:rPr sz="1500" b="0">
+                <a:solidFill>
+                  <a:srgbClr val="4E4454"/>
                 </a:solidFill>
                 <a:latin typeface="Yu Gothic"/>
               </a:rPr>
-              <a:t>後で全体に発表するので
-エピソードつきの面白い共通点を優先してメモ！</a:t>
+              <a:t>後で全体に発表するので</a:t>
+            </a:r>
+          </a:p>
+          <a:p>
+            <a:pPr algn="l">
+              <a:lnSpc>
+                <a:spcPct val="115000"/>
+              </a:lnSpc>
+            </a:pPr>
+            <a:r>
+              <a:rPr sz="1500" b="0">
+                <a:solidFill>
+                  <a:srgbClr val="4E4454"/>
+                </a:solidFill>
+                <a:latin typeface="Yu Gothic"/>
+              </a:rPr>
+              <a:t>エピソードつきの面白い共通点を優先してメモ！</a:t>
             </a:r>
           </a:p>
         </p:txBody>
@@ -7055,11 +7890,12 @@
             <a:avLst/>
           </a:prstGeom>
           <a:solidFill>
-            <a:srgbClr val="FFFFFF"/>
+            <a:srgbClr val="FFFCF2"/>
           </a:solidFill>
           <a:ln>
             <a:noFill/>
           </a:ln>
+          <a:effectLst/>
         </p:spPr>
         <p:style>
           <a:lnRef idx="1">
@@ -7083,26 +7919,63 @@
           </a:p>
         </p:txBody>
       </p:sp>
-      <p:sp>
-        <p:nvSpPr>
-          <p:cNvPr id="3" name="Rectangle 2"/>
+      <p:cxnSp>
+        <p:nvCxnSpPr>
+          <p:cNvPr id="3" name="Connector 2"/>
+          <p:cNvCxnSpPr/>
+          <p:nvPr/>
+        </p:nvCxnSpPr>
+        <p:spPr>
+          <a:xfrm>
+            <a:off x="228600" y="0"/>
+            <a:ext cx="0" cy="6858000"/>
+          </a:xfrm>
+          <a:prstGeom prst="line">
+            <a:avLst/>
+          </a:prstGeom>
+          <a:ln w="12700">
+            <a:solidFill>
+              <a:srgbClr val="4E4454"/>
+            </a:solidFill>
+          </a:ln>
+          <a:effectLst/>
+        </p:spPr>
+        <p:style>
+          <a:lnRef idx="2">
+            <a:schemeClr val="accent1"/>
+          </a:lnRef>
+          <a:fillRef idx="0">
+            <a:schemeClr val="accent1"/>
+          </a:fillRef>
+          <a:effectRef idx="1">
+            <a:schemeClr val="accent1"/>
+          </a:effectRef>
+          <a:fontRef idx="minor">
+            <a:schemeClr val="tx1"/>
+          </a:fontRef>
+        </p:style>
+      </p:cxnSp>
+      <p:sp>
+        <p:nvSpPr>
+          <p:cNvPr id="4" name="Rectangle 3"/>
           <p:cNvSpPr/>
           <p:nvPr/>
         </p:nvSpPr>
         <p:spPr>
           <a:xfrm>
-            <a:off x="0" y="0"/>
-            <a:ext cx="201168" cy="6858000"/>
+            <a:off x="365760" y="502920"/>
+            <a:ext cx="4800600" cy="685800"/>
           </a:xfrm>
           <a:prstGeom prst="rect">
             <a:avLst/>
           </a:prstGeom>
           <a:solidFill>
-            <a:srgbClr val="FF7200"/>
+            <a:srgbClr val="4E4454"/>
           </a:solidFill>
           <a:ln>
             <a:noFill/>
           </a:ln>
+          <a:effectLst/>
         </p:spPr>
         <p:style>
           <a:lnRef idx="1">
@@ -7128,14 +8001,14 @@
       </p:sp>
       <p:sp>
         <p:nvSpPr>
-          <p:cNvPr id="4" name="Rectangle 3"/>
+          <p:cNvPr id="5" name="Rectangle 4"/>
           <p:cNvSpPr/>
           <p:nvPr/>
         </p:nvSpPr>
         <p:spPr>
           <a:xfrm>
-            <a:off x="0" y="0"/>
-            <a:ext cx="12188952" cy="1325880"/>
+            <a:off x="320040" y="457200"/>
+            <a:ext cx="4800600" cy="685800"/>
           </a:xfrm>
           <a:prstGeom prst="rect">
             <a:avLst/>
@@ -7143,9 +8016,12 @@
           <a:solidFill>
             <a:srgbClr val="FFFFFF"/>
           </a:solidFill>
-          <a:ln>
-            <a:noFill/>
+          <a:ln w="28575">
+            <a:solidFill>
+              <a:srgbClr val="4E4454"/>
+            </a:solidFill>
           </a:ln>
+          <a:effectLst/>
         </p:spPr>
         <p:style>
           <a:lnRef idx="1">
@@ -7171,24 +8047,64 @@
       </p:sp>
       <p:sp>
         <p:nvSpPr>
-          <p:cNvPr id="5" name="Rectangle 4"/>
+          <p:cNvPr id="6" name="TextBox 5"/>
+          <p:cNvSpPr txBox="1"/>
+          <p:nvPr/>
+        </p:nvSpPr>
+        <p:spPr>
+          <a:xfrm>
+            <a:off x="502920" y="457200"/>
+            <a:ext cx="4500000" cy="685800"/>
+          </a:xfrm>
+          <a:prstGeom prst="rect">
+            <a:avLst/>
+          </a:prstGeom>
+          <a:noFill/>
+        </p:spPr>
+        <p:txBody>
+          <a:bodyPr wrap="square" anchor="ctr" lIns="0" rIns="0" tIns="0" bIns="0">
+            <a:spAutoFit/>
+          </a:bodyPr>
+          <a:lstStyle/>
+          <a:p>
+            <a:pPr algn="l"/>
+            <a:r>
+              <a:rPr sz="2200" b="1">
+                <a:solidFill>
+                  <a:srgbClr val="4E4454"/>
+                </a:solidFill>
+                <a:latin typeface="Yu Gothic"/>
+              </a:rPr>
+              <a:t>③　共通点発表　【全体】</a:t>
+            </a:r>
+          </a:p>
+        </p:txBody>
+      </p:sp>
+      <p:sp>
+        <p:nvSpPr>
+          <p:cNvPr id="7" name="Rounded Rectangle 6"/>
           <p:cNvSpPr/>
           <p:nvPr/>
         </p:nvSpPr>
         <p:spPr>
           <a:xfrm>
-            <a:off x="0" y="1325880"/>
-            <a:ext cx="12188952" cy="38100"/>
-          </a:xfrm>
-          <a:prstGeom prst="rect">
-            <a:avLst/>
+            <a:off x="9994392" y="502920"/>
+            <a:ext cx="1828800" cy="502920"/>
+          </a:xfrm>
+          <a:prstGeom prst="roundRect">
+            <a:avLst>
+              <a:gd name="adj" fmla="val 50000"/>
+            </a:avLst>
           </a:prstGeom>
           <a:solidFill>
-            <a:srgbClr val="FF7200"/>
+            <a:srgbClr val="FFFFFF"/>
           </a:solidFill>
-          <a:ln>
-            <a:noFill/>
+          <a:ln w="19050">
+            <a:solidFill>
+              <a:srgbClr val="4E4454"/>
+            </a:solidFill>
           </a:ln>
+          <a:effectLst/>
         </p:spPr>
         <p:style>
           <a:lnRef idx="1">
@@ -7214,14 +8130,14 @@
       </p:sp>
       <p:sp>
         <p:nvSpPr>
-          <p:cNvPr id="6" name="TextBox 5"/>
+          <p:cNvPr id="8" name="TextBox 7"/>
           <p:cNvSpPr txBox="1"/>
           <p:nvPr/>
         </p:nvSpPr>
         <p:spPr>
           <a:xfrm>
-            <a:off x="457200" y="164592"/>
-            <a:ext cx="9262872" cy="1005840"/>
+            <a:off x="9994392" y="502920"/>
+            <a:ext cx="1828800" cy="502920"/>
           </a:xfrm>
           <a:prstGeom prst="rect">
             <a:avLst/>
@@ -7229,44 +8145,49 @@
           <a:noFill/>
         </p:spPr>
         <p:txBody>
-          <a:bodyPr wrap="square">
+          <a:bodyPr wrap="square" anchor="ctr" lIns="0" rIns="0" tIns="0" bIns="0">
             <a:spAutoFit/>
           </a:bodyPr>
           <a:lstStyle/>
           <a:p>
-            <a:pPr algn="l"/>
-            <a:r>
-              <a:rPr sz="4400" b="1">
-                <a:solidFill>
-                  <a:srgbClr val="1A1A1A"/>
+            <a:pPr algn="ctr"/>
+            <a:r>
+              <a:rPr sz="1400" b="1">
+                <a:solidFill>
+                  <a:srgbClr val="FF8762"/>
                 </a:solidFill>
                 <a:latin typeface="Yu Gothic"/>
               </a:rPr>
-              <a:t>③　共通点発表　【全体】</a:t>
-            </a:r>
-          </a:p>
-        </p:txBody>
-      </p:sp>
-      <p:sp>
-        <p:nvSpPr>
-          <p:cNvPr id="7" name="Rectangle 6"/>
+              <a:t>30〜50分</a:t>
+            </a:r>
+          </a:p>
+        </p:txBody>
+      </p:sp>
+      <p:sp>
+        <p:nvSpPr>
+          <p:cNvPr id="9" name="Rounded Rectangle 8"/>
           <p:cNvSpPr/>
           <p:nvPr/>
         </p:nvSpPr>
         <p:spPr>
           <a:xfrm>
-            <a:off x="9628632" y="164592"/>
-            <a:ext cx="2194560" cy="566928"/>
-          </a:xfrm>
-          <a:prstGeom prst="rect">
-            <a:avLst/>
+            <a:off x="502920" y="1850000"/>
+            <a:ext cx="11183112" cy="1300000"/>
+          </a:xfrm>
+          <a:prstGeom prst="roundRect">
+            <a:avLst>
+              <a:gd name="adj" fmla="val 10000"/>
+            </a:avLst>
           </a:prstGeom>
           <a:solidFill>
-            <a:srgbClr val="FF7200"/>
+            <a:srgbClr val="FFFFFF"/>
           </a:solidFill>
-          <a:ln>
-            <a:noFill/>
+          <a:ln w="15875">
+            <a:solidFill>
+              <a:srgbClr val="4E4454"/>
+            </a:solidFill>
           </a:ln>
+          <a:effectLst/>
         </p:spPr>
         <p:style>
           <a:lnRef idx="1">
@@ -7292,59 +8213,27 @@
       </p:sp>
       <p:sp>
         <p:nvSpPr>
-          <p:cNvPr id="8" name="TextBox 7"/>
-          <p:cNvSpPr txBox="1"/>
-          <p:nvPr/>
-        </p:nvSpPr>
-        <p:spPr>
-          <a:xfrm>
-            <a:off x="9674352" y="201168"/>
-            <a:ext cx="2103120" cy="502920"/>
-          </a:xfrm>
-          <a:prstGeom prst="rect">
-            <a:avLst/>
-          </a:prstGeom>
-          <a:noFill/>
-        </p:spPr>
-        <p:txBody>
-          <a:bodyPr wrap="square">
-            <a:spAutoFit/>
-          </a:bodyPr>
-          <a:lstStyle/>
-          <a:p>
-            <a:pPr algn="ctr"/>
-            <a:r>
-              <a:rPr sz="2400" b="1">
-                <a:solidFill>
-                  <a:srgbClr val="FFFFFF"/>
-                </a:solidFill>
-                <a:latin typeface="Yu Gothic"/>
-              </a:rPr>
-              <a:t>30〜50分</a:t>
-            </a:r>
-          </a:p>
-        </p:txBody>
-      </p:sp>
-      <p:sp>
-        <p:nvSpPr>
-          <p:cNvPr id="9" name="Rectangle 8"/>
+          <p:cNvPr id="10" name="Rounded Rectangle 9"/>
           <p:cNvSpPr/>
           <p:nvPr/>
         </p:nvSpPr>
         <p:spPr>
           <a:xfrm>
-            <a:off x="457200" y="1508760"/>
-            <a:ext cx="1828800" cy="1005840"/>
-          </a:xfrm>
-          <a:prstGeom prst="rect">
-            <a:avLst/>
+            <a:off x="650000" y="2220000"/>
+            <a:ext cx="1700000" cy="560000"/>
+          </a:xfrm>
+          <a:prstGeom prst="roundRect">
+            <a:avLst>
+              <a:gd name="adj" fmla="val 50000"/>
+            </a:avLst>
           </a:prstGeom>
           <a:solidFill>
-            <a:srgbClr val="FF7200"/>
+            <a:srgbClr val="FFCD34"/>
           </a:solidFill>
           <a:ln>
             <a:noFill/>
           </a:ln>
+          <a:effectLst/>
         </p:spPr>
         <p:style>
           <a:lnRef idx="1">
@@ -7370,14 +8259,14 @@
       </p:sp>
       <p:sp>
         <p:nvSpPr>
-          <p:cNvPr id="10" name="TextBox 9"/>
+          <p:cNvPr id="11" name="TextBox 10"/>
           <p:cNvSpPr txBox="1"/>
           <p:nvPr/>
         </p:nvSpPr>
         <p:spPr>
           <a:xfrm>
-            <a:off x="457200" y="1709928"/>
-            <a:ext cx="1828800" cy="640080"/>
+            <a:off x="650000" y="2220000"/>
+            <a:ext cx="1700000" cy="560000"/>
           </a:xfrm>
           <a:prstGeom prst="rect">
             <a:avLst/>
@@ -7385,16 +8274,16 @@
           <a:noFill/>
         </p:spPr>
         <p:txBody>
-          <a:bodyPr wrap="square">
+          <a:bodyPr wrap="square" anchor="ctr" lIns="0" rIns="0" tIns="0" bIns="0">
             <a:spAutoFit/>
           </a:bodyPr>
           <a:lstStyle/>
           <a:p>
             <a:pPr algn="ctr"/>
             <a:r>
-              <a:rPr sz="2600" b="1">
-                <a:solidFill>
-                  <a:srgbClr val="FFFFFF"/>
+              <a:rPr sz="1500" b="1">
+                <a:solidFill>
+                  <a:srgbClr val="4E4454"/>
                 </a:solidFill>
                 <a:latin typeface="Yu Gothic"/>
               </a:rPr>
@@ -7405,14 +8294,14 @@
       </p:sp>
       <p:sp>
         <p:nvSpPr>
-          <p:cNvPr id="11" name="TextBox 10"/>
+          <p:cNvPr id="12" name="TextBox 11"/>
           <p:cNvSpPr txBox="1"/>
           <p:nvPr/>
         </p:nvSpPr>
         <p:spPr>
           <a:xfrm>
-            <a:off x="2743200" y="1554480"/>
-            <a:ext cx="9079992" cy="1188720"/>
+            <a:off x="2700000" y="1850000"/>
+            <a:ext cx="8700000" cy="1300000"/>
           </a:xfrm>
           <a:prstGeom prst="rect">
             <a:avLst/>
@@ -7420,35 +8309,54 @@
           <a:noFill/>
         </p:spPr>
         <p:txBody>
-          <a:bodyPr wrap="square">
+          <a:bodyPr wrap="square" anchor="ctr" lIns="0" rIns="0" tIns="0" bIns="0">
             <a:spAutoFit/>
           </a:bodyPr>
           <a:lstStyle/>
           <a:p>
-            <a:pPr algn="l"/>
-            <a:r>
-              <a:rPr sz="2800" b="0">
-                <a:solidFill>
-                  <a:srgbClr val="1A1A1A"/>
+            <a:pPr algn="l">
+              <a:lnSpc>
+                <a:spcPct val="120000"/>
+              </a:lnSpc>
+            </a:pPr>
+            <a:r>
+              <a:rPr sz="1600" b="0">
+                <a:solidFill>
+                  <a:srgbClr val="4E4454"/>
                 </a:solidFill>
                 <a:latin typeface="Yu Gothic"/>
               </a:rPr>
-              <a:t>各グループから自慢の共通点を発表！
-面白いもの・意外なもの優先で</a:t>
-            </a:r>
-          </a:p>
-        </p:txBody>
-      </p:sp>
-      <p:sp>
-        <p:nvSpPr>
-          <p:cNvPr id="12" name="TextBox 11"/>
+              <a:t>各グループから自慢の共通点を発表！</a:t>
+            </a:r>
+          </a:p>
+          <a:p>
+            <a:pPr algn="l">
+              <a:lnSpc>
+                <a:spcPct val="120000"/>
+              </a:lnSpc>
+            </a:pPr>
+            <a:r>
+              <a:rPr sz="1600" b="0">
+                <a:solidFill>
+                  <a:srgbClr val="4E4454"/>
+                </a:solidFill>
+                <a:latin typeface="Yu Gothic"/>
+              </a:rPr>
+              <a:t>面白いもの・意外なもの優先で</a:t>
+            </a:r>
+          </a:p>
+        </p:txBody>
+      </p:sp>
+      <p:sp>
+        <p:nvSpPr>
+          <p:cNvPr id="13" name="TextBox 12"/>
           <p:cNvSpPr txBox="1"/>
           <p:nvPr/>
         </p:nvSpPr>
         <p:spPr>
           <a:xfrm>
-            <a:off x="804672" y="2542031"/>
-            <a:ext cx="457200" cy="411480"/>
+            <a:off x="502920" y="3150000"/>
+            <a:ext cx="11183112" cy="250000"/>
           </a:xfrm>
           <a:prstGeom prst="rect">
             <a:avLst/>
@@ -7456,16 +8364,16 @@
           <a:noFill/>
         </p:spPr>
         <p:txBody>
-          <a:bodyPr wrap="square">
+          <a:bodyPr wrap="square" anchor="ctr" lIns="0" rIns="0" tIns="0" bIns="0">
             <a:spAutoFit/>
           </a:bodyPr>
           <a:lstStyle/>
           <a:p>
             <a:pPr algn="ctr"/>
             <a:r>
-              <a:rPr sz="2200" b="0">
-                <a:solidFill>
-                  <a:srgbClr val="FF7200"/>
+              <a:rPr sz="1600" b="1">
+                <a:solidFill>
+                  <a:srgbClr val="FF8762"/>
                 </a:solidFill>
                 <a:latin typeface="Yu Gothic"/>
               </a:rPr>
@@ -7476,24 +8384,29 @@
       </p:sp>
       <p:sp>
         <p:nvSpPr>
-          <p:cNvPr id="13" name="Rectangle 12"/>
+          <p:cNvPr id="14" name="Rounded Rectangle 13"/>
           <p:cNvSpPr/>
           <p:nvPr/>
         </p:nvSpPr>
         <p:spPr>
           <a:xfrm>
-            <a:off x="2743200" y="2743200"/>
-            <a:ext cx="9125712" cy="12700"/>
-          </a:xfrm>
-          <a:prstGeom prst="rect">
-            <a:avLst/>
+            <a:off x="502920" y="3400000"/>
+            <a:ext cx="11183112" cy="1300000"/>
+          </a:xfrm>
+          <a:prstGeom prst="roundRect">
+            <a:avLst>
+              <a:gd name="adj" fmla="val 10000"/>
+            </a:avLst>
           </a:prstGeom>
           <a:solidFill>
-            <a:srgbClr val="F4F4F4"/>
+            <a:srgbClr val="FFFFFF"/>
           </a:solidFill>
-          <a:ln>
-            <a:noFill/>
+          <a:ln w="15875">
+            <a:solidFill>
+              <a:srgbClr val="4E4454"/>
+            </a:solidFill>
           </a:ln>
+          <a:effectLst/>
         </p:spPr>
         <p:style>
           <a:lnRef idx="1">
@@ -7519,24 +8432,27 @@
       </p:sp>
       <p:sp>
         <p:nvSpPr>
-          <p:cNvPr id="14" name="Rectangle 13"/>
+          <p:cNvPr id="15" name="Rounded Rectangle 14"/>
           <p:cNvSpPr/>
           <p:nvPr/>
         </p:nvSpPr>
         <p:spPr>
           <a:xfrm>
-            <a:off x="457200" y="3063240"/>
-            <a:ext cx="1828800" cy="1005840"/>
-          </a:xfrm>
-          <a:prstGeom prst="rect">
-            <a:avLst/>
+            <a:off x="650000" y="3770000"/>
+            <a:ext cx="1700000" cy="560000"/>
+          </a:xfrm>
+          <a:prstGeom prst="roundRect">
+            <a:avLst>
+              <a:gd name="adj" fmla="val 50000"/>
+            </a:avLst>
           </a:prstGeom>
           <a:solidFill>
-            <a:srgbClr val="FF7200"/>
+            <a:srgbClr val="FFCD34"/>
           </a:solidFill>
           <a:ln>
             <a:noFill/>
           </a:ln>
+          <a:effectLst/>
         </p:spPr>
         <p:style>
           <a:lnRef idx="1">
@@ -7562,14 +8478,14 @@
       </p:sp>
       <p:sp>
         <p:nvSpPr>
-          <p:cNvPr id="15" name="TextBox 14"/>
+          <p:cNvPr id="16" name="TextBox 15"/>
           <p:cNvSpPr txBox="1"/>
           <p:nvPr/>
         </p:nvSpPr>
         <p:spPr>
           <a:xfrm>
-            <a:off x="457200" y="3264408"/>
-            <a:ext cx="1828800" cy="640080"/>
+            <a:off x="650000" y="3770000"/>
+            <a:ext cx="1700000" cy="560000"/>
           </a:xfrm>
           <a:prstGeom prst="rect">
             <a:avLst/>
@@ -7577,16 +8493,16 @@
           <a:noFill/>
         </p:spPr>
         <p:txBody>
-          <a:bodyPr wrap="square">
+          <a:bodyPr wrap="square" anchor="ctr" lIns="0" rIns="0" tIns="0" bIns="0">
             <a:spAutoFit/>
           </a:bodyPr>
           <a:lstStyle/>
           <a:p>
             <a:pPr algn="ctr"/>
             <a:r>
-              <a:rPr sz="2600" b="1">
-                <a:solidFill>
-                  <a:srgbClr val="FFFFFF"/>
+              <a:rPr sz="1500" b="1">
+                <a:solidFill>
+                  <a:srgbClr val="4E4454"/>
                 </a:solidFill>
                 <a:latin typeface="Yu Gothic"/>
               </a:rPr>
@@ -7597,14 +8513,14 @@
       </p:sp>
       <p:sp>
         <p:nvSpPr>
-          <p:cNvPr id="16" name="TextBox 15"/>
+          <p:cNvPr id="17" name="TextBox 16"/>
           <p:cNvSpPr txBox="1"/>
           <p:nvPr/>
         </p:nvSpPr>
         <p:spPr>
           <a:xfrm>
-            <a:off x="2743200" y="3108960"/>
-            <a:ext cx="9079992" cy="1188720"/>
+            <a:off x="2700000" y="3400000"/>
+            <a:ext cx="8700000" cy="1300000"/>
           </a:xfrm>
           <a:prstGeom prst="rect">
             <a:avLst/>
@@ -7612,35 +8528,54 @@
           <a:noFill/>
         </p:spPr>
         <p:txBody>
-          <a:bodyPr wrap="square">
+          <a:bodyPr wrap="square" anchor="ctr" lIns="0" rIns="0" tIns="0" bIns="0">
             <a:spAutoFit/>
           </a:bodyPr>
           <a:lstStyle/>
           <a:p>
-            <a:pPr algn="l"/>
-            <a:r>
-              <a:rPr sz="2800" b="0">
-                <a:solidFill>
-                  <a:srgbClr val="1A1A1A"/>
+            <a:pPr algn="l">
+              <a:lnSpc>
+                <a:spcPct val="120000"/>
+              </a:lnSpc>
+            </a:pPr>
+            <a:r>
+              <a:rPr sz="1600" b="0">
+                <a:solidFill>
+                  <a:srgbClr val="4E4454"/>
                 </a:solidFill>
                 <a:latin typeface="Yu Gothic"/>
               </a:rPr>
-              <a:t>深掘りトーク
-「それって具体的にどういうこと？」</a:t>
-            </a:r>
-          </a:p>
-        </p:txBody>
-      </p:sp>
-      <p:sp>
-        <p:nvSpPr>
-          <p:cNvPr id="17" name="TextBox 16"/>
+              <a:t>深掘りトーク</a:t>
+            </a:r>
+          </a:p>
+          <a:p>
+            <a:pPr algn="l">
+              <a:lnSpc>
+                <a:spcPct val="120000"/>
+              </a:lnSpc>
+            </a:pPr>
+            <a:r>
+              <a:rPr sz="1600" b="0">
+                <a:solidFill>
+                  <a:srgbClr val="4E4454"/>
+                </a:solidFill>
+                <a:latin typeface="Yu Gothic"/>
+              </a:rPr>
+              <a:t>「それって具体的にどういうこと？」</a:t>
+            </a:r>
+          </a:p>
+        </p:txBody>
+      </p:sp>
+      <p:sp>
+        <p:nvSpPr>
+          <p:cNvPr id="18" name="TextBox 17"/>
           <p:cNvSpPr txBox="1"/>
           <p:nvPr/>
         </p:nvSpPr>
         <p:spPr>
           <a:xfrm>
-            <a:off x="804672" y="4096511"/>
-            <a:ext cx="457200" cy="411480"/>
+            <a:off x="502920" y="4700000"/>
+            <a:ext cx="11183112" cy="250000"/>
           </a:xfrm>
           <a:prstGeom prst="rect">
             <a:avLst/>
@@ -7648,16 +8583,16 @@
           <a:noFill/>
         </p:spPr>
         <p:txBody>
-          <a:bodyPr wrap="square">
+          <a:bodyPr wrap="square" anchor="ctr" lIns="0" rIns="0" tIns="0" bIns="0">
             <a:spAutoFit/>
           </a:bodyPr>
           <a:lstStyle/>
           <a:p>
             <a:pPr algn="ctr"/>
             <a:r>
-              <a:rPr sz="2200" b="0">
-                <a:solidFill>
-                  <a:srgbClr val="FF7200"/>
+              <a:rPr sz="1600" b="1">
+                <a:solidFill>
+                  <a:srgbClr val="FF8762"/>
                 </a:solidFill>
                 <a:latin typeface="Yu Gothic"/>
               </a:rPr>
@@ -7668,24 +8603,29 @@
       </p:sp>
       <p:sp>
         <p:nvSpPr>
-          <p:cNvPr id="18" name="Rectangle 17"/>
+          <p:cNvPr id="19" name="Rounded Rectangle 18"/>
           <p:cNvSpPr/>
           <p:nvPr/>
         </p:nvSpPr>
         <p:spPr>
           <a:xfrm>
-            <a:off x="2743200" y="4297680"/>
-            <a:ext cx="9125712" cy="12700"/>
-          </a:xfrm>
-          <a:prstGeom prst="rect">
-            <a:avLst/>
+            <a:off x="502920" y="4950000"/>
+            <a:ext cx="11183112" cy="1300000"/>
+          </a:xfrm>
+          <a:prstGeom prst="roundRect">
+            <a:avLst>
+              <a:gd name="adj" fmla="val 10000"/>
+            </a:avLst>
           </a:prstGeom>
           <a:solidFill>
-            <a:srgbClr val="F4F4F4"/>
+            <a:srgbClr val="FFFFFF"/>
           </a:solidFill>
-          <a:ln>
-            <a:noFill/>
+          <a:ln w="15875">
+            <a:solidFill>
+              <a:srgbClr val="4E4454"/>
+            </a:solidFill>
           </a:ln>
+          <a:effectLst/>
         </p:spPr>
         <p:style>
           <a:lnRef idx="1">
@@ -7711,24 +8651,27 @@
       </p:sp>
       <p:sp>
         <p:nvSpPr>
-          <p:cNvPr id="19" name="Rectangle 18"/>
+          <p:cNvPr id="20" name="Rounded Rectangle 19"/>
           <p:cNvSpPr/>
           <p:nvPr/>
         </p:nvSpPr>
         <p:spPr>
           <a:xfrm>
-            <a:off x="457200" y="4617720"/>
-            <a:ext cx="1828800" cy="1005840"/>
-          </a:xfrm>
-          <a:prstGeom prst="rect">
-            <a:avLst/>
+            <a:off x="650000" y="5320000"/>
+            <a:ext cx="1700000" cy="560000"/>
+          </a:xfrm>
+          <a:prstGeom prst="roundRect">
+            <a:avLst>
+              <a:gd name="adj" fmla="val 50000"/>
+            </a:avLst>
           </a:prstGeom>
           <a:solidFill>
-            <a:srgbClr val="FF7200"/>
+            <a:srgbClr val="FFCD34"/>
           </a:solidFill>
           <a:ln>
             <a:noFill/>
           </a:ln>
+          <a:effectLst/>
         </p:spPr>
         <p:style>
           <a:lnRef idx="1">
@@ -7754,14 +8697,14 @@
       </p:sp>
       <p:sp>
         <p:nvSpPr>
-          <p:cNvPr id="20" name="TextBox 19"/>
+          <p:cNvPr id="21" name="TextBox 20"/>
           <p:cNvSpPr txBox="1"/>
           <p:nvPr/>
         </p:nvSpPr>
         <p:spPr>
           <a:xfrm>
-            <a:off x="457200" y="4818888"/>
-            <a:ext cx="1828800" cy="640080"/>
+            <a:off x="650000" y="5320000"/>
+            <a:ext cx="1700000" cy="560000"/>
           </a:xfrm>
           <a:prstGeom prst="rect">
             <a:avLst/>
@@ -7769,16 +8712,16 @@
           <a:noFill/>
         </p:spPr>
         <p:txBody>
-          <a:bodyPr wrap="square">
+          <a:bodyPr wrap="square" anchor="ctr" lIns="0" rIns="0" tIns="0" bIns="0">
             <a:spAutoFit/>
           </a:bodyPr>
           <a:lstStyle/>
           <a:p>
             <a:pPr algn="ctr"/>
             <a:r>
-              <a:rPr sz="2600" b="1">
-                <a:solidFill>
-                  <a:srgbClr val="FFFFFF"/>
+              <a:rPr sz="1500" b="1">
+                <a:solidFill>
+                  <a:srgbClr val="4E4454"/>
                 </a:solidFill>
                 <a:latin typeface="Yu Gothic"/>
               </a:rPr>
@@ -7789,14 +8732,14 @@
       </p:sp>
       <p:sp>
         <p:nvSpPr>
-          <p:cNvPr id="21" name="TextBox 20"/>
+          <p:cNvPr id="22" name="TextBox 21"/>
           <p:cNvSpPr txBox="1"/>
           <p:nvPr/>
         </p:nvSpPr>
         <p:spPr>
           <a:xfrm>
-            <a:off x="2743200" y="4663440"/>
-            <a:ext cx="9079992" cy="1188720"/>
+            <a:off x="2700000" y="4950000"/>
+            <a:ext cx="8700000" cy="1300000"/>
           </a:xfrm>
           <a:prstGeom prst="rect">
             <a:avLst/>
@@ -7804,21 +8747,40 @@
           <a:noFill/>
         </p:spPr>
         <p:txBody>
-          <a:bodyPr wrap="square">
+          <a:bodyPr wrap="square" anchor="ctr" lIns="0" rIns="0" tIns="0" bIns="0">
             <a:spAutoFit/>
           </a:bodyPr>
           <a:lstStyle/>
           <a:p>
-            <a:pPr algn="l"/>
-            <a:r>
-              <a:rPr sz="2800" b="0">
-                <a:solidFill>
-                  <a:srgbClr val="1A1A1A"/>
+            <a:pPr algn="l">
+              <a:lnSpc>
+                <a:spcPct val="120000"/>
+              </a:lnSpc>
+            </a:pPr>
+            <a:r>
+              <a:rPr sz="1600" b="0">
+                <a:solidFill>
+                  <a:srgbClr val="4E4454"/>
                 </a:solidFill>
                 <a:latin typeface="Yu Gothic"/>
               </a:rPr>
-              <a:t>全グループ共通ランキング発表
-「実は全員に当てはまった共通点は…」</a:t>
+              <a:t>全グループ共通ランキング発表</a:t>
+            </a:r>
+          </a:p>
+          <a:p>
+            <a:pPr algn="l">
+              <a:lnSpc>
+                <a:spcPct val="120000"/>
+              </a:lnSpc>
+            </a:pPr>
+            <a:r>
+              <a:rPr sz="1600" b="0">
+                <a:solidFill>
+                  <a:srgbClr val="4E4454"/>
+                </a:solidFill>
+                <a:latin typeface="Yu Gothic"/>
+              </a:rPr>
+              <a:t>「実は全員に当てはまった共通点は…」</a:t>
             </a:r>
           </a:p>
         </p:txBody>
@@ -7856,11 +8818,12 @@
             <a:avLst/>
           </a:prstGeom>
           <a:solidFill>
-            <a:srgbClr val="FFFFFF"/>
+            <a:srgbClr val="FFFCF2"/>
           </a:solidFill>
           <a:ln>
             <a:noFill/>
           </a:ln>
+          <a:effectLst/>
         </p:spPr>
         <p:style>
           <a:lnRef idx="1">
@@ -7884,26 +8847,63 @@
           </a:p>
         </p:txBody>
       </p:sp>
-      <p:sp>
-        <p:nvSpPr>
-          <p:cNvPr id="3" name="Rectangle 2"/>
+      <p:cxnSp>
+        <p:nvCxnSpPr>
+          <p:cNvPr id="3" name="Connector 2"/>
+          <p:cNvCxnSpPr/>
+          <p:nvPr/>
+        </p:nvCxnSpPr>
+        <p:spPr>
+          <a:xfrm>
+            <a:off x="228600" y="0"/>
+            <a:ext cx="0" cy="6858000"/>
+          </a:xfrm>
+          <a:prstGeom prst="line">
+            <a:avLst/>
+          </a:prstGeom>
+          <a:ln w="12700">
+            <a:solidFill>
+              <a:srgbClr val="4E4454"/>
+            </a:solidFill>
+          </a:ln>
+          <a:effectLst/>
+        </p:spPr>
+        <p:style>
+          <a:lnRef idx="2">
+            <a:schemeClr val="accent1"/>
+          </a:lnRef>
+          <a:fillRef idx="0">
+            <a:schemeClr val="accent1"/>
+          </a:fillRef>
+          <a:effectRef idx="1">
+            <a:schemeClr val="accent1"/>
+          </a:effectRef>
+          <a:fontRef idx="minor">
+            <a:schemeClr val="tx1"/>
+          </a:fontRef>
+        </p:style>
+      </p:cxnSp>
+      <p:sp>
+        <p:nvSpPr>
+          <p:cNvPr id="4" name="Rectangle 3"/>
           <p:cNvSpPr/>
           <p:nvPr/>
         </p:nvSpPr>
         <p:spPr>
           <a:xfrm>
-            <a:off x="0" y="0"/>
-            <a:ext cx="201168" cy="6858000"/>
+            <a:off x="365760" y="502920"/>
+            <a:ext cx="4800600" cy="685800"/>
           </a:xfrm>
           <a:prstGeom prst="rect">
             <a:avLst/>
           </a:prstGeom>
           <a:solidFill>
-            <a:srgbClr val="FF7200"/>
+            <a:srgbClr val="4E4454"/>
           </a:solidFill>
           <a:ln>
             <a:noFill/>
           </a:ln>
+          <a:effectLst/>
         </p:spPr>
         <p:style>
           <a:lnRef idx="1">
@@ -7929,14 +8929,14 @@
       </p:sp>
       <p:sp>
         <p:nvSpPr>
-          <p:cNvPr id="4" name="Rectangle 3"/>
+          <p:cNvPr id="5" name="Rectangle 4"/>
           <p:cNvSpPr/>
           <p:nvPr/>
         </p:nvSpPr>
         <p:spPr>
           <a:xfrm>
-            <a:off x="0" y="0"/>
-            <a:ext cx="12188952" cy="1325880"/>
+            <a:off x="320040" y="457200"/>
+            <a:ext cx="4800600" cy="685800"/>
           </a:xfrm>
           <a:prstGeom prst="rect">
             <a:avLst/>
@@ -7944,9 +8944,12 @@
           <a:solidFill>
             <a:srgbClr val="FFFFFF"/>
           </a:solidFill>
-          <a:ln>
-            <a:noFill/>
+          <a:ln w="28575">
+            <a:solidFill>
+              <a:srgbClr val="4E4454"/>
+            </a:solidFill>
           </a:ln>
+          <a:effectLst/>
         </p:spPr>
         <p:style>
           <a:lnRef idx="1">
@@ -7972,24 +8975,64 @@
       </p:sp>
       <p:sp>
         <p:nvSpPr>
-          <p:cNvPr id="5" name="Rectangle 4"/>
+          <p:cNvPr id="6" name="TextBox 5"/>
+          <p:cNvSpPr txBox="1"/>
+          <p:nvPr/>
+        </p:nvSpPr>
+        <p:spPr>
+          <a:xfrm>
+            <a:off x="502920" y="457200"/>
+            <a:ext cx="4500000" cy="685800"/>
+          </a:xfrm>
+          <a:prstGeom prst="rect">
+            <a:avLst/>
+          </a:prstGeom>
+          <a:noFill/>
+        </p:spPr>
+        <p:txBody>
+          <a:bodyPr wrap="square" anchor="ctr" lIns="0" rIns="0" tIns="0" bIns="0">
+            <a:spAutoFit/>
+          </a:bodyPr>
+          <a:lstStyle/>
+          <a:p>
+            <a:pPr algn="l"/>
+            <a:r>
+              <a:rPr sz="2200" b="1">
+                <a:solidFill>
+                  <a:srgbClr val="4E4454"/>
+                </a:solidFill>
+                <a:latin typeface="Yu Gothic"/>
+              </a:rPr>
+              <a:t>④　会社説明</a:t>
+            </a:r>
+          </a:p>
+        </p:txBody>
+      </p:sp>
+      <p:sp>
+        <p:nvSpPr>
+          <p:cNvPr id="7" name="Rounded Rectangle 6"/>
           <p:cNvSpPr/>
           <p:nvPr/>
         </p:nvSpPr>
         <p:spPr>
           <a:xfrm>
-            <a:off x="0" y="1325880"/>
-            <a:ext cx="12188952" cy="38100"/>
-          </a:xfrm>
-          <a:prstGeom prst="rect">
-            <a:avLst/>
+            <a:off x="9994392" y="502920"/>
+            <a:ext cx="1828800" cy="502920"/>
+          </a:xfrm>
+          <a:prstGeom prst="roundRect">
+            <a:avLst>
+              <a:gd name="adj" fmla="val 50000"/>
+            </a:avLst>
           </a:prstGeom>
           <a:solidFill>
-            <a:srgbClr val="FF7200"/>
+            <a:srgbClr val="FFFFFF"/>
           </a:solidFill>
-          <a:ln>
-            <a:noFill/>
+          <a:ln w="19050">
+            <a:solidFill>
+              <a:srgbClr val="4E4454"/>
+            </a:solidFill>
           </a:ln>
+          <a:effectLst/>
         </p:spPr>
         <p:style>
           <a:lnRef idx="1">
@@ -8015,14 +9058,14 @@
       </p:sp>
       <p:sp>
         <p:nvSpPr>
-          <p:cNvPr id="6" name="TextBox 5"/>
+          <p:cNvPr id="8" name="TextBox 7"/>
           <p:cNvSpPr txBox="1"/>
           <p:nvPr/>
         </p:nvSpPr>
         <p:spPr>
           <a:xfrm>
-            <a:off x="457200" y="164592"/>
-            <a:ext cx="9262872" cy="1005840"/>
+            <a:off x="9994392" y="502920"/>
+            <a:ext cx="1828800" cy="502920"/>
           </a:xfrm>
           <a:prstGeom prst="rect">
             <a:avLst/>
@@ -8030,44 +9073,84 @@
           <a:noFill/>
         </p:spPr>
         <p:txBody>
-          <a:bodyPr wrap="square">
+          <a:bodyPr wrap="square" anchor="ctr" lIns="0" rIns="0" tIns="0" bIns="0">
             <a:spAutoFit/>
           </a:bodyPr>
           <a:lstStyle/>
           <a:p>
-            <a:pPr algn="l"/>
-            <a:r>
-              <a:rPr sz="4400" b="1">
-                <a:solidFill>
-                  <a:srgbClr val="1A1A1A"/>
+            <a:pPr algn="ctr"/>
+            <a:r>
+              <a:rPr sz="1400" b="1">
+                <a:solidFill>
+                  <a:srgbClr val="FF8762"/>
                 </a:solidFill>
                 <a:latin typeface="Yu Gothic"/>
               </a:rPr>
-              <a:t>④　会社説明</a:t>
-            </a:r>
-          </a:p>
-        </p:txBody>
-      </p:sp>
-      <p:sp>
-        <p:nvSpPr>
-          <p:cNvPr id="7" name="Rectangle 6"/>
+              <a:t>50〜55分</a:t>
+            </a:r>
+          </a:p>
+        </p:txBody>
+      </p:sp>
+      <p:sp>
+        <p:nvSpPr>
+          <p:cNvPr id="9" name="TextBox 8"/>
+          <p:cNvSpPr txBox="1"/>
+          <p:nvPr/>
+        </p:nvSpPr>
+        <p:spPr>
+          <a:xfrm>
+            <a:off x="502920" y="1750000"/>
+            <a:ext cx="11183112" cy="500000"/>
+          </a:xfrm>
+          <a:prstGeom prst="rect">
+            <a:avLst/>
+          </a:prstGeom>
+          <a:noFill/>
+        </p:spPr>
+        <p:txBody>
+          <a:bodyPr wrap="square" anchor="t" lIns="0" rIns="0" tIns="0" bIns="0">
+            <a:spAutoFit/>
+          </a:bodyPr>
+          <a:lstStyle/>
+          <a:p>
+            <a:pPr algn="ctr"/>
+            <a:r>
+              <a:rPr sz="2000" b="1">
+                <a:solidFill>
+                  <a:srgbClr val="4E4454"/>
+                </a:solidFill>
+                <a:latin typeface="Yu Gothic"/>
+              </a:rPr>
+              <a:t>覚えて帰ってほしい　3 つのキーワード</a:t>
+            </a:r>
+          </a:p>
+        </p:txBody>
+      </p:sp>
+      <p:sp>
+        <p:nvSpPr>
+          <p:cNvPr id="10" name="Rounded Rectangle 9"/>
           <p:cNvSpPr/>
           <p:nvPr/>
         </p:nvSpPr>
         <p:spPr>
           <a:xfrm>
-            <a:off x="9628632" y="164592"/>
-            <a:ext cx="2194560" cy="566928"/>
-          </a:xfrm>
-          <a:prstGeom prst="rect">
-            <a:avLst/>
+            <a:off x="502920" y="2500000"/>
+            <a:ext cx="3561037" cy="2300000"/>
+          </a:xfrm>
+          <a:prstGeom prst="roundRect">
+            <a:avLst>
+              <a:gd name="adj" fmla="val 8000"/>
+            </a:avLst>
           </a:prstGeom>
           <a:solidFill>
-            <a:srgbClr val="FF7200"/>
+            <a:srgbClr val="FFFFFF"/>
           </a:solidFill>
-          <a:ln>
-            <a:noFill/>
+          <a:ln w="19050">
+            <a:solidFill>
+              <a:srgbClr val="4E4454"/>
+            </a:solidFill>
           </a:ln>
+          <a:effectLst/>
         </p:spPr>
         <p:style>
           <a:lnRef idx="1">
@@ -8093,96 +9176,25 @@
       </p:sp>
       <p:sp>
         <p:nvSpPr>
-          <p:cNvPr id="8" name="TextBox 7"/>
-          <p:cNvSpPr txBox="1"/>
-          <p:nvPr/>
-        </p:nvSpPr>
-        <p:spPr>
-          <a:xfrm>
-            <a:off x="9674352" y="201168"/>
-            <a:ext cx="2103120" cy="502920"/>
-          </a:xfrm>
-          <a:prstGeom prst="rect">
-            <a:avLst/>
-          </a:prstGeom>
-          <a:noFill/>
-        </p:spPr>
-        <p:txBody>
-          <a:bodyPr wrap="square">
-            <a:spAutoFit/>
-          </a:bodyPr>
-          <a:lstStyle/>
-          <a:p>
-            <a:pPr algn="ctr"/>
-            <a:r>
-              <a:rPr sz="2400" b="1">
-                <a:solidFill>
-                  <a:srgbClr val="FFFFFF"/>
-                </a:solidFill>
-                <a:latin typeface="Yu Gothic"/>
-              </a:rPr>
-              <a:t>50〜55分</a:t>
-            </a:r>
-          </a:p>
-        </p:txBody>
-      </p:sp>
-      <p:sp>
-        <p:nvSpPr>
-          <p:cNvPr id="9" name="TextBox 8"/>
-          <p:cNvSpPr txBox="1"/>
-          <p:nvPr/>
-        </p:nvSpPr>
-        <p:spPr>
-          <a:xfrm>
-            <a:off x="457200" y="1463040"/>
-            <a:ext cx="11365992" cy="685800"/>
-          </a:xfrm>
-          <a:prstGeom prst="rect">
-            <a:avLst/>
-          </a:prstGeom>
-          <a:noFill/>
-        </p:spPr>
-        <p:txBody>
-          <a:bodyPr wrap="square">
-            <a:spAutoFit/>
-          </a:bodyPr>
-          <a:lstStyle/>
-          <a:p>
-            <a:pPr algn="ctr"/>
-            <a:r>
-              <a:rPr sz="2800" b="1">
-                <a:solidFill>
-                  <a:srgbClr val="FF7200"/>
-                </a:solidFill>
-                <a:latin typeface="Yu Gothic"/>
-              </a:rPr>
-              <a:t>覚えて帰ってほしい　3 つのキーワード</a:t>
-            </a:r>
-          </a:p>
-        </p:txBody>
-      </p:sp>
-      <p:sp>
-        <p:nvSpPr>
-          <p:cNvPr id="10" name="Rectangle 9"/>
+          <p:cNvPr id="11" name="Oval 10"/>
           <p:cNvSpPr/>
           <p:nvPr/>
         </p:nvSpPr>
         <p:spPr>
           <a:xfrm>
-            <a:off x="653796" y="2286000"/>
-            <a:ext cx="3474720" cy="3429000"/>
-          </a:xfrm>
-          <a:prstGeom prst="rect">
+            <a:off x="1983438" y="2700000"/>
+            <a:ext cx="600000" cy="600000"/>
+          </a:xfrm>
+          <a:prstGeom prst="ellipse">
             <a:avLst/>
           </a:prstGeom>
           <a:solidFill>
-            <a:srgbClr val="FFF0E0"/>
+            <a:srgbClr val="FF8762"/>
           </a:solidFill>
-          <a:ln w="31750">
-            <a:solidFill>
-              <a:srgbClr val="FF7200"/>
-            </a:solidFill>
+          <a:ln>
+            <a:noFill/>
           </a:ln>
+          <a:effectLst/>
         </p:spPr>
         <p:style>
           <a:lnRef idx="1">
@@ -8208,24 +9220,97 @@
       </p:sp>
       <p:sp>
         <p:nvSpPr>
-          <p:cNvPr id="11" name="Rectangle 10"/>
+          <p:cNvPr id="12" name="TextBox 11"/>
+          <p:cNvSpPr txBox="1"/>
+          <p:nvPr/>
+        </p:nvSpPr>
+        <p:spPr>
+          <a:xfrm>
+            <a:off x="1983438" y="2700000"/>
+            <a:ext cx="600000" cy="600000"/>
+          </a:xfrm>
+          <a:prstGeom prst="rect">
+            <a:avLst/>
+          </a:prstGeom>
+          <a:noFill/>
+        </p:spPr>
+        <p:txBody>
+          <a:bodyPr wrap="square" anchor="ctr" lIns="0" rIns="0" tIns="0" bIns="0">
+            <a:spAutoFit/>
+          </a:bodyPr>
+          <a:lstStyle/>
+          <a:p>
+            <a:pPr algn="ctr"/>
+            <a:r>
+              <a:rPr sz="2000" b="1">
+                <a:solidFill>
+                  <a:srgbClr val="FFFFFF"/>
+                </a:solidFill>
+                <a:latin typeface="Yu Gothic"/>
+              </a:rPr>
+              <a:t>1</a:t>
+            </a:r>
+          </a:p>
+        </p:txBody>
+      </p:sp>
+      <p:sp>
+        <p:nvSpPr>
+          <p:cNvPr id="13" name="TextBox 12"/>
+          <p:cNvSpPr txBox="1"/>
+          <p:nvPr/>
+        </p:nvSpPr>
+        <p:spPr>
+          <a:xfrm>
+            <a:off x="502920" y="3500000"/>
+            <a:ext cx="3561037" cy="500000"/>
+          </a:xfrm>
+          <a:prstGeom prst="rect">
+            <a:avLst/>
+          </a:prstGeom>
+          <a:noFill/>
+        </p:spPr>
+        <p:txBody>
+          <a:bodyPr wrap="square" anchor="t" lIns="0" rIns="0" tIns="0" bIns="0">
+            <a:spAutoFit/>
+          </a:bodyPr>
+          <a:lstStyle/>
+          <a:p>
+            <a:pPr algn="ctr"/>
+            <a:r>
+              <a:rPr sz="1800" b="1">
+                <a:solidFill>
+                  <a:srgbClr val="4E4454"/>
+                </a:solidFill>
+                <a:latin typeface="Yu Gothic"/>
+              </a:rPr>
+              <a:t>業界  NO.1</a:t>
+            </a:r>
+          </a:p>
+        </p:txBody>
+      </p:sp>
+      <p:sp>
+        <p:nvSpPr>
+          <p:cNvPr id="14" name="Rounded Rectangle 13"/>
           <p:cNvSpPr/>
           <p:nvPr/>
         </p:nvSpPr>
         <p:spPr>
           <a:xfrm>
-            <a:off x="653796" y="2286000"/>
-            <a:ext cx="3474720" cy="685800"/>
-          </a:xfrm>
-          <a:prstGeom prst="rect">
-            <a:avLst/>
+            <a:off x="702920" y="4100000"/>
+            <a:ext cx="3161037" cy="600000"/>
+          </a:xfrm>
+          <a:prstGeom prst="roundRect">
+            <a:avLst>
+              <a:gd name="adj" fmla="val 15000"/>
+            </a:avLst>
           </a:prstGeom>
           <a:solidFill>
-            <a:srgbClr val="FF7200"/>
+            <a:srgbClr val="FFF3CC"/>
           </a:solidFill>
           <a:ln>
             <a:noFill/>
           </a:ln>
+          <a:effectLst/>
         </p:spPr>
         <p:style>
           <a:lnRef idx="1">
@@ -8251,14 +9336,14 @@
       </p:sp>
       <p:sp>
         <p:nvSpPr>
-          <p:cNvPr id="12" name="TextBox 11"/>
+          <p:cNvPr id="15" name="TextBox 14"/>
           <p:cNvSpPr txBox="1"/>
           <p:nvPr/>
         </p:nvSpPr>
         <p:spPr>
           <a:xfrm>
-            <a:off x="763524" y="2322576"/>
-            <a:ext cx="457200" cy="594360"/>
+            <a:off x="702920" y="4100000"/>
+            <a:ext cx="3161037" cy="600000"/>
           </a:xfrm>
           <a:prstGeom prst="rect">
             <a:avLst/>
@@ -8266,79 +9351,69 @@
           <a:noFill/>
         </p:spPr>
         <p:txBody>
-          <a:bodyPr wrap="square">
+          <a:bodyPr wrap="square" anchor="ctr" lIns="0" rIns="0" tIns="0" bIns="0">
             <a:spAutoFit/>
           </a:bodyPr>
           <a:lstStyle/>
           <a:p>
-            <a:pPr algn="l"/>
-            <a:r>
-              <a:rPr sz="2600" b="1">
-                <a:solidFill>
-                  <a:srgbClr val="FFFFFF"/>
+            <a:pPr algn="ctr">
+              <a:lnSpc>
+                <a:spcPct val="110000"/>
+              </a:lnSpc>
+            </a:pPr>
+            <a:r>
+              <a:rPr sz="1300" b="0">
+                <a:solidFill>
+                  <a:srgbClr val="6B6272"/>
                 </a:solidFill>
                 <a:latin typeface="Yu Gothic"/>
               </a:rPr>
-              <a:t>1</a:t>
-            </a:r>
-          </a:p>
-        </p:txBody>
-      </p:sp>
-      <p:sp>
-        <p:nvSpPr>
-          <p:cNvPr id="13" name="TextBox 12"/>
-          <p:cNvSpPr txBox="1"/>
-          <p:nvPr/>
-        </p:nvSpPr>
-        <p:spPr>
-          <a:xfrm>
-            <a:off x="653796" y="3108960"/>
-            <a:ext cx="3474720" cy="1188720"/>
-          </a:xfrm>
-          <a:prstGeom prst="rect">
-            <a:avLst/>
-          </a:prstGeom>
-          <a:noFill/>
-        </p:spPr>
-        <p:txBody>
-          <a:bodyPr wrap="square">
-            <a:spAutoFit/>
-          </a:bodyPr>
-          <a:lstStyle/>
-          <a:p>
-            <a:pPr algn="ctr"/>
-            <a:r>
-              <a:rPr sz="3000" b="1">
-                <a:solidFill>
-                  <a:srgbClr val="1A1A1A"/>
+              <a:t>建設・インフラ特化</a:t>
+            </a:r>
+          </a:p>
+          <a:p>
+            <a:pPr algn="ctr">
+              <a:lnSpc>
+                <a:spcPct val="110000"/>
+              </a:lnSpc>
+            </a:pPr>
+            <a:r>
+              <a:rPr sz="1300" b="0">
+                <a:solidFill>
+                  <a:srgbClr val="6B6272"/>
                 </a:solidFill>
                 <a:latin typeface="Yu Gothic"/>
               </a:rPr>
-              <a:t>業界  NO.1</a:t>
-            </a:r>
-          </a:p>
-        </p:txBody>
-      </p:sp>
-      <p:sp>
-        <p:nvSpPr>
-          <p:cNvPr id="14" name="Rectangle 13"/>
+              <a:t>業界シェアトップクラス</a:t>
+            </a:r>
+          </a:p>
+        </p:txBody>
+      </p:sp>
+      <p:sp>
+        <p:nvSpPr>
+          <p:cNvPr id="16" name="Rounded Rectangle 15"/>
           <p:cNvSpPr/>
           <p:nvPr/>
         </p:nvSpPr>
         <p:spPr>
           <a:xfrm>
-            <a:off x="882396" y="4297680"/>
-            <a:ext cx="3017520" cy="25400"/>
-          </a:xfrm>
-          <a:prstGeom prst="rect">
-            <a:avLst/>
+            <a:off x="4313957" y="2500000"/>
+            <a:ext cx="3561037" cy="2300000"/>
+          </a:xfrm>
+          <a:prstGeom prst="roundRect">
+            <a:avLst>
+              <a:gd name="adj" fmla="val 8000"/>
+            </a:avLst>
           </a:prstGeom>
           <a:solidFill>
-            <a:srgbClr val="FF7200"/>
+            <a:srgbClr val="FFFFFF"/>
           </a:solidFill>
-          <a:ln>
-            <a:noFill/>
+          <a:ln w="19050">
+            <a:solidFill>
+              <a:srgbClr val="4E4454"/>
+            </a:solidFill>
           </a:ln>
+          <a:effectLst/>
         </p:spPr>
         <p:style>
           <a:lnRef idx="1">
@@ -8364,62 +9439,25 @@
       </p:sp>
       <p:sp>
         <p:nvSpPr>
-          <p:cNvPr id="15" name="TextBox 14"/>
-          <p:cNvSpPr txBox="1"/>
-          <p:nvPr/>
-        </p:nvSpPr>
-        <p:spPr>
-          <a:xfrm>
-            <a:off x="653796" y="4434840"/>
-            <a:ext cx="3474720" cy="1097280"/>
-          </a:xfrm>
-          <a:prstGeom prst="rect">
-            <a:avLst/>
-          </a:prstGeom>
-          <a:noFill/>
-        </p:spPr>
-        <p:txBody>
-          <a:bodyPr wrap="square">
-            <a:spAutoFit/>
-          </a:bodyPr>
-          <a:lstStyle/>
-          <a:p>
-            <a:pPr algn="ctr"/>
-            <a:r>
-              <a:rPr sz="2400" b="0">
-                <a:solidFill>
-                  <a:srgbClr val="555555"/>
-                </a:solidFill>
-                <a:latin typeface="Yu Gothic"/>
-              </a:rPr>
-              <a:t>建設・インフラ特化
-業界シェアトップクラス</a:t>
-            </a:r>
-          </a:p>
-        </p:txBody>
-      </p:sp>
-      <p:sp>
-        <p:nvSpPr>
-          <p:cNvPr id="16" name="Rectangle 15"/>
+          <p:cNvPr id="17" name="Oval 16"/>
           <p:cNvSpPr/>
           <p:nvPr/>
         </p:nvSpPr>
         <p:spPr>
           <a:xfrm>
-            <a:off x="4357116" y="2286000"/>
-            <a:ext cx="3474720" cy="3429000"/>
-          </a:xfrm>
-          <a:prstGeom prst="rect">
+            <a:off x="5794476" y="2700000"/>
+            <a:ext cx="600000" cy="600000"/>
+          </a:xfrm>
+          <a:prstGeom prst="ellipse">
             <a:avLst/>
           </a:prstGeom>
           <a:solidFill>
-            <a:srgbClr val="FFF0E0"/>
+            <a:srgbClr val="FF8762"/>
           </a:solidFill>
-          <a:ln w="31750">
-            <a:solidFill>
-              <a:srgbClr val="FF7200"/>
-            </a:solidFill>
+          <a:ln>
+            <a:noFill/>
           </a:ln>
+          <a:effectLst/>
         </p:spPr>
         <p:style>
           <a:lnRef idx="1">
@@ -8445,24 +9483,97 @@
       </p:sp>
       <p:sp>
         <p:nvSpPr>
-          <p:cNvPr id="17" name="Rectangle 16"/>
+          <p:cNvPr id="18" name="TextBox 17"/>
+          <p:cNvSpPr txBox="1"/>
+          <p:nvPr/>
+        </p:nvSpPr>
+        <p:spPr>
+          <a:xfrm>
+            <a:off x="5794476" y="2700000"/>
+            <a:ext cx="600000" cy="600000"/>
+          </a:xfrm>
+          <a:prstGeom prst="rect">
+            <a:avLst/>
+          </a:prstGeom>
+          <a:noFill/>
+        </p:spPr>
+        <p:txBody>
+          <a:bodyPr wrap="square" anchor="ctr" lIns="0" rIns="0" tIns="0" bIns="0">
+            <a:spAutoFit/>
+          </a:bodyPr>
+          <a:lstStyle/>
+          <a:p>
+            <a:pPr algn="ctr"/>
+            <a:r>
+              <a:rPr sz="2000" b="1">
+                <a:solidFill>
+                  <a:srgbClr val="FFFFFF"/>
+                </a:solidFill>
+                <a:latin typeface="Yu Gothic"/>
+              </a:rPr>
+              <a:t>2</a:t>
+            </a:r>
+          </a:p>
+        </p:txBody>
+      </p:sp>
+      <p:sp>
+        <p:nvSpPr>
+          <p:cNvPr id="19" name="TextBox 18"/>
+          <p:cNvSpPr txBox="1"/>
+          <p:nvPr/>
+        </p:nvSpPr>
+        <p:spPr>
+          <a:xfrm>
+            <a:off x="4313957" y="3500000"/>
+            <a:ext cx="3561037" cy="500000"/>
+          </a:xfrm>
+          <a:prstGeom prst="rect">
+            <a:avLst/>
+          </a:prstGeom>
+          <a:noFill/>
+        </p:spPr>
+        <p:txBody>
+          <a:bodyPr wrap="square" anchor="t" lIns="0" rIns="0" tIns="0" bIns="0">
+            <a:spAutoFit/>
+          </a:bodyPr>
+          <a:lstStyle/>
+          <a:p>
+            <a:pPr algn="ctr"/>
+            <a:r>
+              <a:rPr sz="1800" b="1">
+                <a:solidFill>
+                  <a:srgbClr val="4E4454"/>
+                </a:solidFill>
+                <a:latin typeface="Yu Gothic"/>
+              </a:rPr>
+              <a:t>本社勤め・選ぶ側</a:t>
+            </a:r>
+          </a:p>
+        </p:txBody>
+      </p:sp>
+      <p:sp>
+        <p:nvSpPr>
+          <p:cNvPr id="20" name="Rounded Rectangle 19"/>
           <p:cNvSpPr/>
           <p:nvPr/>
         </p:nvSpPr>
         <p:spPr>
           <a:xfrm>
-            <a:off x="4357116" y="2286000"/>
-            <a:ext cx="3474720" cy="685800"/>
-          </a:xfrm>
-          <a:prstGeom prst="rect">
-            <a:avLst/>
+            <a:off x="4513957" y="4100000"/>
+            <a:ext cx="3161037" cy="600000"/>
+          </a:xfrm>
+          <a:prstGeom prst="roundRect">
+            <a:avLst>
+              <a:gd name="adj" fmla="val 15000"/>
+            </a:avLst>
           </a:prstGeom>
           <a:solidFill>
-            <a:srgbClr val="FF7200"/>
+            <a:srgbClr val="FFF3CC"/>
           </a:solidFill>
           <a:ln>
             <a:noFill/>
           </a:ln>
+          <a:effectLst/>
         </p:spPr>
         <p:style>
           <a:lnRef idx="1">
@@ -8488,14 +9599,14 @@
       </p:sp>
       <p:sp>
         <p:nvSpPr>
-          <p:cNvPr id="18" name="TextBox 17"/>
+          <p:cNvPr id="21" name="TextBox 20"/>
           <p:cNvSpPr txBox="1"/>
           <p:nvPr/>
         </p:nvSpPr>
         <p:spPr>
           <a:xfrm>
-            <a:off x="4466844" y="2322576"/>
-            <a:ext cx="457200" cy="594360"/>
+            <a:off x="4513957" y="4100000"/>
+            <a:ext cx="3161037" cy="600000"/>
           </a:xfrm>
           <a:prstGeom prst="rect">
             <a:avLst/>
@@ -8503,79 +9614,69 @@
           <a:noFill/>
         </p:spPr>
         <p:txBody>
-          <a:bodyPr wrap="square">
+          <a:bodyPr wrap="square" anchor="ctr" lIns="0" rIns="0" tIns="0" bIns="0">
             <a:spAutoFit/>
           </a:bodyPr>
           <a:lstStyle/>
           <a:p>
-            <a:pPr algn="l"/>
-            <a:r>
-              <a:rPr sz="2600" b="1">
-                <a:solidFill>
-                  <a:srgbClr val="FFFFFF"/>
+            <a:pPr algn="ctr">
+              <a:lnSpc>
+                <a:spcPct val="110000"/>
+              </a:lnSpc>
+            </a:pPr>
+            <a:r>
+              <a:rPr sz="1300" b="0">
+                <a:solidFill>
+                  <a:srgbClr val="6B6272"/>
                 </a:solidFill>
                 <a:latin typeface="Yu Gothic"/>
               </a:rPr>
-              <a:t>2</a:t>
-            </a:r>
-          </a:p>
-        </p:txBody>
-      </p:sp>
-      <p:sp>
-        <p:nvSpPr>
-          <p:cNvPr id="19" name="TextBox 18"/>
-          <p:cNvSpPr txBox="1"/>
-          <p:nvPr/>
-        </p:nvSpPr>
-        <p:spPr>
-          <a:xfrm>
-            <a:off x="4357116" y="3108960"/>
-            <a:ext cx="3474720" cy="1188720"/>
-          </a:xfrm>
-          <a:prstGeom prst="rect">
-            <a:avLst/>
-          </a:prstGeom>
-          <a:noFill/>
-        </p:spPr>
-        <p:txBody>
-          <a:bodyPr wrap="square">
-            <a:spAutoFit/>
-          </a:bodyPr>
-          <a:lstStyle/>
-          <a:p>
-            <a:pPr algn="ctr"/>
-            <a:r>
-              <a:rPr sz="3000" b="1">
-                <a:solidFill>
-                  <a:srgbClr val="1A1A1A"/>
+              <a:t>コーディネーター職</a:t>
+            </a:r>
+          </a:p>
+          <a:p>
+            <a:pPr algn="ctr">
+              <a:lnSpc>
+                <a:spcPct val="110000"/>
+              </a:lnSpc>
+            </a:pPr>
+            <a:r>
+              <a:rPr sz="1300" b="0">
+                <a:solidFill>
+                  <a:srgbClr val="6B6272"/>
                 </a:solidFill>
                 <a:latin typeface="Yu Gothic"/>
               </a:rPr>
-              <a:t>本社勤め・選ぶ側</a:t>
-            </a:r>
-          </a:p>
-        </p:txBody>
-      </p:sp>
-      <p:sp>
-        <p:nvSpPr>
-          <p:cNvPr id="20" name="Rectangle 19"/>
+              <a:t>スーツで本社出社</a:t>
+            </a:r>
+          </a:p>
+        </p:txBody>
+      </p:sp>
+      <p:sp>
+        <p:nvSpPr>
+          <p:cNvPr id="22" name="Rounded Rectangle 21"/>
           <p:cNvSpPr/>
           <p:nvPr/>
         </p:nvSpPr>
         <p:spPr>
           <a:xfrm>
-            <a:off x="4585716" y="4297680"/>
-            <a:ext cx="3017520" cy="25400"/>
-          </a:xfrm>
-          <a:prstGeom prst="rect">
-            <a:avLst/>
+            <a:off x="8124994" y="2500000"/>
+            <a:ext cx="3561037" cy="2300000"/>
+          </a:xfrm>
+          <a:prstGeom prst="roundRect">
+            <a:avLst>
+              <a:gd name="adj" fmla="val 8000"/>
+            </a:avLst>
           </a:prstGeom>
           <a:solidFill>
-            <a:srgbClr val="FF7200"/>
+            <a:srgbClr val="FFFFFF"/>
           </a:solidFill>
-          <a:ln>
-            <a:noFill/>
+          <a:ln w="19050">
+            <a:solidFill>
+              <a:srgbClr val="4E4454"/>
+            </a:solidFill>
           </a:ln>
+          <a:effectLst/>
         </p:spPr>
         <p:style>
           <a:lnRef idx="1">
@@ -8601,62 +9702,25 @@
       </p:sp>
       <p:sp>
         <p:nvSpPr>
-          <p:cNvPr id="21" name="TextBox 20"/>
-          <p:cNvSpPr txBox="1"/>
-          <p:nvPr/>
-        </p:nvSpPr>
-        <p:spPr>
-          <a:xfrm>
-            <a:off x="4357116" y="4434840"/>
-            <a:ext cx="3474720" cy="1097280"/>
-          </a:xfrm>
-          <a:prstGeom prst="rect">
-            <a:avLst/>
-          </a:prstGeom>
-          <a:noFill/>
-        </p:spPr>
-        <p:txBody>
-          <a:bodyPr wrap="square">
-            <a:spAutoFit/>
-          </a:bodyPr>
-          <a:lstStyle/>
-          <a:p>
-            <a:pPr algn="ctr"/>
-            <a:r>
-              <a:rPr sz="2400" b="0">
-                <a:solidFill>
-                  <a:srgbClr val="555555"/>
-                </a:solidFill>
-                <a:latin typeface="Yu Gothic"/>
-              </a:rPr>
-              <a:t>コーディネーター職
-スーツで本社出社</a:t>
-            </a:r>
-          </a:p>
-        </p:txBody>
-      </p:sp>
-      <p:sp>
-        <p:nvSpPr>
-          <p:cNvPr id="22" name="Rectangle 21"/>
+          <p:cNvPr id="23" name="Oval 22"/>
           <p:cNvSpPr/>
           <p:nvPr/>
         </p:nvSpPr>
         <p:spPr>
           <a:xfrm>
-            <a:off x="8060436" y="2286000"/>
-            <a:ext cx="3474720" cy="3429000"/>
-          </a:xfrm>
-          <a:prstGeom prst="rect">
+            <a:off x="9605513" y="2700000"/>
+            <a:ext cx="600000" cy="600000"/>
+          </a:xfrm>
+          <a:prstGeom prst="ellipse">
             <a:avLst/>
           </a:prstGeom>
           <a:solidFill>
-            <a:srgbClr val="FFF0E0"/>
+            <a:srgbClr val="FF8762"/>
           </a:solidFill>
-          <a:ln w="31750">
-            <a:solidFill>
-              <a:srgbClr val="FF7200"/>
-            </a:solidFill>
+          <a:ln>
+            <a:noFill/>
           </a:ln>
+          <a:effectLst/>
         </p:spPr>
         <p:style>
           <a:lnRef idx="1">
@@ -8682,24 +9746,97 @@
       </p:sp>
       <p:sp>
         <p:nvSpPr>
-          <p:cNvPr id="23" name="Rectangle 22"/>
+          <p:cNvPr id="24" name="TextBox 23"/>
+          <p:cNvSpPr txBox="1"/>
+          <p:nvPr/>
+        </p:nvSpPr>
+        <p:spPr>
+          <a:xfrm>
+            <a:off x="9605513" y="2700000"/>
+            <a:ext cx="600000" cy="600000"/>
+          </a:xfrm>
+          <a:prstGeom prst="rect">
+            <a:avLst/>
+          </a:prstGeom>
+          <a:noFill/>
+        </p:spPr>
+        <p:txBody>
+          <a:bodyPr wrap="square" anchor="ctr" lIns="0" rIns="0" tIns="0" bIns="0">
+            <a:spAutoFit/>
+          </a:bodyPr>
+          <a:lstStyle/>
+          <a:p>
+            <a:pPr algn="ctr"/>
+            <a:r>
+              <a:rPr sz="2000" b="1">
+                <a:solidFill>
+                  <a:srgbClr val="FFFFFF"/>
+                </a:solidFill>
+                <a:latin typeface="Yu Gothic"/>
+              </a:rPr>
+              <a:t>3</a:t>
+            </a:r>
+          </a:p>
+        </p:txBody>
+      </p:sp>
+      <p:sp>
+        <p:nvSpPr>
+          <p:cNvPr id="25" name="TextBox 24"/>
+          <p:cNvSpPr txBox="1"/>
+          <p:nvPr/>
+        </p:nvSpPr>
+        <p:spPr>
+          <a:xfrm>
+            <a:off x="8124994" y="3500000"/>
+            <a:ext cx="3561037" cy="500000"/>
+          </a:xfrm>
+          <a:prstGeom prst="rect">
+            <a:avLst/>
+          </a:prstGeom>
+          <a:noFill/>
+        </p:spPr>
+        <p:txBody>
+          <a:bodyPr wrap="square" anchor="t" lIns="0" rIns="0" tIns="0" bIns="0">
+            <a:spAutoFit/>
+          </a:bodyPr>
+          <a:lstStyle/>
+          <a:p>
+            <a:pPr algn="ctr"/>
+            <a:r>
+              <a:rPr sz="1800" b="1">
+                <a:solidFill>
+                  <a:srgbClr val="4E4454"/>
+                </a:solidFill>
+                <a:latin typeface="Yu Gothic"/>
+              </a:rPr>
+              <a:t>大手グループ</a:t>
+            </a:r>
+          </a:p>
+        </p:txBody>
+      </p:sp>
+      <p:sp>
+        <p:nvSpPr>
+          <p:cNvPr id="26" name="Rounded Rectangle 25"/>
           <p:cNvSpPr/>
           <p:nvPr/>
         </p:nvSpPr>
         <p:spPr>
           <a:xfrm>
-            <a:off x="8060436" y="2286000"/>
-            <a:ext cx="3474720" cy="685800"/>
-          </a:xfrm>
-          <a:prstGeom prst="rect">
-            <a:avLst/>
+            <a:off x="8324994" y="4100000"/>
+            <a:ext cx="3161037" cy="600000"/>
+          </a:xfrm>
+          <a:prstGeom prst="roundRect">
+            <a:avLst>
+              <a:gd name="adj" fmla="val 15000"/>
+            </a:avLst>
           </a:prstGeom>
           <a:solidFill>
-            <a:srgbClr val="FF7200"/>
+            <a:srgbClr val="FFF3CC"/>
           </a:solidFill>
           <a:ln>
             <a:noFill/>
           </a:ln>
+          <a:effectLst/>
         </p:spPr>
         <p:style>
           <a:lnRef idx="1">
@@ -8725,14 +9862,14 @@
       </p:sp>
       <p:sp>
         <p:nvSpPr>
-          <p:cNvPr id="24" name="TextBox 23"/>
+          <p:cNvPr id="27" name="TextBox 26"/>
           <p:cNvSpPr txBox="1"/>
           <p:nvPr/>
         </p:nvSpPr>
         <p:spPr>
           <a:xfrm>
-            <a:off x="8170164" y="2322576"/>
-            <a:ext cx="457200" cy="594360"/>
+            <a:off x="8324994" y="4100000"/>
+            <a:ext cx="3161037" cy="600000"/>
           </a:xfrm>
           <a:prstGeom prst="rect">
             <a:avLst/>
@@ -8740,34 +9877,54 @@
           <a:noFill/>
         </p:spPr>
         <p:txBody>
-          <a:bodyPr wrap="square">
+          <a:bodyPr wrap="square" anchor="ctr" lIns="0" rIns="0" tIns="0" bIns="0">
             <a:spAutoFit/>
           </a:bodyPr>
           <a:lstStyle/>
           <a:p>
-            <a:pPr algn="l"/>
-            <a:r>
-              <a:rPr sz="2600" b="1">
-                <a:solidFill>
-                  <a:srgbClr val="FFFFFF"/>
+            <a:pPr algn="ctr">
+              <a:lnSpc>
+                <a:spcPct val="110000"/>
+              </a:lnSpc>
+            </a:pPr>
+            <a:r>
+              <a:rPr sz="1300" b="0">
+                <a:solidFill>
+                  <a:srgbClr val="6B6272"/>
                 </a:solidFill>
                 <a:latin typeface="Yu Gothic"/>
               </a:rPr>
-              <a:t>3</a:t>
-            </a:r>
-          </a:p>
-        </p:txBody>
-      </p:sp>
-      <p:sp>
-        <p:nvSpPr>
-          <p:cNvPr id="25" name="TextBox 24"/>
+              <a:t>安定した</a:t>
+            </a:r>
+          </a:p>
+          <a:p>
+            <a:pPr algn="ctr">
+              <a:lnSpc>
+                <a:spcPct val="110000"/>
+              </a:lnSpc>
+            </a:pPr>
+            <a:r>
+              <a:rPr sz="1300" b="0">
+                <a:solidFill>
+                  <a:srgbClr val="6B6272"/>
+                </a:solidFill>
+                <a:latin typeface="Yu Gothic"/>
+              </a:rPr>
+              <a:t>バックアップ体制</a:t>
+            </a:r>
+          </a:p>
+        </p:txBody>
+      </p:sp>
+      <p:sp>
+        <p:nvSpPr>
+          <p:cNvPr id="28" name="TextBox 27"/>
           <p:cNvSpPr txBox="1"/>
           <p:nvPr/>
         </p:nvSpPr>
         <p:spPr>
           <a:xfrm>
-            <a:off x="8060436" y="3108960"/>
-            <a:ext cx="3474720" cy="1188720"/>
+            <a:off x="502920" y="5150000"/>
+            <a:ext cx="11183112" cy="500000"/>
           </a:xfrm>
           <a:prstGeom prst="rect">
             <a:avLst/>
@@ -8775,130 +9932,16 @@
           <a:noFill/>
         </p:spPr>
         <p:txBody>
-          <a:bodyPr wrap="square">
+          <a:bodyPr wrap="square" anchor="t" lIns="0" rIns="0" tIns="0" bIns="0">
             <a:spAutoFit/>
           </a:bodyPr>
           <a:lstStyle/>
           <a:p>
             <a:pPr algn="ctr"/>
             <a:r>
-              <a:rPr sz="3000" b="1">
-                <a:solidFill>
-                  <a:srgbClr val="1A1A1A"/>
-                </a:solidFill>
-                <a:latin typeface="Yu Gothic"/>
-              </a:rPr>
-              <a:t>大手グループ</a:t>
-            </a:r>
-          </a:p>
-        </p:txBody>
-      </p:sp>
-      <p:sp>
-        <p:nvSpPr>
-          <p:cNvPr id="26" name="Rectangle 25"/>
-          <p:cNvSpPr/>
-          <p:nvPr/>
-        </p:nvSpPr>
-        <p:spPr>
-          <a:xfrm>
-            <a:off x="8289036" y="4297680"/>
-            <a:ext cx="3017520" cy="25400"/>
-          </a:xfrm>
-          <a:prstGeom prst="rect">
-            <a:avLst/>
-          </a:prstGeom>
-          <a:solidFill>
-            <a:srgbClr val="FF7200"/>
-          </a:solidFill>
-          <a:ln>
-            <a:noFill/>
-          </a:ln>
-        </p:spPr>
-        <p:style>
-          <a:lnRef idx="1">
-            <a:schemeClr val="accent1"/>
-          </a:lnRef>
-          <a:fillRef idx="3">
-            <a:schemeClr val="accent1"/>
-          </a:fillRef>
-          <a:effectRef idx="2">
-            <a:schemeClr val="accent1"/>
-          </a:effectRef>
-          <a:fontRef idx="minor">
-            <a:schemeClr val="lt1"/>
-          </a:fontRef>
-        </p:style>
-        <p:txBody>
-          <a:bodyPr rtlCol="0" anchor="ctr"/>
-          <a:lstStyle/>
-          <a:p>
-            <a:pPr algn="ctr"/>
-          </a:p>
-        </p:txBody>
-      </p:sp>
-      <p:sp>
-        <p:nvSpPr>
-          <p:cNvPr id="27" name="TextBox 26"/>
-          <p:cNvSpPr txBox="1"/>
-          <p:nvPr/>
-        </p:nvSpPr>
-        <p:spPr>
-          <a:xfrm>
-            <a:off x="8060436" y="4434840"/>
-            <a:ext cx="3474720" cy="1097280"/>
-          </a:xfrm>
-          <a:prstGeom prst="rect">
-            <a:avLst/>
-          </a:prstGeom>
-          <a:noFill/>
-        </p:spPr>
-        <p:txBody>
-          <a:bodyPr wrap="square">
-            <a:spAutoFit/>
-          </a:bodyPr>
-          <a:lstStyle/>
-          <a:p>
-            <a:pPr algn="ctr"/>
-            <a:r>
-              <a:rPr sz="2400" b="0">
-                <a:solidFill>
-                  <a:srgbClr val="555555"/>
-                </a:solidFill>
-                <a:latin typeface="Yu Gothic"/>
-              </a:rPr>
-              <a:t>安定した
-バックアップ体制</a:t>
-            </a:r>
-          </a:p>
-        </p:txBody>
-      </p:sp>
-      <p:sp>
-        <p:nvSpPr>
-          <p:cNvPr id="28" name="TextBox 27"/>
-          <p:cNvSpPr txBox="1"/>
-          <p:nvPr/>
-        </p:nvSpPr>
-        <p:spPr>
-          <a:xfrm>
-            <a:off x="457200" y="5897880"/>
-            <a:ext cx="11365992" cy="685800"/>
-          </a:xfrm>
-          <a:prstGeom prst="rect">
-            <a:avLst/>
-          </a:prstGeom>
-          <a:noFill/>
-        </p:spPr>
-        <p:txBody>
-          <a:bodyPr wrap="square">
-            <a:spAutoFit/>
-          </a:bodyPr>
-          <a:lstStyle/>
-          <a:p>
-            <a:pPr algn="ctr"/>
-            <a:r>
-              <a:rPr sz="2400" b="1">
-                <a:solidFill>
-                  <a:srgbClr val="FF7200"/>
+              <a:rPr sz="1500" b="1">
+                <a:solidFill>
+                  <a:srgbClr val="FF8762"/>
                 </a:solidFill>
                 <a:latin typeface="Yu Gothic"/>
               </a:rPr>
@@ -8940,11 +9983,12 @@
             <a:avLst/>
           </a:prstGeom>
           <a:solidFill>
-            <a:srgbClr val="FFFFFF"/>
+            <a:srgbClr val="FFFCF2"/>
           </a:solidFill>
           <a:ln>
             <a:noFill/>
           </a:ln>
+          <a:effectLst/>
         </p:spPr>
         <p:style>
           <a:lnRef idx="1">
@@ -8968,26 +10012,63 @@
           </a:p>
         </p:txBody>
       </p:sp>
-      <p:sp>
-        <p:nvSpPr>
-          <p:cNvPr id="3" name="Rectangle 2"/>
+      <p:cxnSp>
+        <p:nvCxnSpPr>
+          <p:cNvPr id="3" name="Connector 2"/>
+          <p:cNvCxnSpPr/>
+          <p:nvPr/>
+        </p:nvCxnSpPr>
+        <p:spPr>
+          <a:xfrm>
+            <a:off x="228600" y="0"/>
+            <a:ext cx="0" cy="6858000"/>
+          </a:xfrm>
+          <a:prstGeom prst="line">
+            <a:avLst/>
+          </a:prstGeom>
+          <a:ln w="12700">
+            <a:solidFill>
+              <a:srgbClr val="4E4454"/>
+            </a:solidFill>
+          </a:ln>
+          <a:effectLst/>
+        </p:spPr>
+        <p:style>
+          <a:lnRef idx="2">
+            <a:schemeClr val="accent1"/>
+          </a:lnRef>
+          <a:fillRef idx="0">
+            <a:schemeClr val="accent1"/>
+          </a:fillRef>
+          <a:effectRef idx="1">
+            <a:schemeClr val="accent1"/>
+          </a:effectRef>
+          <a:fontRef idx="minor">
+            <a:schemeClr val="tx1"/>
+          </a:fontRef>
+        </p:style>
+      </p:cxnSp>
+      <p:sp>
+        <p:nvSpPr>
+          <p:cNvPr id="4" name="Rectangle 3"/>
           <p:cNvSpPr/>
           <p:nvPr/>
         </p:nvSpPr>
         <p:spPr>
           <a:xfrm>
-            <a:off x="0" y="0"/>
-            <a:ext cx="201168" cy="6858000"/>
+            <a:off x="365760" y="502920"/>
+            <a:ext cx="4800600" cy="685800"/>
           </a:xfrm>
           <a:prstGeom prst="rect">
             <a:avLst/>
           </a:prstGeom>
           <a:solidFill>
-            <a:srgbClr val="FF7200"/>
+            <a:srgbClr val="4E4454"/>
           </a:solidFill>
           <a:ln>
             <a:noFill/>
           </a:ln>
+          <a:effectLst/>
         </p:spPr>
         <p:style>
           <a:lnRef idx="1">
@@ -9013,14 +10094,14 @@
       </p:sp>
       <p:sp>
         <p:nvSpPr>
-          <p:cNvPr id="4" name="Rectangle 3"/>
+          <p:cNvPr id="5" name="Rectangle 4"/>
           <p:cNvSpPr/>
           <p:nvPr/>
         </p:nvSpPr>
         <p:spPr>
           <a:xfrm>
-            <a:off x="0" y="0"/>
-            <a:ext cx="12188952" cy="1325880"/>
+            <a:off x="320040" y="457200"/>
+            <a:ext cx="4800600" cy="685800"/>
           </a:xfrm>
           <a:prstGeom prst="rect">
             <a:avLst/>
@@ -9028,9 +10109,12 @@
           <a:solidFill>
             <a:srgbClr val="FFFFFF"/>
           </a:solidFill>
-          <a:ln>
-            <a:noFill/>
+          <a:ln w="28575">
+            <a:solidFill>
+              <a:srgbClr val="4E4454"/>
+            </a:solidFill>
           </a:ln>
+          <a:effectLst/>
         </p:spPr>
         <p:style>
           <a:lnRef idx="1">
@@ -9056,24 +10140,64 @@
       </p:sp>
       <p:sp>
         <p:nvSpPr>
-          <p:cNvPr id="5" name="Rectangle 4"/>
+          <p:cNvPr id="6" name="TextBox 5"/>
+          <p:cNvSpPr txBox="1"/>
+          <p:nvPr/>
+        </p:nvSpPr>
+        <p:spPr>
+          <a:xfrm>
+            <a:off x="502920" y="457200"/>
+            <a:ext cx="4500000" cy="685800"/>
+          </a:xfrm>
+          <a:prstGeom prst="rect">
+            <a:avLst/>
+          </a:prstGeom>
+          <a:noFill/>
+        </p:spPr>
+        <p:txBody>
+          <a:bodyPr wrap="square" anchor="ctr" lIns="0" rIns="0" tIns="0" bIns="0">
+            <a:spAutoFit/>
+          </a:bodyPr>
+          <a:lstStyle/>
+          <a:p>
+            <a:pPr algn="l"/>
+            <a:r>
+              <a:rPr sz="2200" b="1">
+                <a:solidFill>
+                  <a:srgbClr val="4E4454"/>
+                </a:solidFill>
+                <a:latin typeface="Yu Gothic"/>
+              </a:rPr>
+              <a:t>⑤　クロージング</a:t>
+            </a:r>
+          </a:p>
+        </p:txBody>
+      </p:sp>
+      <p:sp>
+        <p:nvSpPr>
+          <p:cNvPr id="7" name="Rounded Rectangle 6"/>
           <p:cNvSpPr/>
           <p:nvPr/>
         </p:nvSpPr>
         <p:spPr>
           <a:xfrm>
-            <a:off x="0" y="1325880"/>
-            <a:ext cx="12188952" cy="38100"/>
-          </a:xfrm>
-          <a:prstGeom prst="rect">
-            <a:avLst/>
+            <a:off x="9994392" y="502920"/>
+            <a:ext cx="1828800" cy="502920"/>
+          </a:xfrm>
+          <a:prstGeom prst="roundRect">
+            <a:avLst>
+              <a:gd name="adj" fmla="val 50000"/>
+            </a:avLst>
           </a:prstGeom>
           <a:solidFill>
-            <a:srgbClr val="FF7200"/>
+            <a:srgbClr val="FFFFFF"/>
           </a:solidFill>
-          <a:ln>
-            <a:noFill/>
+          <a:ln w="19050">
+            <a:solidFill>
+              <a:srgbClr val="4E4454"/>
+            </a:solidFill>
           </a:ln>
+          <a:effectLst/>
         </p:spPr>
         <p:style>
           <a:lnRef idx="1">
@@ -9099,14 +10223,14 @@
       </p:sp>
       <p:sp>
         <p:nvSpPr>
-          <p:cNvPr id="6" name="TextBox 5"/>
+          <p:cNvPr id="8" name="TextBox 7"/>
           <p:cNvSpPr txBox="1"/>
           <p:nvPr/>
         </p:nvSpPr>
         <p:spPr>
           <a:xfrm>
-            <a:off x="457200" y="164592"/>
-            <a:ext cx="9262872" cy="1005840"/>
+            <a:off x="9994392" y="502920"/>
+            <a:ext cx="1828800" cy="502920"/>
           </a:xfrm>
           <a:prstGeom prst="rect">
             <a:avLst/>
@@ -9114,44 +10238,49 @@
           <a:noFill/>
         </p:spPr>
         <p:txBody>
-          <a:bodyPr wrap="square">
+          <a:bodyPr wrap="square" anchor="ctr" lIns="0" rIns="0" tIns="0" bIns="0">
             <a:spAutoFit/>
           </a:bodyPr>
           <a:lstStyle/>
           <a:p>
-            <a:pPr algn="l"/>
-            <a:r>
-              <a:rPr sz="4400" b="1">
-                <a:solidFill>
-                  <a:srgbClr val="1A1A1A"/>
+            <a:pPr algn="ctr"/>
+            <a:r>
+              <a:rPr sz="1400" b="1">
+                <a:solidFill>
+                  <a:srgbClr val="FF8762"/>
                 </a:solidFill>
                 <a:latin typeface="Yu Gothic"/>
               </a:rPr>
-              <a:t>⑤　クロージング</a:t>
-            </a:r>
-          </a:p>
-        </p:txBody>
-      </p:sp>
-      <p:sp>
-        <p:nvSpPr>
-          <p:cNvPr id="7" name="Rectangle 6"/>
+              <a:t>55〜60分</a:t>
+            </a:r>
+          </a:p>
+        </p:txBody>
+      </p:sp>
+      <p:sp>
+        <p:nvSpPr>
+          <p:cNvPr id="9" name="Rounded Rectangle 8"/>
           <p:cNvSpPr/>
           <p:nvPr/>
         </p:nvSpPr>
         <p:spPr>
           <a:xfrm>
-            <a:off x="9628632" y="164592"/>
-            <a:ext cx="2194560" cy="566928"/>
-          </a:xfrm>
-          <a:prstGeom prst="rect">
-            <a:avLst/>
+            <a:off x="502920" y="1850000"/>
+            <a:ext cx="11183112" cy="1100000"/>
+          </a:xfrm>
+          <a:prstGeom prst="roundRect">
+            <a:avLst>
+              <a:gd name="adj" fmla="val 10000"/>
+            </a:avLst>
           </a:prstGeom>
           <a:solidFill>
-            <a:srgbClr val="FF7200"/>
+            <a:srgbClr val="FFFFFF"/>
           </a:solidFill>
-          <a:ln>
-            <a:noFill/>
+          <a:ln w="15875">
+            <a:solidFill>
+              <a:srgbClr val="4E4454"/>
+            </a:solidFill>
           </a:ln>
+          <a:effectLst/>
         </p:spPr>
         <p:style>
           <a:lnRef idx="1">
@@ -9177,59 +10306,27 @@
       </p:sp>
       <p:sp>
         <p:nvSpPr>
-          <p:cNvPr id="8" name="TextBox 7"/>
-          <p:cNvSpPr txBox="1"/>
-          <p:nvPr/>
-        </p:nvSpPr>
-        <p:spPr>
-          <a:xfrm>
-            <a:off x="9674352" y="201168"/>
-            <a:ext cx="2103120" cy="502920"/>
-          </a:xfrm>
-          <a:prstGeom prst="rect">
-            <a:avLst/>
-          </a:prstGeom>
-          <a:noFill/>
-        </p:spPr>
-        <p:txBody>
-          <a:bodyPr wrap="square">
-            <a:spAutoFit/>
-          </a:bodyPr>
-          <a:lstStyle/>
-          <a:p>
-            <a:pPr algn="ctr"/>
-            <a:r>
-              <a:rPr sz="2400" b="1">
-                <a:solidFill>
-                  <a:srgbClr val="FFFFFF"/>
-                </a:solidFill>
-                <a:latin typeface="Yu Gothic"/>
-              </a:rPr>
-              <a:t>55〜60分</a:t>
-            </a:r>
-          </a:p>
-        </p:txBody>
-      </p:sp>
-      <p:sp>
-        <p:nvSpPr>
-          <p:cNvPr id="9" name="Rectangle 8"/>
+          <p:cNvPr id="10" name="Rounded Rectangle 9"/>
           <p:cNvSpPr/>
           <p:nvPr/>
         </p:nvSpPr>
         <p:spPr>
           <a:xfrm>
-            <a:off x="457200" y="1554480"/>
-            <a:ext cx="2103120" cy="1143000"/>
-          </a:xfrm>
-          <a:prstGeom prst="rect">
-            <a:avLst/>
+            <a:off x="650000" y="2120000"/>
+            <a:ext cx="2200000" cy="560000"/>
+          </a:xfrm>
+          <a:prstGeom prst="roundRect">
+            <a:avLst>
+              <a:gd name="adj" fmla="val 50000"/>
+            </a:avLst>
           </a:prstGeom>
           <a:solidFill>
-            <a:srgbClr val="FF7200"/>
+            <a:srgbClr val="FF8762"/>
           </a:solidFill>
           <a:ln>
             <a:noFill/>
           </a:ln>
+          <a:effectLst/>
         </p:spPr>
         <p:style>
           <a:lnRef idx="1">
@@ -9255,14 +10352,14 @@
       </p:sp>
       <p:sp>
         <p:nvSpPr>
-          <p:cNvPr id="10" name="TextBox 9"/>
+          <p:cNvPr id="11" name="TextBox 10"/>
           <p:cNvSpPr txBox="1"/>
           <p:nvPr/>
         </p:nvSpPr>
         <p:spPr>
           <a:xfrm>
-            <a:off x="457200" y="1801368"/>
-            <a:ext cx="2103120" cy="685800"/>
+            <a:off x="650000" y="2120000"/>
+            <a:ext cx="2200000" cy="560000"/>
           </a:xfrm>
           <a:prstGeom prst="rect">
             <a:avLst/>
@@ -9270,14 +10367,14 @@
           <a:noFill/>
         </p:spPr>
         <p:txBody>
-          <a:bodyPr wrap="square">
+          <a:bodyPr wrap="square" anchor="ctr" lIns="0" rIns="0" tIns="0" bIns="0">
             <a:spAutoFit/>
           </a:bodyPr>
           <a:lstStyle/>
           <a:p>
             <a:pPr algn="ctr"/>
             <a:r>
-              <a:rPr sz="2400" b="1">
+              <a:rPr sz="1500" b="1">
                 <a:solidFill>
                   <a:srgbClr val="FFFFFF"/>
                 </a:solidFill>
@@ -9290,14 +10387,14 @@
       </p:sp>
       <p:sp>
         <p:nvSpPr>
-          <p:cNvPr id="11" name="TextBox 10"/>
+          <p:cNvPr id="12" name="TextBox 11"/>
           <p:cNvSpPr txBox="1"/>
           <p:nvPr/>
         </p:nvSpPr>
         <p:spPr>
           <a:xfrm>
-            <a:off x="2834640" y="1600200"/>
-            <a:ext cx="8988552" cy="1143000"/>
+            <a:off x="3150000" y="1850000"/>
+            <a:ext cx="8200000" cy="1100000"/>
           </a:xfrm>
           <a:prstGeom prst="rect">
             <a:avLst/>
@@ -9305,45 +10402,69 @@
           <a:noFill/>
         </p:spPr>
         <p:txBody>
-          <a:bodyPr wrap="square">
+          <a:bodyPr wrap="square" anchor="ctr" lIns="0" rIns="0" tIns="0" bIns="0">
             <a:spAutoFit/>
           </a:bodyPr>
           <a:lstStyle/>
           <a:p>
-            <a:pPr algn="l"/>
-            <a:r>
-              <a:rPr sz="2800" b="0">
-                <a:solidFill>
-                  <a:srgbClr val="1A1A1A"/>
+            <a:pPr algn="l">
+              <a:lnSpc>
+                <a:spcPct val="120000"/>
+              </a:lnSpc>
+            </a:pPr>
+            <a:r>
+              <a:rPr sz="1500" b="0">
+                <a:solidFill>
+                  <a:srgbClr val="4E4454"/>
                 </a:solidFill>
                 <a:latin typeface="Yu Gothic"/>
               </a:rPr>
-              <a:t>次回：〇月〇日（対面）
-スケジュールに入れてください！</a:t>
-            </a:r>
-          </a:p>
-        </p:txBody>
-      </p:sp>
-      <p:sp>
-        <p:nvSpPr>
-          <p:cNvPr id="12" name="Rectangle 11"/>
+              <a:t>次回：〇月〇日（対面）</a:t>
+            </a:r>
+          </a:p>
+          <a:p>
+            <a:pPr algn="l">
+              <a:lnSpc>
+                <a:spcPct val="120000"/>
+              </a:lnSpc>
+            </a:pPr>
+            <a:r>
+              <a:rPr sz="1500" b="0">
+                <a:solidFill>
+                  <a:srgbClr val="4E4454"/>
+                </a:solidFill>
+                <a:latin typeface="Yu Gothic"/>
+              </a:rPr>
+              <a:t>スケジュールに入れてください！</a:t>
+            </a:r>
+          </a:p>
+        </p:txBody>
+      </p:sp>
+      <p:sp>
+        <p:nvSpPr>
+          <p:cNvPr id="13" name="Rounded Rectangle 12"/>
           <p:cNvSpPr/>
           <p:nvPr/>
         </p:nvSpPr>
         <p:spPr>
           <a:xfrm>
-            <a:off x="457200" y="2724912"/>
-            <a:ext cx="11503152" cy="12700"/>
-          </a:xfrm>
-          <a:prstGeom prst="rect">
-            <a:avLst/>
+            <a:off x="502920" y="3070000"/>
+            <a:ext cx="11183112" cy="1100000"/>
+          </a:xfrm>
+          <a:prstGeom prst="roundRect">
+            <a:avLst>
+              <a:gd name="adj" fmla="val 10000"/>
+            </a:avLst>
           </a:prstGeom>
           <a:solidFill>
-            <a:srgbClr val="F4F4F4"/>
+            <a:srgbClr val="FFFFFF"/>
           </a:solidFill>
-          <a:ln>
-            <a:noFill/>
+          <a:ln w="15875">
+            <a:solidFill>
+              <a:srgbClr val="4E4454"/>
+            </a:solidFill>
           </a:ln>
+          <a:effectLst/>
         </p:spPr>
         <p:style>
           <a:lnRef idx="1">
@@ -9369,24 +10490,27 @@
       </p:sp>
       <p:sp>
         <p:nvSpPr>
-          <p:cNvPr id="13" name="Rectangle 12"/>
+          <p:cNvPr id="14" name="Rounded Rectangle 13"/>
           <p:cNvSpPr/>
           <p:nvPr/>
         </p:nvSpPr>
         <p:spPr>
           <a:xfrm>
-            <a:off x="457200" y="3108960"/>
-            <a:ext cx="2103120" cy="1143000"/>
-          </a:xfrm>
-          <a:prstGeom prst="rect">
-            <a:avLst/>
+            <a:off x="650000" y="3340000"/>
+            <a:ext cx="2200000" cy="560000"/>
+          </a:xfrm>
+          <a:prstGeom prst="roundRect">
+            <a:avLst>
+              <a:gd name="adj" fmla="val 50000"/>
+            </a:avLst>
           </a:prstGeom>
           <a:solidFill>
-            <a:srgbClr val="FF7200"/>
+            <a:srgbClr val="FF8762"/>
           </a:solidFill>
           <a:ln>
             <a:noFill/>
           </a:ln>
+          <a:effectLst/>
         </p:spPr>
         <p:style>
           <a:lnRef idx="1">
@@ -9412,14 +10536,14 @@
       </p:sp>
       <p:sp>
         <p:nvSpPr>
-          <p:cNvPr id="14" name="TextBox 13"/>
+          <p:cNvPr id="15" name="TextBox 14"/>
           <p:cNvSpPr txBox="1"/>
           <p:nvPr/>
         </p:nvSpPr>
         <p:spPr>
           <a:xfrm>
-            <a:off x="457200" y="3355848"/>
-            <a:ext cx="2103120" cy="685800"/>
+            <a:off x="650000" y="3340000"/>
+            <a:ext cx="2200000" cy="560000"/>
           </a:xfrm>
           <a:prstGeom prst="rect">
             <a:avLst/>
@@ -9427,14 +10551,14 @@
           <a:noFill/>
         </p:spPr>
         <p:txBody>
-          <a:bodyPr wrap="square">
+          <a:bodyPr wrap="square" anchor="ctr" lIns="0" rIns="0" tIns="0" bIns="0">
             <a:spAutoFit/>
           </a:bodyPr>
           <a:lstStyle/>
           <a:p>
             <a:pPr algn="ctr"/>
             <a:r>
-              <a:rPr sz="2400" b="1">
+              <a:rPr sz="1500" b="1">
                 <a:solidFill>
                   <a:srgbClr val="FFFFFF"/>
                 </a:solidFill>
@@ -9447,14 +10571,14 @@
       </p:sp>
       <p:sp>
         <p:nvSpPr>
-          <p:cNvPr id="15" name="TextBox 14"/>
+          <p:cNvPr id="16" name="TextBox 15"/>
           <p:cNvSpPr txBox="1"/>
           <p:nvPr/>
         </p:nvSpPr>
         <p:spPr>
           <a:xfrm>
-            <a:off x="2834640" y="3154680"/>
-            <a:ext cx="8988552" cy="1143000"/>
+            <a:off x="3150000" y="3070000"/>
+            <a:ext cx="8200000" cy="1100000"/>
           </a:xfrm>
           <a:prstGeom prst="rect">
             <a:avLst/>
@@ -9462,45 +10586,69 @@
           <a:noFill/>
         </p:spPr>
         <p:txBody>
-          <a:bodyPr wrap="square">
+          <a:bodyPr wrap="square" anchor="ctr" lIns="0" rIns="0" tIns="0" bIns="0">
             <a:spAutoFit/>
           </a:bodyPr>
           <a:lstStyle/>
           <a:p>
-            <a:pPr algn="l"/>
-            <a:r>
-              <a:rPr sz="2800" b="0">
-                <a:solidFill>
-                  <a:srgbClr val="1A1A1A"/>
+            <a:pPr algn="l">
+              <a:lnSpc>
+                <a:spcPct val="120000"/>
+              </a:lnSpc>
+            </a:pPr>
+            <a:r>
+              <a:rPr sz="1500" b="0">
+                <a:solidFill>
+                  <a:srgbClr val="4E4454"/>
                 </a:solidFill>
                 <a:latin typeface="Yu Gothic"/>
               </a:rPr>
-              <a:t>チャットのURLから
-1分で回答できます</a:t>
-            </a:r>
-          </a:p>
-        </p:txBody>
-      </p:sp>
-      <p:sp>
-        <p:nvSpPr>
-          <p:cNvPr id="16" name="Rectangle 15"/>
+              <a:t>チャットのURLから</a:t>
+            </a:r>
+          </a:p>
+          <a:p>
+            <a:pPr algn="l">
+              <a:lnSpc>
+                <a:spcPct val="120000"/>
+              </a:lnSpc>
+            </a:pPr>
+            <a:r>
+              <a:rPr sz="1500" b="0">
+                <a:solidFill>
+                  <a:srgbClr val="4E4454"/>
+                </a:solidFill>
+                <a:latin typeface="Yu Gothic"/>
+              </a:rPr>
+              <a:t>1分で回答できます</a:t>
+            </a:r>
+          </a:p>
+        </p:txBody>
+      </p:sp>
+      <p:sp>
+        <p:nvSpPr>
+          <p:cNvPr id="17" name="Rounded Rectangle 16"/>
           <p:cNvSpPr/>
           <p:nvPr/>
         </p:nvSpPr>
         <p:spPr>
           <a:xfrm>
-            <a:off x="457200" y="4279392"/>
-            <a:ext cx="11503152" cy="12700"/>
-          </a:xfrm>
-          <a:prstGeom prst="rect">
-            <a:avLst/>
+            <a:off x="502920" y="4290000"/>
+            <a:ext cx="11183112" cy="1100000"/>
+          </a:xfrm>
+          <a:prstGeom prst="roundRect">
+            <a:avLst>
+              <a:gd name="adj" fmla="val 10000"/>
+            </a:avLst>
           </a:prstGeom>
           <a:solidFill>
-            <a:srgbClr val="F4F4F4"/>
+            <a:srgbClr val="FFFFFF"/>
           </a:solidFill>
-          <a:ln>
-            <a:noFill/>
+          <a:ln w="15875">
+            <a:solidFill>
+              <a:srgbClr val="4E4454"/>
+            </a:solidFill>
           </a:ln>
+          <a:effectLst/>
         </p:spPr>
         <p:style>
           <a:lnRef idx="1">
@@ -9526,24 +10674,27 @@
       </p:sp>
       <p:sp>
         <p:nvSpPr>
-          <p:cNvPr id="17" name="Rectangle 16"/>
+          <p:cNvPr id="18" name="Rounded Rectangle 17"/>
           <p:cNvSpPr/>
           <p:nvPr/>
         </p:nvSpPr>
         <p:spPr>
           <a:xfrm>
-            <a:off x="457200" y="4663440"/>
-            <a:ext cx="2103120" cy="1143000"/>
-          </a:xfrm>
-          <a:prstGeom prst="rect">
-            <a:avLst/>
+            <a:off x="650000" y="4560000"/>
+            <a:ext cx="2200000" cy="560000"/>
+          </a:xfrm>
+          <a:prstGeom prst="roundRect">
+            <a:avLst>
+              <a:gd name="adj" fmla="val 50000"/>
+            </a:avLst>
           </a:prstGeom>
           <a:solidFill>
-            <a:srgbClr val="FF7200"/>
+            <a:srgbClr val="FF8762"/>
           </a:solidFill>
           <a:ln>
             <a:noFill/>
           </a:ln>
+          <a:effectLst/>
         </p:spPr>
         <p:style>
           <a:lnRef idx="1">
@@ -9569,14 +10720,14 @@
       </p:sp>
       <p:sp>
         <p:nvSpPr>
-          <p:cNvPr id="18" name="TextBox 17"/>
+          <p:cNvPr id="19" name="TextBox 18"/>
           <p:cNvSpPr txBox="1"/>
           <p:nvPr/>
         </p:nvSpPr>
         <p:spPr>
           <a:xfrm>
-            <a:off x="457200" y="4910328"/>
-            <a:ext cx="2103120" cy="685800"/>
+            <a:off x="650000" y="4560000"/>
+            <a:ext cx="2200000" cy="560000"/>
           </a:xfrm>
           <a:prstGeom prst="rect">
             <a:avLst/>
@@ -9584,14 +10735,14 @@
           <a:noFill/>
         </p:spPr>
         <p:txBody>
-          <a:bodyPr wrap="square">
+          <a:bodyPr wrap="square" anchor="ctr" lIns="0" rIns="0" tIns="0" bIns="0">
             <a:spAutoFit/>
           </a:bodyPr>
           <a:lstStyle/>
           <a:p>
             <a:pPr algn="ctr"/>
             <a:r>
-              <a:rPr sz="2400" b="1">
+              <a:rPr sz="1500" b="1">
                 <a:solidFill>
                   <a:srgbClr val="FFFFFF"/>
                 </a:solidFill>
@@ -9604,14 +10755,14 @@
       </p:sp>
       <p:sp>
         <p:nvSpPr>
-          <p:cNvPr id="19" name="TextBox 18"/>
+          <p:cNvPr id="20" name="TextBox 19"/>
           <p:cNvSpPr txBox="1"/>
           <p:nvPr/>
         </p:nvSpPr>
         <p:spPr>
           <a:xfrm>
-            <a:off x="2834640" y="4709160"/>
-            <a:ext cx="8988552" cy="1143000"/>
+            <a:off x="3150000" y="4290000"/>
+            <a:ext cx="8200000" cy="1100000"/>
           </a:xfrm>
           <a:prstGeom prst="rect">
             <a:avLst/>
@@ -9619,35 +10770,54 @@
           <a:noFill/>
         </p:spPr>
         <p:txBody>
-          <a:bodyPr wrap="square">
+          <a:bodyPr wrap="square" anchor="ctr" lIns="0" rIns="0" tIns="0" bIns="0">
             <a:spAutoFit/>
           </a:bodyPr>
           <a:lstStyle/>
           <a:p>
-            <a:pPr algn="l"/>
-            <a:r>
-              <a:rPr sz="2800" b="0">
-                <a:solidFill>
-                  <a:srgbClr val="1A1A1A"/>
+            <a:pPr algn="l">
+              <a:lnSpc>
+                <a:spcPct val="120000"/>
+              </a:lnSpc>
+            </a:pPr>
+            <a:r>
+              <a:rPr sz="1500" b="0">
+                <a:solidFill>
+                  <a:srgbClr val="4E4454"/>
                 </a:solidFill>
                 <a:latin typeface="Yu Gothic"/>
               </a:rPr>
-              <a:t>何かあれば遠慮なく
-いつでも連絡してください</a:t>
-            </a:r>
-          </a:p>
-        </p:txBody>
-      </p:sp>
-      <p:sp>
-        <p:nvSpPr>
-          <p:cNvPr id="20" name="TextBox 19"/>
+              <a:t>何かあれば遠慮なく</a:t>
+            </a:r>
+          </a:p>
+          <a:p>
+            <a:pPr algn="l">
+              <a:lnSpc>
+                <a:spcPct val="120000"/>
+              </a:lnSpc>
+            </a:pPr>
+            <a:r>
+              <a:rPr sz="1500" b="0">
+                <a:solidFill>
+                  <a:srgbClr val="4E4454"/>
+                </a:solidFill>
+                <a:latin typeface="Yu Gothic"/>
+              </a:rPr>
+              <a:t>いつでも連絡してください</a:t>
+            </a:r>
+          </a:p>
+        </p:txBody>
+      </p:sp>
+      <p:sp>
+        <p:nvSpPr>
+          <p:cNvPr id="21" name="TextBox 20"/>
           <p:cNvSpPr txBox="1"/>
           <p:nvPr/>
         </p:nvSpPr>
         <p:spPr>
           <a:xfrm>
-            <a:off x="457200" y="6217920"/>
-            <a:ext cx="11365992" cy="502920"/>
+            <a:off x="502920" y="5750000"/>
+            <a:ext cx="11183112" cy="600000"/>
           </a:xfrm>
           <a:prstGeom prst="rect">
             <a:avLst/>
@@ -9655,16 +10825,16 @@
           <a:noFill/>
         </p:spPr>
         <p:txBody>
-          <a:bodyPr wrap="square">
+          <a:bodyPr wrap="square" anchor="ctr" lIns="0" rIns="0" tIns="0" bIns="0">
             <a:spAutoFit/>
           </a:bodyPr>
           <a:lstStyle/>
           <a:p>
             <a:pPr algn="ctr"/>
             <a:r>
-              <a:rPr sz="2800" b="1">
-                <a:solidFill>
-                  <a:srgbClr val="FF7200"/>
+              <a:rPr sz="2200" b="1">
+                <a:solidFill>
+                  <a:srgbClr val="4E4454"/>
                 </a:solidFill>
                 <a:latin typeface="Yu Gothic"/>
               </a:rPr>
